--- a/presentation/Project_presentation_template.pptx
+++ b/presentation/Project_presentation_template.pptx
@@ -3704,37 +3704,46 @@
             <p:ph type="ctrTitle"/>
           </p:nvPr>
         </p:nvSpPr>
-        <p:spPr/>
-        <p:txBody>
-          <a:bodyPr/>
-          <a:lstStyle/>
-          <a:p>
-            <a:pPr algn="l">
-              <a:defRPr sz="2800" b="1">
+        <p:spPr>
+          <a:xfrm>
+            <a:off x="1097280" y="1600200"/>
+            <a:ext cx="9994392" cy="1828800"/>
+          </a:xfrm>
+        </p:spPr>
+        <p:txBody>
+          <a:bodyPr wrap="square" anchor="ctr"/>
+          <a:lstStyle/>
+          <a:p>
+            <a:pPr algn="ctr">
+              <a:defRPr sz="3000" b="1">
                 <a:solidFill>
                   <a:srgbClr val="0F172A"/>
                 </a:solidFill>
-                <a:latin typeface="Calibri"/>
+                <a:latin typeface="Arial"/>
               </a:defRPr>
             </a:pPr>
             <a:r>
-              <a:t>Kolkata FoodLens: Restaurant Intelligence &amp; Municipal Food Safety Surveillance</a:t>
-            </a:r>
-          </a:p>
-          <a:p>
-            <a:pPr algn="l">
+              <a:t>Kolkata FoodLens: Restaurant Intelligence &amp;</a:t>
+            </a:r>
+            <a:br/>
+            <a:r>
+              <a:t>Municipal Food Safety Surveillance</a:t>
+            </a:r>
+          </a:p>
+          <a:p>
+            <a:pPr algn="ctr">
               <a:spcBef>
-                <a:spcPts val="600"/>
+                <a:spcPts val="800"/>
               </a:spcBef>
-              <a:defRPr sz="1500" i="1">
+              <a:defRPr sz="1600" i="1">
                 <a:solidFill>
                   <a:srgbClr val="0F766E"/>
                 </a:solidFill>
-                <a:latin typeface="Calibri"/>
+                <a:latin typeface="Arial"/>
               </a:defRPr>
             </a:pPr>
             <a:r>
-              <a:t>Aspect-Based Sentiment Analysis &amp; Multi-Criteria Decision Framework for Dining Intelligence</a:t>
+              <a:t>Aspect-Based Sentiment Analysis &amp; Multi-Criteria Decision Framework</a:t>
             </a:r>
           </a:p>
         </p:txBody>
@@ -3755,118 +3764,107 @@
             <p:ph type="subTitle" idx="1"/>
           </p:nvPr>
         </p:nvSpPr>
-        <p:spPr/>
-        <p:txBody>
-          <a:bodyPr>
+        <p:spPr>
+          <a:xfrm>
+            <a:off x="1371600" y="3749039"/>
+            <a:ext cx="9445752" cy="2103120"/>
+          </a:xfrm>
+        </p:spPr>
+        <p:txBody>
+          <a:bodyPr wrap="square" anchor="t">
             <a:noAutofit/>
           </a:bodyPr>
           <a:lstStyle/>
           <a:p>
-            <a:r>
-              <a:rPr b="1" sz="1300">
+            <a:pPr algn="ctr"/>
+            <a:r>
+              <a:rPr sz="1200" b="1">
                 <a:solidFill>
                   <a:srgbClr val="0F172A"/>
                 </a:solidFill>
+                <a:latin typeface="Arial"/>
               </a:rPr>
               <a:t>Author: </a:t>
             </a:r>
             <a:r>
-              <a:rPr sz="1300">
+              <a:rPr sz="1200" b="0">
                 <a:solidFill>
                   <a:srgbClr val="334155"/>
                 </a:solidFill>
-              </a:rPr>
-              <a:t>Tanim Naha (7th Semester, B.Tech CSE)</a:t>
-            </a:r>
-          </a:p>
-          <a:p>
-            <a:pPr>
+                <a:latin typeface="Arial"/>
+              </a:rPr>
+              <a:t>Tanim Naha  |  7th Semester, B.Tech CSE (Batch 2022–2026)</a:t>
+            </a:r>
+          </a:p>
+          <a:p>
+            <a:pPr algn="ctr">
               <a:spcBef>
                 <a:spcPts val="400"/>
               </a:spcBef>
             </a:pPr>
             <a:r>
-              <a:rPr b="1" sz="1200">
-                <a:solidFill>
-                  <a:srgbClr val="0F172A"/>
-                </a:solidFill>
-              </a:rPr>
-              <a:t>Course: </a:t>
-            </a:r>
-            <a:r>
-              <a:rPr sz="1200">
-                <a:solidFill>
-                  <a:srgbClr val="334155"/>
-                </a:solidFill>
-              </a:rPr>
-              <a:t>Minor Project (Course Code: ETMN100) — Batch 2022–2026</a:t>
-            </a:r>
-          </a:p>
-          <a:p>
-            <a:pPr>
+              <a:rPr sz="1200" b="1">
+                <a:solidFill>
+                  <a:srgbClr val="0F766E"/>
+                </a:solidFill>
+                <a:latin typeface="Arial"/>
+              </a:rPr>
+              <a:t>Minor Project (Course Code: ETMN100)</a:t>
+            </a:r>
+          </a:p>
+          <a:p>
+            <a:pPr algn="ctr">
               <a:spcBef>
                 <a:spcPts val="400"/>
               </a:spcBef>
             </a:pPr>
             <a:r>
-              <a:rPr b="1" sz="1200">
-                <a:solidFill>
-                  <a:srgbClr val="0F172A"/>
-                </a:solidFill>
-              </a:rPr>
-              <a:t>Department: </a:t>
-            </a:r>
-            <a:r>
-              <a:rPr sz="1200">
+              <a:rPr sz="1200" b="0">
                 <a:solidFill>
                   <a:srgbClr val="334155"/>
                 </a:solidFill>
+                <a:latin typeface="Arial"/>
               </a:rPr>
               <a:t>Amity School of Engineering &amp; Technology (ASET)</a:t>
             </a:r>
           </a:p>
           <a:p>
-            <a:pPr>
+            <a:pPr algn="ctr">
               <a:spcBef>
                 <a:spcPts val="400"/>
               </a:spcBef>
             </a:pPr>
             <a:r>
-              <a:rPr b="1" sz="1200">
+              <a:rPr sz="1200" b="1">
                 <a:solidFill>
                   <a:srgbClr val="0F172A"/>
                 </a:solidFill>
-              </a:rPr>
-              <a:t>Institution: </a:t>
-            </a:r>
-            <a:r>
-              <a:rPr sz="1200">
-                <a:solidFill>
-                  <a:srgbClr val="334155"/>
-                </a:solidFill>
+                <a:latin typeface="Arial"/>
               </a:rPr>
               <a:t>Amity University, Kolkata</a:t>
             </a:r>
           </a:p>
           <a:p>
-            <a:pPr>
+            <a:pPr algn="ctr">
               <a:spcBef>
-                <a:spcPts val="400"/>
+                <a:spcPts val="800"/>
               </a:spcBef>
             </a:pPr>
             <a:r>
-              <a:rPr b="1" sz="1200">
-                <a:solidFill>
-                  <a:srgbClr val="0F172A"/>
-                </a:solidFill>
-              </a:rPr>
-              <a:t>Supervision: </a:t>
-            </a:r>
-            <a:r>
-              <a:rPr sz="1200">
-                <a:solidFill>
-                  <a:srgbClr val="334155"/>
-                </a:solidFill>
+              <a:rPr sz="1200" b="1">
+                <a:solidFill>
+                  <a:srgbClr val="64748B"/>
+                </a:solidFill>
+                <a:latin typeface="Arial"/>
+              </a:rPr>
+              <a:t>Under the Supervision of: </a:t>
+            </a:r>
+            <a:r>
+              <a:rPr sz="1200" b="0">
+                <a:solidFill>
+                  <a:srgbClr val="64748B"/>
+                </a:solidFill>
+                <a:latin typeface="Arial"/>
               </a:rPr>
               <a:t>Department of Computer Science &amp; Engineering, Faculty Guide</a:t>
             </a:r>
@@ -3995,17 +3993,22 @@
             <p:ph type="title"/>
           </p:nvPr>
         </p:nvSpPr>
-        <p:spPr/>
-        <p:txBody>
-          <a:bodyPr/>
-          <a:lstStyle/>
-          <a:p>
-            <a:pPr>
+        <p:spPr>
+          <a:xfrm>
+            <a:off x="841248" y="411480"/>
+            <a:ext cx="10515600" cy="594360"/>
+          </a:xfrm>
+        </p:spPr>
+        <p:txBody>
+          <a:bodyPr anchor="ctr"/>
+          <a:lstStyle/>
+          <a:p>
+            <a:pPr algn="l">
               <a:defRPr sz="2400" b="1">
                 <a:solidFill>
                   <a:srgbClr val="0F172A"/>
                 </a:solidFill>
-                <a:latin typeface="Calibri"/>
+                <a:latin typeface="Arial"/>
               </a:defRPr>
             </a:pPr>
             <a:r>
@@ -4028,8 +4031,8 @@
         </p:nvSpPr>
         <p:spPr>
           <a:xfrm>
-            <a:off x="2558716" y="6482255"/>
-            <a:ext cx="7515726" cy="369332"/>
+            <a:off x="1371600" y="6419088"/>
+            <a:ext cx="9445752" cy="320040"/>
           </a:xfrm>
           <a:prstGeom prst="rect">
             <a:avLst/>
@@ -4037,14 +4040,21 @@
           <a:noFill/>
         </p:spPr>
         <p:txBody>
-          <a:bodyPr wrap="square" rtlCol="0">
+          <a:bodyPr wrap="square" rtlCol="0" anchor="ctr">
             <a:spAutoFit/>
           </a:bodyPr>
           <a:lstStyle/>
           <a:p>
-            <a:r>
-              <a:rPr lang="en-US" b="1" dirty="0"/>
-              <a:t>Amity School of engineering &amp; Technology, Amity University, Kolkata </a:t>
+            <a:pPr algn="ctr">
+              <a:defRPr sz="950" b="0">
+                <a:solidFill>
+                  <a:srgbClr val="64748B"/>
+                </a:solidFill>
+                <a:latin typeface="Arial"/>
+              </a:defRPr>
+            </a:pPr>
+            <a:r>
+              <a:t>Amity School of Engineering &amp; Technology, Amity University, Kolkata</a:t>
             </a:r>
           </a:p>
         </p:txBody>
@@ -4065,39 +4075,51 @@
             <p:ph type="sldNum" sz="quarter" idx="12"/>
           </p:nvPr>
         </p:nvSpPr>
-        <p:spPr/>
-        <p:txBody>
-          <a:bodyPr/>
-          <a:lstStyle/>
-          <a:p>
-            <a:fld id="{C9080329-36BA-448C-B0A7-FA1AF13B2E0F}" type="slidenum">
-              <a:rPr lang="en-US" smtClean="0"/>
+        <p:spPr>
+          <a:xfrm>
+            <a:off x="10515600" y="6419088"/>
+            <a:ext cx="841248" cy="320040"/>
+          </a:xfrm>
+        </p:spPr>
+        <p:txBody>
+          <a:bodyPr anchor="ctr"/>
+          <a:lstStyle/>
+          <a:p>
+            <a:pPr algn="r">
+              <a:defRPr sz="1000">
+                <a:solidFill>
+                  <a:srgbClr val="64748B"/>
+                </a:solidFill>
+                <a:latin typeface="Arial"/>
+              </a:defRPr>
+            </a:pPr>
+            <a:r>
               <a:t>10</a:t>
-            </a:fld>
+            </a:r>
             <a:endParaRPr lang="en-US"/>
           </a:p>
         </p:txBody>
       </p:sp>
       <p:sp>
         <p:nvSpPr>
-          <p:cNvPr id="6" name="Rounded Rectangle 5"/>
+          <p:cNvPr id="6" name="Rectangle 5"/>
           <p:cNvSpPr/>
           <p:nvPr/>
         </p:nvSpPr>
         <p:spPr>
           <a:xfrm>
-            <a:off x="841248" y="1645920"/>
-            <a:ext cx="10515600" cy="4389120"/>
+            <a:off x="841248" y="1078992"/>
+            <a:ext cx="10515600" cy="13716"/>
           </a:xfrm>
-          <a:prstGeom prst="roundRect">
+          <a:prstGeom prst="rect">
             <a:avLst/>
           </a:prstGeom>
           <a:solidFill>
-            <a:srgbClr val="F8FAFC"/>
+            <a:srgbClr val="CBD5E1"/>
           </a:solidFill>
-          <a:ln w="12700">
+          <a:ln w="6350">
             <a:solidFill>
-              <a:srgbClr val="E2E8F0"/>
+              <a:srgbClr val="CBD5E1"/>
             </a:solidFill>
           </a:ln>
         </p:spPr>
@@ -4116,18 +4138,102 @@
           </a:fontRef>
         </p:style>
         <p:txBody>
-          <a:bodyPr rtlCol="0" anchor="ctr" wrap="square" lIns="201168" rIns="201168" tIns="164592" bIns="164592"/>
+          <a:bodyPr rtlCol="0" anchor="ctr"/>
+          <a:lstStyle/>
+          <a:p>
+            <a:pPr algn="ctr"/>
+          </a:p>
+        </p:txBody>
+      </p:sp>
+      <p:sp>
+        <p:nvSpPr>
+          <p:cNvPr id="7" name="Rectangle 6"/>
+          <p:cNvSpPr/>
+          <p:nvPr/>
+        </p:nvSpPr>
+        <p:spPr>
+          <a:xfrm>
+            <a:off x="841248" y="1371600"/>
+            <a:ext cx="10515600" cy="36576"/>
+          </a:xfrm>
+          <a:prstGeom prst="rect">
+            <a:avLst/>
+          </a:prstGeom>
+          <a:solidFill>
+            <a:srgbClr val="1E293B"/>
+          </a:solidFill>
+          <a:ln>
+            <a:noFill/>
+          </a:ln>
+        </p:spPr>
+        <p:style>
+          <a:lnRef idx="1">
+            <a:schemeClr val="accent1"/>
+          </a:lnRef>
+          <a:fillRef idx="3">
+            <a:schemeClr val="accent1"/>
+          </a:fillRef>
+          <a:effectRef idx="2">
+            <a:schemeClr val="accent1"/>
+          </a:effectRef>
+          <a:fontRef idx="minor">
+            <a:schemeClr val="lt1"/>
+          </a:fontRef>
+        </p:style>
+        <p:txBody>
+          <a:bodyPr rtlCol="0" anchor="ctr"/>
+          <a:lstStyle/>
+          <a:p>
+            <a:pPr algn="ctr"/>
+          </a:p>
+        </p:txBody>
+      </p:sp>
+      <p:sp>
+        <p:nvSpPr>
+          <p:cNvPr id="8" name="Rectangle 7"/>
+          <p:cNvSpPr/>
+          <p:nvPr/>
+        </p:nvSpPr>
+        <p:spPr>
+          <a:xfrm>
+            <a:off x="841248" y="1463040"/>
+            <a:ext cx="10515600" cy="4663440"/>
+          </a:xfrm>
+          <a:prstGeom prst="rect">
+            <a:avLst/>
+          </a:prstGeom>
+          <a:noFill/>
+          <a:ln>
+            <a:noFill/>
+          </a:ln>
+        </p:spPr>
+        <p:style>
+          <a:lnRef idx="1">
+            <a:schemeClr val="accent1"/>
+          </a:lnRef>
+          <a:fillRef idx="3">
+            <a:schemeClr val="accent1"/>
+          </a:fillRef>
+          <a:effectRef idx="2">
+            <a:schemeClr val="accent1"/>
+          </a:effectRef>
+          <a:fontRef idx="minor">
+            <a:schemeClr val="lt1"/>
+          </a:fontRef>
+        </p:style>
+        <p:txBody>
+          <a:bodyPr rtlCol="0" anchor="t" wrap="square" lIns="0" rIns="0" tIns="0" bIns="0"/>
           <a:lstStyle/>
           <a:p>
             <a:pPr algn="ctr">
               <a:spcAft>
-                <a:spcPts val="600"/>
+                <a:spcPts val="1200"/>
               </a:spcAft>
               <a:defRPr sz="1300" b="1">
                 <a:solidFill>
                   <a:srgbClr val="1E293B"/>
                 </a:solidFill>
-                <a:latin typeface="Calibri"/>
+                <a:latin typeface="Arial"/>
               </a:defRPr>
             </a:pPr>
             <a:r>
@@ -4137,24 +4243,24 @@
           <a:p>
             <a:pPr>
               <a:spcAft>
-                <a:spcPts val="400"/>
+                <a:spcPts val="800"/>
               </a:spcAft>
             </a:pPr>
             <a:r>
-              <a:rPr sz="1100" b="1">
-                <a:solidFill>
-                  <a:srgbClr val="0F172A"/>
-                </a:solidFill>
-                <a:latin typeface="Calibri"/>
-              </a:rPr>
-              <a:t>• [1] Aspect-Based Sentiment Benchmark: </a:t>
-            </a:r>
-            <a:r>
-              <a:rPr sz="1100">
+              <a:rPr sz="1050" b="1">
+                <a:solidFill>
+                  <a:srgbClr val="0F766E"/>
+                </a:solidFill>
+                <a:latin typeface="Arial"/>
+              </a:rPr>
+              <a:t>[1]  </a:t>
+            </a:r>
+            <a:r>
+              <a:rPr sz="1000">
                 <a:solidFill>
                   <a:srgbClr val="334155"/>
                 </a:solidFill>
-                <a:latin typeface="Calibri"/>
+                <a:latin typeface="Arial"/>
               </a:rPr>
               <a:t>Pontiki, M., Galanis, D., Papageorgiou, H., et al. (2016). 'SemEval-2016 Task 5: Aspect Based Sentiment Analysis.' Proceedings of the 10th International Workshop on Semantic Evaluation, San Diego, CA, pp. 19–30.</a:t>
             </a:r>
@@ -4162,24 +4268,24 @@
           <a:p>
             <a:pPr>
               <a:spcAft>
-                <a:spcPts val="400"/>
+                <a:spcPts val="800"/>
               </a:spcAft>
             </a:pPr>
             <a:r>
-              <a:rPr sz="1100" b="1">
-                <a:solidFill>
-                  <a:srgbClr val="0F172A"/>
-                </a:solidFill>
-                <a:latin typeface="Calibri"/>
-              </a:rPr>
-              <a:t>• [2] Sentiment Analysis Foundations: </a:t>
-            </a:r>
-            <a:r>
-              <a:rPr sz="1100">
+              <a:rPr sz="1050" b="1">
+                <a:solidFill>
+                  <a:srgbClr val="0F766E"/>
+                </a:solidFill>
+                <a:latin typeface="Arial"/>
+              </a:rPr>
+              <a:t>[2]  </a:t>
+            </a:r>
+            <a:r>
+              <a:rPr sz="1000">
                 <a:solidFill>
                   <a:srgbClr val="334155"/>
                 </a:solidFill>
-                <a:latin typeface="Calibri"/>
+                <a:latin typeface="Arial"/>
               </a:rPr>
               <a:t>Pang, B., &amp; Lee, L. (2008). 'Opinion Mining and Sentiment Analysis.' Foundations and Trends in Information Retrieval, Vol. 2, No. 1–2, pp. 1–135.</a:t>
             </a:r>
@@ -4187,24 +4293,24 @@
           <a:p>
             <a:pPr>
               <a:spcAft>
-                <a:spcPts val="400"/>
+                <a:spcPts val="800"/>
               </a:spcAft>
             </a:pPr>
             <a:r>
-              <a:rPr sz="1100" b="1">
-                <a:solidFill>
-                  <a:srgbClr val="0F172A"/>
-                </a:solidFill>
-                <a:latin typeface="Calibri"/>
-              </a:rPr>
-              <a:t>• [3] Public Health NLP Surveillance: </a:t>
-            </a:r>
-            <a:r>
-              <a:rPr sz="1100">
+              <a:rPr sz="1050" b="1">
+                <a:solidFill>
+                  <a:srgbClr val="0F766E"/>
+                </a:solidFill>
+                <a:latin typeface="Arial"/>
+              </a:rPr>
+              <a:t>[3]  </a:t>
+            </a:r>
+            <a:r>
+              <a:rPr sz="1000">
                 <a:solidFill>
                   <a:srgbClr val="334155"/>
                 </a:solidFill>
-                <a:latin typeface="Calibri"/>
+                <a:latin typeface="Arial"/>
               </a:rPr>
               <a:t>Sancheti, A., Harris, J. K., Mansour, R., et al. (2019). 'Use of Machine Learning to Identify Foodborne Illness Complaints from Online Restaurant Reviews.' CDC Public Health Surveillance Reports, Vol. 68, No. 4, pp. 112–119.</a:t>
             </a:r>
@@ -4212,24 +4318,24 @@
           <a:p>
             <a:pPr>
               <a:spcAft>
-                <a:spcPts val="400"/>
+                <a:spcPts val="800"/>
               </a:spcAft>
             </a:pPr>
             <a:r>
-              <a:rPr sz="1100" b="1">
-                <a:solidFill>
-                  <a:srgbClr val="0F172A"/>
-                </a:solidFill>
-                <a:latin typeface="Calibri"/>
-              </a:rPr>
-              <a:t>• [4] Deep Contextual Language Models: </a:t>
-            </a:r>
-            <a:r>
-              <a:rPr sz="1100">
+              <a:rPr sz="1050" b="1">
+                <a:solidFill>
+                  <a:srgbClr val="0F766E"/>
+                </a:solidFill>
+                <a:latin typeface="Arial"/>
+              </a:rPr>
+              <a:t>[4]  </a:t>
+            </a:r>
+            <a:r>
+              <a:rPr sz="1000">
                 <a:solidFill>
                   <a:srgbClr val="334155"/>
                 </a:solidFill>
-                <a:latin typeface="Calibri"/>
+                <a:latin typeface="Arial"/>
               </a:rPr>
               <a:t>Devlin, J., Chang, M. W., Lee, K., &amp; Toutanova, K. (2019). 'BERT: Pre-training of Deep Bidirectional Transformers for Language Understanding.' Proceedings of NAACL-HLT, Minneapolis, MN, pp. 4171–4186.</a:t>
             </a:r>
@@ -4237,24 +4343,24 @@
           <a:p>
             <a:pPr>
               <a:spcAft>
-                <a:spcPts val="400"/>
+                <a:spcPts val="800"/>
               </a:spcAft>
             </a:pPr>
             <a:r>
-              <a:rPr sz="1100" b="1">
-                <a:solidFill>
-                  <a:srgbClr val="0F172A"/>
-                </a:solidFill>
-                <a:latin typeface="Calibri"/>
-              </a:rPr>
-              <a:t>• [5] DistilBERT Knowledge Distillation: </a:t>
-            </a:r>
-            <a:r>
-              <a:rPr sz="1100">
+              <a:rPr sz="1050" b="1">
+                <a:solidFill>
+                  <a:srgbClr val="0F766E"/>
+                </a:solidFill>
+                <a:latin typeface="Arial"/>
+              </a:rPr>
+              <a:t>[5]  </a:t>
+            </a:r>
+            <a:r>
+              <a:rPr sz="1000">
                 <a:solidFill>
                   <a:srgbClr val="334155"/>
                 </a:solidFill>
-                <a:latin typeface="Calibri"/>
+                <a:latin typeface="Arial"/>
               </a:rPr>
               <a:t>Sanh, V., Debut, L., Chaumond, J., &amp; Wolf, T. (2019). 'DistilBERT, a distilled version of BERT: smaller, faster, cheaper and lighter.' arXiv preprint arXiv:1910.01108.</a:t>
             </a:r>
@@ -4262,24 +4368,24 @@
           <a:p>
             <a:pPr>
               <a:spcAft>
-                <a:spcPts val="400"/>
+                <a:spcPts val="800"/>
               </a:spcAft>
             </a:pPr>
             <a:r>
-              <a:rPr sz="1100" b="1">
-                <a:solidFill>
-                  <a:srgbClr val="0F172A"/>
-                </a:solidFill>
-                <a:latin typeface="Calibri"/>
-              </a:rPr>
-              <a:t>• [6] FSSAI Statutory Food Safety Scheme: </a:t>
-            </a:r>
-            <a:r>
-              <a:rPr sz="1100">
+              <a:rPr sz="1050" b="1">
+                <a:solidFill>
+                  <a:srgbClr val="0F766E"/>
+                </a:solidFill>
+                <a:latin typeface="Arial"/>
+              </a:rPr>
+              <a:t>[6]  </a:t>
+            </a:r>
+            <a:r>
+              <a:rPr sz="1000">
                 <a:solidFill>
                   <a:srgbClr val="334155"/>
                 </a:solidFill>
-                <a:latin typeface="Calibri"/>
+                <a:latin typeface="Arial"/>
               </a:rPr>
               <a:t>Food Safety and Standards Authority of India (FSSAI). (2023). 'Food Safety and Standards (Clean Street Food Hub and Hygiene Rating Scheme) Regulations.' Ministry of Health and Family Welfare, New Delhi.</a:t>
             </a:r>
@@ -4287,24 +4393,24 @@
           <a:p>
             <a:pPr>
               <a:spcAft>
-                <a:spcPts val="400"/>
+                <a:spcPts val="800"/>
               </a:spcAft>
             </a:pPr>
             <a:r>
-              <a:rPr sz="1100" b="1">
-                <a:solidFill>
-                  <a:srgbClr val="0F172A"/>
-                </a:solidFill>
-                <a:latin typeface="Calibri"/>
-              </a:rPr>
-              <a:t>• [7] Kolkata Municipal Corporation Protocols: </a:t>
-            </a:r>
-            <a:r>
-              <a:rPr sz="1100">
+              <a:rPr sz="1050" b="1">
+                <a:solidFill>
+                  <a:srgbClr val="0F766E"/>
+                </a:solidFill>
+                <a:latin typeface="Arial"/>
+              </a:rPr>
+              <a:t>[7]  </a:t>
+            </a:r>
+            <a:r>
+              <a:rPr sz="1000">
                 <a:solidFill>
                   <a:srgbClr val="334155"/>
                 </a:solidFill>
-                <a:latin typeface="Calibri"/>
+                <a:latin typeface="Arial"/>
               </a:rPr>
               <a:t>Kolkata Municipal Corporation (KMC). (2024). 'Public Health &amp; Hygiene Assessment Guidelines for Commercial Food &amp; Beverage Operators.' Municipal Gazette, Kolkata, West Bengal.</a:t>
             </a:r>
@@ -4359,15 +4465,15 @@
         </p:nvSpPr>
         <p:spPr>
           <a:xfrm>
-            <a:off x="365975" y="389225"/>
-            <a:ext cx="8520600" cy="572700"/>
+            <a:off x="841248" y="411480"/>
+            <a:ext cx="10515600" cy="594360"/>
           </a:xfrm>
           <a:prstGeom prst="rect">
             <a:avLst/>
           </a:prstGeom>
         </p:spPr>
         <p:txBody>
-          <a:bodyPr spcFirstLastPara="1" wrap="square" lIns="91425" tIns="91425" rIns="91425" bIns="91425" anchor="t" anchorCtr="0">
+          <a:bodyPr spcFirstLastPara="1" wrap="square" lIns="91425" tIns="91425" rIns="91425" bIns="91425" anchor="ctr" anchorCtr="0">
             <a:normAutofit fontScale="90000"/>
           </a:bodyPr>
           <a:lstStyle/>
@@ -4384,7 +4490,7 @@
                 <a:solidFill>
                   <a:srgbClr val="0F172A"/>
                 </a:solidFill>
-                <a:latin typeface="Calibri"/>
+                <a:latin typeface="Arial"/>
               </a:defRPr>
             </a:pPr>
             <a:r>
@@ -4410,15 +4516,27 @@
             <p:ph type="sldNum" sz="quarter" idx="12"/>
           </p:nvPr>
         </p:nvSpPr>
-        <p:spPr/>
-        <p:txBody>
-          <a:bodyPr/>
-          <a:lstStyle/>
-          <a:p>
-            <a:fld id="{C9080329-36BA-448C-B0A7-FA1AF13B2E0F}" type="slidenum">
-              <a:rPr lang="en-US" smtClean="0"/>
+        <p:spPr>
+          <a:xfrm>
+            <a:off x="10515600" y="6419088"/>
+            <a:ext cx="841248" cy="320040"/>
+          </a:xfrm>
+        </p:spPr>
+        <p:txBody>
+          <a:bodyPr anchor="ctr"/>
+          <a:lstStyle/>
+          <a:p>
+            <a:pPr algn="r">
+              <a:defRPr sz="1000">
+                <a:solidFill>
+                  <a:srgbClr val="64748B"/>
+                </a:solidFill>
+                <a:latin typeface="Arial"/>
+              </a:defRPr>
+            </a:pPr>
+            <a:r>
               <a:t>2</a:t>
-            </a:fld>
+            </a:r>
             <a:endParaRPr lang="en-US"/>
           </a:p>
         </p:txBody>
@@ -4437,8 +4555,8 @@
         </p:nvSpPr>
         <p:spPr>
           <a:xfrm>
-            <a:off x="2558716" y="6482255"/>
-            <a:ext cx="7515726" cy="369332"/>
+            <a:off x="1371600" y="6419088"/>
+            <a:ext cx="9445752" cy="320040"/>
           </a:xfrm>
           <a:prstGeom prst="rect">
             <a:avLst/>
@@ -4446,38 +4564,45 @@
           <a:noFill/>
         </p:spPr>
         <p:txBody>
-          <a:bodyPr wrap="square" rtlCol="0">
+          <a:bodyPr wrap="square" rtlCol="0" anchor="ctr">
             <a:spAutoFit/>
           </a:bodyPr>
           <a:lstStyle/>
           <a:p>
-            <a:r>
-              <a:rPr lang="en-US" b="1" dirty="0"/>
-              <a:t>Amity School of engineering &amp; Technology, Amity University, Kolkata </a:t>
-            </a:r>
-          </a:p>
-        </p:txBody>
-      </p:sp>
-      <p:sp>
-        <p:nvSpPr>
-          <p:cNvPr id="8" name="Rounded Rectangle 7"/>
+            <a:pPr algn="ctr">
+              <a:defRPr sz="950" b="0">
+                <a:solidFill>
+                  <a:srgbClr val="64748B"/>
+                </a:solidFill>
+                <a:latin typeface="Arial"/>
+              </a:defRPr>
+            </a:pPr>
+            <a:r>
+              <a:t>Amity School of Engineering &amp; Technology, Amity University, Kolkata</a:t>
+            </a:r>
+          </a:p>
+        </p:txBody>
+      </p:sp>
+      <p:sp>
+        <p:nvSpPr>
+          <p:cNvPr id="8" name="Rectangle 7"/>
           <p:cNvSpPr/>
           <p:nvPr/>
         </p:nvSpPr>
         <p:spPr>
           <a:xfrm>
-            <a:off x="841248" y="1645920"/>
-            <a:ext cx="5120640" cy="4389120"/>
+            <a:off x="841248" y="1078992"/>
+            <a:ext cx="10515600" cy="13716"/>
           </a:xfrm>
-          <a:prstGeom prst="roundRect">
+          <a:prstGeom prst="rect">
             <a:avLst/>
           </a:prstGeom>
           <a:solidFill>
-            <a:srgbClr val="F8FAFC"/>
+            <a:srgbClr val="CBD5E1"/>
           </a:solidFill>
-          <a:ln w="12700">
+          <a:ln w="6350">
             <a:solidFill>
-              <a:srgbClr val="E2E8F0"/>
+              <a:srgbClr val="CBD5E1"/>
             </a:solidFill>
           </a:ln>
         </p:spPr>
@@ -4496,147 +4621,32 @@
           </a:fontRef>
         </p:style>
         <p:txBody>
-          <a:bodyPr rtlCol="0" anchor="ctr" wrap="square" lIns="201168" rIns="201168" tIns="164592" bIns="164592"/>
-          <a:lstStyle/>
-          <a:p>
-            <a:pPr algn="ctr">
-              <a:spcAft>
-                <a:spcPts val="600"/>
-              </a:spcAft>
-              <a:defRPr sz="1300" b="1">
-                <a:solidFill>
-                  <a:srgbClr val="0F766E"/>
-                </a:solidFill>
-                <a:latin typeface="Calibri"/>
-              </a:defRPr>
-            </a:pPr>
-            <a:r>
-              <a:t>PART I: PROBLEM DEFINITION &amp; METHODOLOGY</a:t>
-            </a:r>
-          </a:p>
-          <a:p>
-            <a:pPr>
-              <a:spcAft>
-                <a:spcPts val="400"/>
-              </a:spcAft>
-            </a:pPr>
-            <a:r>
-              <a:rPr sz="1100" b="1">
-                <a:solidFill>
-                  <a:srgbClr val="0F172A"/>
-                </a:solidFill>
-                <a:latin typeface="Calibri"/>
-              </a:rPr>
-              <a:t>• 1. Problem Statement / Motivation: </a:t>
-            </a:r>
-            <a:r>
-              <a:rPr sz="1100">
-                <a:solidFill>
-                  <a:srgbClr val="334155"/>
-                </a:solidFill>
-                <a:latin typeface="Calibri"/>
-              </a:rPr>
-              <a:t>Consumer dining information asymmetry, Kolkata municipal food safety drives, and multi-aspect review contradictions.</a:t>
-            </a:r>
-          </a:p>
-          <a:p>
-            <a:pPr>
-              <a:spcAft>
-                <a:spcPts val="400"/>
-              </a:spcAft>
-            </a:pPr>
-            <a:r>
-              <a:rPr sz="1100" b="1">
-                <a:solidFill>
-                  <a:srgbClr val="0F172A"/>
-                </a:solidFill>
-                <a:latin typeface="Calibri"/>
-              </a:rPr>
-              <a:t>• 2. Literature Survey / Review: </a:t>
-            </a:r>
-            <a:r>
-              <a:rPr sz="1100">
-                <a:solidFill>
-                  <a:srgbClr val="334155"/>
-                </a:solidFill>
-                <a:latin typeface="Calibri"/>
-              </a:rPr>
-              <a:t>Comparative synthesis of document sentiment, SemEval ABSA benchmarks, and CDC syndromic food safety surveillance.</a:t>
-            </a:r>
-          </a:p>
-          <a:p>
-            <a:pPr>
-              <a:spcAft>
-                <a:spcPts val="400"/>
-              </a:spcAft>
-            </a:pPr>
-            <a:r>
-              <a:rPr sz="1100" b="1">
-                <a:solidFill>
-                  <a:srgbClr val="0F172A"/>
-                </a:solidFill>
-                <a:latin typeface="Calibri"/>
-              </a:rPr>
-              <a:t>• 3. Proposed Methodology: </a:t>
-            </a:r>
-            <a:r>
-              <a:rPr sz="1100">
-                <a:solidFill>
-                  <a:srgbClr val="334155"/>
-                </a:solidFill>
-                <a:latin typeface="Calibri"/>
-              </a:rPr>
-              <a:t>End-to-end 4-stage pipeline: Dual corpora ingestion, text discourse clause segmentation, ABSA, and composite ranking.</a:t>
-            </a:r>
-          </a:p>
-          <a:p>
-            <a:pPr>
-              <a:spcAft>
-                <a:spcPts val="400"/>
-              </a:spcAft>
-            </a:pPr>
-            <a:r>
-              <a:rPr sz="1100" b="1">
-                <a:solidFill>
-                  <a:srgbClr val="0F172A"/>
-                </a:solidFill>
-                <a:latin typeface="Calibri"/>
-              </a:rPr>
-              <a:t>• 4. Experimental Set-up: </a:t>
-            </a:r>
-            <a:r>
-              <a:rPr sz="1100">
-                <a:solidFill>
-                  <a:srgbClr val="334155"/>
-                </a:solidFill>
-                <a:latin typeface="Calibri"/>
-              </a:rPr>
-              <a:t>13,144 Yelp review corpus, stratified 80/10/10 partitioning, class-weight balancing, and evaluation metrics.</a:t>
-            </a:r>
-          </a:p>
-        </p:txBody>
-      </p:sp>
-      <p:sp>
-        <p:nvSpPr>
-          <p:cNvPr id="9" name="Rounded Rectangle 8"/>
+          <a:bodyPr rtlCol="0" anchor="ctr"/>
+          <a:lstStyle/>
+          <a:p>
+            <a:pPr algn="ctr"/>
+          </a:p>
+        </p:txBody>
+      </p:sp>
+      <p:sp>
+        <p:nvSpPr>
+          <p:cNvPr id="9" name="Rectangle 8"/>
           <p:cNvSpPr/>
           <p:nvPr/>
         </p:nvSpPr>
         <p:spPr>
           <a:xfrm>
-            <a:off x="6236208" y="1645920"/>
-            <a:ext cx="5120640" cy="4389120"/>
+            <a:off x="841248" y="1371600"/>
+            <a:ext cx="5120640" cy="36576"/>
           </a:xfrm>
-          <a:prstGeom prst="roundRect">
+          <a:prstGeom prst="rect">
             <a:avLst/>
           </a:prstGeom>
           <a:solidFill>
-            <a:srgbClr val="F8FAFC"/>
+            <a:srgbClr val="0F766E"/>
           </a:solidFill>
-          <a:ln w="12700">
-            <a:solidFill>
-              <a:srgbClr val="E2E8F0"/>
-            </a:solidFill>
+          <a:ln>
+            <a:noFill/>
           </a:ln>
         </p:spPr>
         <p:style>
@@ -4654,18 +4664,296 @@
           </a:fontRef>
         </p:style>
         <p:txBody>
-          <a:bodyPr rtlCol="0" anchor="ctr" wrap="square" lIns="201168" rIns="201168" tIns="164592" bIns="164592"/>
+          <a:bodyPr rtlCol="0" anchor="ctr"/>
+          <a:lstStyle/>
+          <a:p>
+            <a:pPr algn="ctr"/>
+          </a:p>
+        </p:txBody>
+      </p:sp>
+      <p:sp>
+        <p:nvSpPr>
+          <p:cNvPr id="10" name="Rectangle 9"/>
+          <p:cNvSpPr/>
+          <p:nvPr/>
+        </p:nvSpPr>
+        <p:spPr>
+          <a:xfrm>
+            <a:off x="841248" y="1463040"/>
+            <a:ext cx="5120640" cy="4663440"/>
+          </a:xfrm>
+          <a:prstGeom prst="rect">
+            <a:avLst/>
+          </a:prstGeom>
+          <a:noFill/>
+          <a:ln>
+            <a:noFill/>
+          </a:ln>
+        </p:spPr>
+        <p:style>
+          <a:lnRef idx="1">
+            <a:schemeClr val="accent1"/>
+          </a:lnRef>
+          <a:fillRef idx="3">
+            <a:schemeClr val="accent1"/>
+          </a:fillRef>
+          <a:effectRef idx="2">
+            <a:schemeClr val="accent1"/>
+          </a:effectRef>
+          <a:fontRef idx="minor">
+            <a:schemeClr val="lt1"/>
+          </a:fontRef>
+        </p:style>
+        <p:txBody>
+          <a:bodyPr rtlCol="0" anchor="t" wrap="square" lIns="0" rIns="0" tIns="0" bIns="0"/>
           <a:lstStyle/>
           <a:p>
             <a:pPr algn="ctr">
               <a:spcAft>
-                <a:spcPts val="600"/>
+                <a:spcPts val="1400"/>
               </a:spcAft>
               <a:defRPr sz="1300" b="1">
                 <a:solidFill>
+                  <a:srgbClr val="0F766E"/>
+                </a:solidFill>
+                <a:latin typeface="Arial"/>
+              </a:defRPr>
+            </a:pPr>
+            <a:r>
+              <a:t>PART I: PROBLEM DEFINITION &amp; METHODOLOGY</a:t>
+            </a:r>
+          </a:p>
+          <a:p>
+            <a:pPr>
+              <a:spcBef>
+                <a:spcPts val="800"/>
+              </a:spcBef>
+            </a:pPr>
+            <a:r>
+              <a:rPr sz="1200" b="1">
+                <a:solidFill>
+                  <a:srgbClr val="0F172A"/>
+                </a:solidFill>
+                <a:latin typeface="Arial"/>
+              </a:rPr>
+              <a:t>01.  Problem Statement / Motivation</a:t>
+            </a:r>
+          </a:p>
+          <a:p>
+            <a:pPr>
+              <a:spcBef>
+                <a:spcPts val="200"/>
+              </a:spcBef>
+              <a:spcAft>
+                <a:spcPts val="800"/>
+              </a:spcAft>
+            </a:pPr>
+            <a:r>
+              <a:rPr sz="1050">
+                <a:solidFill>
+                  <a:srgbClr val="64748B"/>
+                </a:solidFill>
+                <a:latin typeface="Arial"/>
+              </a:rPr>
+              <a:t>     Dining information asymmetry, Kolkata food safety crackdowns, and multi-aspect review contradictions.</a:t>
+            </a:r>
+          </a:p>
+          <a:p>
+            <a:pPr>
+              <a:spcBef>
+                <a:spcPts val="800"/>
+              </a:spcBef>
+            </a:pPr>
+            <a:r>
+              <a:rPr sz="1200" b="1">
+                <a:solidFill>
+                  <a:srgbClr val="0F172A"/>
+                </a:solidFill>
+                <a:latin typeface="Arial"/>
+              </a:rPr>
+              <a:t>02.  Literature Survey / Review</a:t>
+            </a:r>
+          </a:p>
+          <a:p>
+            <a:pPr>
+              <a:spcBef>
+                <a:spcPts val="200"/>
+              </a:spcBef>
+              <a:spcAft>
+                <a:spcPts val="800"/>
+              </a:spcAft>
+            </a:pPr>
+            <a:r>
+              <a:rPr sz="1050">
+                <a:solidFill>
+                  <a:srgbClr val="64748B"/>
+                </a:solidFill>
+                <a:latin typeface="Arial"/>
+              </a:rPr>
+              <a:t>     Comparative review of document sentiment, SemEval ABSA benchmarks, and CDC syndromic food safety surveillance.</a:t>
+            </a:r>
+          </a:p>
+          <a:p>
+            <a:pPr>
+              <a:spcBef>
+                <a:spcPts val="800"/>
+              </a:spcBef>
+            </a:pPr>
+            <a:r>
+              <a:rPr sz="1200" b="1">
+                <a:solidFill>
+                  <a:srgbClr val="0F172A"/>
+                </a:solidFill>
+                <a:latin typeface="Arial"/>
+              </a:rPr>
+              <a:t>03.  Proposed Methodology</a:t>
+            </a:r>
+          </a:p>
+          <a:p>
+            <a:pPr>
+              <a:spcBef>
+                <a:spcPts val="200"/>
+              </a:spcBef>
+              <a:spcAft>
+                <a:spcPts val="800"/>
+              </a:spcAft>
+            </a:pPr>
+            <a:r>
+              <a:rPr sz="1050">
+                <a:solidFill>
+                  <a:srgbClr val="64748B"/>
+                </a:solidFill>
+                <a:latin typeface="Arial"/>
+              </a:rPr>
+              <a:t>     End-to-end 4-stage pipeline: Dual corpora ingestion, text discourse clause splitting, ABSA, and composite ranking.</a:t>
+            </a:r>
+          </a:p>
+          <a:p>
+            <a:pPr>
+              <a:spcBef>
+                <a:spcPts val="800"/>
+              </a:spcBef>
+            </a:pPr>
+            <a:r>
+              <a:rPr sz="1200" b="1">
+                <a:solidFill>
+                  <a:srgbClr val="0F172A"/>
+                </a:solidFill>
+                <a:latin typeface="Arial"/>
+              </a:rPr>
+              <a:t>04.  Experimental Set-up</a:t>
+            </a:r>
+          </a:p>
+          <a:p>
+            <a:pPr>
+              <a:spcBef>
+                <a:spcPts val="200"/>
+              </a:spcBef>
+              <a:spcAft>
+                <a:spcPts val="800"/>
+              </a:spcAft>
+            </a:pPr>
+            <a:r>
+              <a:rPr sz="1050">
+                <a:solidFill>
+                  <a:srgbClr val="64748B"/>
+                </a:solidFill>
+                <a:latin typeface="Arial"/>
+              </a:rPr>
+              <a:t>     13,144 Yelp review corpus, stratified 80/10/10 partitioning, class-weight balancing, and evaluation metrics.</a:t>
+            </a:r>
+          </a:p>
+        </p:txBody>
+      </p:sp>
+      <p:sp>
+        <p:nvSpPr>
+          <p:cNvPr id="11" name="Rectangle 10"/>
+          <p:cNvSpPr/>
+          <p:nvPr/>
+        </p:nvSpPr>
+        <p:spPr>
+          <a:xfrm>
+            <a:off x="6236208" y="1371600"/>
+            <a:ext cx="5120640" cy="36576"/>
+          </a:xfrm>
+          <a:prstGeom prst="rect">
+            <a:avLst/>
+          </a:prstGeom>
+          <a:solidFill>
+            <a:srgbClr val="1E40AF"/>
+          </a:solidFill>
+          <a:ln>
+            <a:noFill/>
+          </a:ln>
+        </p:spPr>
+        <p:style>
+          <a:lnRef idx="1">
+            <a:schemeClr val="accent1"/>
+          </a:lnRef>
+          <a:fillRef idx="3">
+            <a:schemeClr val="accent1"/>
+          </a:fillRef>
+          <a:effectRef idx="2">
+            <a:schemeClr val="accent1"/>
+          </a:effectRef>
+          <a:fontRef idx="minor">
+            <a:schemeClr val="lt1"/>
+          </a:fontRef>
+        </p:style>
+        <p:txBody>
+          <a:bodyPr rtlCol="0" anchor="ctr"/>
+          <a:lstStyle/>
+          <a:p>
+            <a:pPr algn="ctr"/>
+          </a:p>
+        </p:txBody>
+      </p:sp>
+      <p:sp>
+        <p:nvSpPr>
+          <p:cNvPr id="12" name="Rectangle 11"/>
+          <p:cNvSpPr/>
+          <p:nvPr/>
+        </p:nvSpPr>
+        <p:spPr>
+          <a:xfrm>
+            <a:off x="6236208" y="1463040"/>
+            <a:ext cx="5120640" cy="4663440"/>
+          </a:xfrm>
+          <a:prstGeom prst="rect">
+            <a:avLst/>
+          </a:prstGeom>
+          <a:noFill/>
+          <a:ln>
+            <a:noFill/>
+          </a:ln>
+        </p:spPr>
+        <p:style>
+          <a:lnRef idx="1">
+            <a:schemeClr val="accent1"/>
+          </a:lnRef>
+          <a:fillRef idx="3">
+            <a:schemeClr val="accent1"/>
+          </a:fillRef>
+          <a:effectRef idx="2">
+            <a:schemeClr val="accent1"/>
+          </a:effectRef>
+          <a:fontRef idx="minor">
+            <a:schemeClr val="lt1"/>
+          </a:fontRef>
+        </p:style>
+        <p:txBody>
+          <a:bodyPr rtlCol="0" anchor="t" wrap="square" lIns="0" rIns="0" tIns="0" bIns="0"/>
+          <a:lstStyle/>
+          <a:p>
+            <a:pPr algn="ctr">
+              <a:spcAft>
+                <a:spcPts val="1400"/>
+              </a:spcAft>
+              <a:defRPr sz="1300" b="1">
+                <a:solidFill>
                   <a:srgbClr val="1E40AF"/>
                 </a:solidFill>
-                <a:latin typeface="Calibri"/>
+                <a:latin typeface="Arial"/>
               </a:defRPr>
             </a:pPr>
             <a:r>
@@ -4674,102 +4962,142 @@
           </a:p>
           <a:p>
             <a:pPr>
+              <a:spcBef>
+                <a:spcPts val="800"/>
+              </a:spcBef>
+            </a:pPr>
+            <a:r>
+              <a:rPr sz="1200" b="1">
+                <a:solidFill>
+                  <a:srgbClr val="0F172A"/>
+                </a:solidFill>
+                <a:latin typeface="Arial"/>
+              </a:rPr>
+              <a:t>05.  Results and Discussion</a:t>
+            </a:r>
+          </a:p>
+          <a:p>
+            <a:pPr>
+              <a:spcBef>
+                <a:spcPts val="200"/>
+              </a:spcBef>
               <a:spcAft>
-                <a:spcPts val="400"/>
+                <a:spcPts val="800"/>
               </a:spcAft>
             </a:pPr>
             <a:r>
-              <a:rPr sz="1100" b="1">
+              <a:rPr sz="1050">
+                <a:solidFill>
+                  <a:srgbClr val="64748B"/>
+                </a:solidFill>
+                <a:latin typeface="Arial"/>
+              </a:rPr>
+              <a:t>     Benchmarking 4 architectures, Macro-F1 analysis, minority negative recall, and sentiment vs safety divergence.</a:t>
+            </a:r>
+          </a:p>
+          <a:p>
+            <a:pPr>
+              <a:spcBef>
+                <a:spcPts val="800"/>
+              </a:spcBef>
+            </a:pPr>
+            <a:r>
+              <a:rPr sz="1200" b="1">
                 <a:solidFill>
                   <a:srgbClr val="0F172A"/>
                 </a:solidFill>
-                <a:latin typeface="Calibri"/>
-              </a:rPr>
-              <a:t>• 5. Results and Discussion: </a:t>
-            </a:r>
-            <a:r>
-              <a:rPr sz="1100">
-                <a:solidFill>
-                  <a:srgbClr val="334155"/>
-                </a:solidFill>
-                <a:latin typeface="Calibri"/>
-              </a:rPr>
-              <a:t>Benchmarking 4 architectures, Macro-F1 analysis, minority negative recall, and customer sentiment vs safety divergence.</a:t>
+                <a:latin typeface="Arial"/>
+              </a:rPr>
+              <a:t>06.  Future Direction Towards Major Project</a:t>
             </a:r>
           </a:p>
           <a:p>
             <a:pPr>
+              <a:spcBef>
+                <a:spcPts val="200"/>
+              </a:spcBef>
               <a:spcAft>
-                <a:spcPts val="400"/>
+                <a:spcPts val="800"/>
               </a:spcAft>
             </a:pPr>
             <a:r>
-              <a:rPr sz="1100" b="1">
+              <a:rPr sz="1050">
+                <a:solidFill>
+                  <a:srgbClr val="64748B"/>
+                </a:solidFill>
+                <a:latin typeface="Arial"/>
+              </a:rPr>
+              <a:t>     Integration with live KMC inspection portals, code-mixed Bengali NLP (Banglish), and Explainable AI (XAI).</a:t>
+            </a:r>
+          </a:p>
+          <a:p>
+            <a:pPr>
+              <a:spcBef>
+                <a:spcPts val="800"/>
+              </a:spcBef>
+            </a:pPr>
+            <a:r>
+              <a:rPr sz="1200" b="1">
                 <a:solidFill>
                   <a:srgbClr val="0F172A"/>
                 </a:solidFill>
-                <a:latin typeface="Calibri"/>
-              </a:rPr>
-              <a:t>• 6. Future Direction Towards Major Project: </a:t>
-            </a:r>
-            <a:r>
-              <a:rPr sz="1100">
-                <a:solidFill>
-                  <a:srgbClr val="334155"/>
-                </a:solidFill>
-                <a:latin typeface="Calibri"/>
-              </a:rPr>
-              <a:t>Integration with live KMC inspection portals, code-mixed Bengali NLP (Banglish), and Explainable AI (XAI).</a:t>
+                <a:latin typeface="Arial"/>
+              </a:rPr>
+              <a:t>07.  Conclusion</a:t>
             </a:r>
           </a:p>
           <a:p>
             <a:pPr>
+              <a:spcBef>
+                <a:spcPts val="200"/>
+              </a:spcBef>
               <a:spcAft>
-                <a:spcPts val="400"/>
+                <a:spcPts val="800"/>
               </a:spcAft>
             </a:pPr>
             <a:r>
-              <a:rPr sz="1100" b="1">
+              <a:rPr sz="1050">
+                <a:solidFill>
+                  <a:srgbClr val="64748B"/>
+                </a:solidFill>
+                <a:latin typeface="Arial"/>
+              </a:rPr>
+              <a:t>     Summary of project milestones: Civic-consumer intelligence fusion, ethical zero-fabrication auditing, and live web deployment.</a:t>
+            </a:r>
+          </a:p>
+          <a:p>
+            <a:pPr>
+              <a:spcBef>
+                <a:spcPts val="800"/>
+              </a:spcBef>
+            </a:pPr>
+            <a:r>
+              <a:rPr sz="1200" b="1">
                 <a:solidFill>
                   <a:srgbClr val="0F172A"/>
                 </a:solidFill>
-                <a:latin typeface="Calibri"/>
-              </a:rPr>
-              <a:t>• 7. Conclusion: </a:t>
-            </a:r>
-            <a:r>
-              <a:rPr sz="1100">
-                <a:solidFill>
-                  <a:srgbClr val="334155"/>
-                </a:solidFill>
-                <a:latin typeface="Calibri"/>
-              </a:rPr>
-              <a:t>Summary of project milestones: Civic-consumer intelligence fusion, ethical zero-fabrication auditing, and live web deployment.</a:t>
+                <a:latin typeface="Arial"/>
+              </a:rPr>
+              <a:t>08.  References</a:t>
             </a:r>
           </a:p>
           <a:p>
             <a:pPr>
+              <a:spcBef>
+                <a:spcPts val="200"/>
+              </a:spcBef>
               <a:spcAft>
-                <a:spcPts val="400"/>
+                <a:spcPts val="800"/>
               </a:spcAft>
             </a:pPr>
             <a:r>
-              <a:rPr sz="1100" b="1">
-                <a:solidFill>
-                  <a:srgbClr val="0F172A"/>
-                </a:solidFill>
-                <a:latin typeface="Calibri"/>
-              </a:rPr>
-              <a:t>• 8. References: </a:t>
-            </a:r>
-            <a:r>
-              <a:rPr sz="1100">
-                <a:solidFill>
-                  <a:srgbClr val="334155"/>
-                </a:solidFill>
-                <a:latin typeface="Calibri"/>
-              </a:rPr>
-              <a:t>Peer-reviewed literature, IEEE/ACM proceedings, SemEval task reports, and FSSAI statutory regulations.</a:t>
+              <a:rPr sz="1050">
+                <a:solidFill>
+                  <a:srgbClr val="64748B"/>
+                </a:solidFill>
+                <a:latin typeface="Arial"/>
+              </a:rPr>
+              <a:t>     Peer-reviewed literature, IEEE/ACM proceedings, SemEval task reports, and FSSAI statutory regulations.</a:t>
             </a:r>
           </a:p>
         </p:txBody>
@@ -4820,17 +5148,22 @@
             <p:ph type="title"/>
           </p:nvPr>
         </p:nvSpPr>
-        <p:spPr/>
-        <p:txBody>
-          <a:bodyPr/>
-          <a:lstStyle/>
-          <a:p>
-            <a:pPr>
+        <p:spPr>
+          <a:xfrm>
+            <a:off x="841248" y="411480"/>
+            <a:ext cx="10515600" cy="594360"/>
+          </a:xfrm>
+        </p:spPr>
+        <p:txBody>
+          <a:bodyPr anchor="ctr"/>
+          <a:lstStyle/>
+          <a:p>
+            <a:pPr algn="l">
               <a:defRPr sz="2400" b="1">
                 <a:solidFill>
                   <a:srgbClr val="0F172A"/>
                 </a:solidFill>
-                <a:latin typeface="Calibri"/>
+                <a:latin typeface="Arial"/>
               </a:defRPr>
             </a:pPr>
             <a:r>
@@ -4856,15 +5189,27 @@
             <p:ph type="sldNum" sz="quarter" idx="12"/>
           </p:nvPr>
         </p:nvSpPr>
-        <p:spPr/>
-        <p:txBody>
-          <a:bodyPr/>
-          <a:lstStyle/>
-          <a:p>
-            <a:fld id="{C9080329-36BA-448C-B0A7-FA1AF13B2E0F}" type="slidenum">
-              <a:rPr lang="en-US" smtClean="0"/>
+        <p:spPr>
+          <a:xfrm>
+            <a:off x="10515600" y="6419088"/>
+            <a:ext cx="841248" cy="320040"/>
+          </a:xfrm>
+        </p:spPr>
+        <p:txBody>
+          <a:bodyPr anchor="ctr"/>
+          <a:lstStyle/>
+          <a:p>
+            <a:pPr algn="r">
+              <a:defRPr sz="1000">
+                <a:solidFill>
+                  <a:srgbClr val="64748B"/>
+                </a:solidFill>
+                <a:latin typeface="Arial"/>
+              </a:defRPr>
+            </a:pPr>
+            <a:r>
               <a:t>3</a:t>
-            </a:fld>
+            </a:r>
             <a:endParaRPr lang="en-US"/>
           </a:p>
         </p:txBody>
@@ -4883,8 +5228,8 @@
         </p:nvSpPr>
         <p:spPr>
           <a:xfrm>
-            <a:off x="2558716" y="6482255"/>
-            <a:ext cx="7515726" cy="369332"/>
+            <a:off x="1371600" y="6419088"/>
+            <a:ext cx="9445752" cy="320040"/>
           </a:xfrm>
           <a:prstGeom prst="rect">
             <a:avLst/>
@@ -4892,38 +5237,45 @@
           <a:noFill/>
         </p:spPr>
         <p:txBody>
-          <a:bodyPr wrap="square" rtlCol="0">
+          <a:bodyPr wrap="square" rtlCol="0" anchor="ctr">
             <a:spAutoFit/>
           </a:bodyPr>
           <a:lstStyle/>
           <a:p>
-            <a:r>
-              <a:rPr lang="en-US" b="1" dirty="0"/>
-              <a:t>Amity School of engineering &amp; Technology, Amity University, Kolkata </a:t>
-            </a:r>
-          </a:p>
-        </p:txBody>
-      </p:sp>
-      <p:sp>
-        <p:nvSpPr>
-          <p:cNvPr id="7" name="Rounded Rectangle 6"/>
+            <a:pPr algn="ctr">
+              <a:defRPr sz="950" b="0">
+                <a:solidFill>
+                  <a:srgbClr val="64748B"/>
+                </a:solidFill>
+                <a:latin typeface="Arial"/>
+              </a:defRPr>
+            </a:pPr>
+            <a:r>
+              <a:t>Amity School of Engineering &amp; Technology, Amity University, Kolkata</a:t>
+            </a:r>
+          </a:p>
+        </p:txBody>
+      </p:sp>
+      <p:sp>
+        <p:nvSpPr>
+          <p:cNvPr id="7" name="Rectangle 6"/>
           <p:cNvSpPr/>
           <p:nvPr/>
         </p:nvSpPr>
         <p:spPr>
           <a:xfrm>
-            <a:off x="841248" y="1645920"/>
-            <a:ext cx="3328416" cy="4389120"/>
+            <a:off x="841248" y="1078992"/>
+            <a:ext cx="10515600" cy="13716"/>
           </a:xfrm>
-          <a:prstGeom prst="roundRect">
+          <a:prstGeom prst="rect">
             <a:avLst/>
           </a:prstGeom>
           <a:solidFill>
-            <a:srgbClr val="F8FAFC"/>
+            <a:srgbClr val="CBD5E1"/>
           </a:solidFill>
-          <a:ln w="12700">
+          <a:ln w="6350">
             <a:solidFill>
-              <a:srgbClr val="E2E8F0"/>
+              <a:srgbClr val="CBD5E1"/>
             </a:solidFill>
           </a:ln>
         </p:spPr>
@@ -4942,122 +5294,32 @@
           </a:fontRef>
         </p:style>
         <p:txBody>
-          <a:bodyPr rtlCol="0" anchor="ctr" wrap="square" lIns="201168" rIns="201168" tIns="164592" bIns="164592"/>
-          <a:lstStyle/>
-          <a:p>
-            <a:pPr algn="ctr">
-              <a:spcAft>
-                <a:spcPts val="600"/>
-              </a:spcAft>
-              <a:defRPr sz="1300" b="1">
-                <a:solidFill>
-                  <a:srgbClr val="0F172A"/>
-                </a:solidFill>
-                <a:latin typeface="Calibri"/>
-              </a:defRPr>
-            </a:pPr>
-            <a:r>
-              <a:t>1. Dining Information Asymmetry</a:t>
-            </a:r>
-          </a:p>
-          <a:p>
-            <a:pPr>
-              <a:spcAft>
-                <a:spcPts val="400"/>
-              </a:spcAft>
-            </a:pPr>
-            <a:r>
-              <a:rPr sz="1100" b="1">
-                <a:solidFill>
-                  <a:srgbClr val="0F172A"/>
-                </a:solidFill>
-                <a:latin typeface="Calibri"/>
-              </a:rPr>
-              <a:t>• Rating Inflation: </a:t>
-            </a:r>
-            <a:r>
-              <a:rPr sz="1100">
-                <a:solidFill>
-                  <a:srgbClr val="334155"/>
-                </a:solidFill>
-                <a:latin typeface="Calibri"/>
-              </a:rPr>
-              <a:t>Popular dining apps (Zomato/Google) show heavily skewed 4.2★+ ratings driven almost exclusively by taste and decor.</a:t>
-            </a:r>
-          </a:p>
-          <a:p>
-            <a:pPr>
-              <a:spcAft>
-                <a:spcPts val="400"/>
-              </a:spcAft>
-            </a:pPr>
-            <a:r>
-              <a:rPr sz="1100" b="1">
-                <a:solidFill>
-                  <a:srgbClr val="0F172A"/>
-                </a:solidFill>
-                <a:latin typeface="Calibri"/>
-              </a:rPr>
-              <a:t>• Masked Hazards: </a:t>
-            </a:r>
-            <a:r>
-              <a:rPr sz="1100">
-                <a:solidFill>
-                  <a:srgbClr val="334155"/>
-                </a:solidFill>
-                <a:latin typeface="Calibri"/>
-              </a:rPr>
-              <a:t>A 5-star biryani or dessert often conceals critical back-kitchen hygiene lapses and pest contamination.</a:t>
-            </a:r>
-          </a:p>
-          <a:p>
-            <a:pPr>
-              <a:spcAft>
-                <a:spcPts val="400"/>
-              </a:spcAft>
-            </a:pPr>
-            <a:r>
-              <a:rPr sz="1100" b="1">
-                <a:solidFill>
-                  <a:srgbClr val="0F172A"/>
-                </a:solidFill>
-                <a:latin typeface="Calibri"/>
-              </a:rPr>
-              <a:t>• Consumer Blindspot: </a:t>
-            </a:r>
-            <a:r>
-              <a:rPr sz="1100">
-                <a:solidFill>
-                  <a:srgbClr val="334155"/>
-                </a:solidFill>
-                <a:latin typeface="Calibri"/>
-              </a:rPr>
-              <a:t>Diners lack any consolidated mechanism to evaluate true hygiene compliance prior to placing an order or dining in.</a:t>
-            </a:r>
-          </a:p>
-        </p:txBody>
-      </p:sp>
-      <p:sp>
-        <p:nvSpPr>
-          <p:cNvPr id="8" name="Rounded Rectangle 7"/>
+          <a:bodyPr rtlCol="0" anchor="ctr"/>
+          <a:lstStyle/>
+          <a:p>
+            <a:pPr algn="ctr"/>
+          </a:p>
+        </p:txBody>
+      </p:sp>
+      <p:sp>
+        <p:nvSpPr>
+          <p:cNvPr id="8" name="Rectangle 7"/>
           <p:cNvSpPr/>
           <p:nvPr/>
         </p:nvSpPr>
         <p:spPr>
           <a:xfrm>
-            <a:off x="4425696" y="1645920"/>
-            <a:ext cx="3328416" cy="4389120"/>
+            <a:off x="841248" y="1371600"/>
+            <a:ext cx="3328416" cy="36576"/>
           </a:xfrm>
-          <a:prstGeom prst="roundRect">
+          <a:prstGeom prst="rect">
             <a:avLst/>
           </a:prstGeom>
           <a:solidFill>
-            <a:srgbClr val="F8FAFC"/>
+            <a:srgbClr val="0F172A"/>
           </a:solidFill>
-          <a:ln w="12700">
-            <a:solidFill>
-              <a:srgbClr val="E2E8F0"/>
-            </a:solidFill>
+          <a:ln>
+            <a:noFill/>
           </a:ln>
         </p:spPr>
         <p:style>
@@ -5075,122 +5337,30 @@
           </a:fontRef>
         </p:style>
         <p:txBody>
-          <a:bodyPr rtlCol="0" anchor="ctr" wrap="square" lIns="201168" rIns="201168" tIns="164592" bIns="164592"/>
-          <a:lstStyle/>
-          <a:p>
-            <a:pPr algn="ctr">
-              <a:spcAft>
-                <a:spcPts val="600"/>
-              </a:spcAft>
-              <a:defRPr sz="1300" b="1">
-                <a:solidFill>
-                  <a:srgbClr val="0F766E"/>
-                </a:solidFill>
-                <a:latin typeface="Calibri"/>
-              </a:defRPr>
-            </a:pPr>
-            <a:r>
-              <a:t>2. Kolkata Public Health Context</a:t>
-            </a:r>
-          </a:p>
-          <a:p>
-            <a:pPr>
-              <a:spcAft>
-                <a:spcPts val="400"/>
-              </a:spcAft>
-            </a:pPr>
-            <a:r>
-              <a:rPr sz="1100" b="1">
-                <a:solidFill>
-                  <a:srgbClr val="0F172A"/>
-                </a:solidFill>
-                <a:latin typeface="Calibri"/>
-              </a:rPr>
-              <a:t>• Civic Crackdowns: </a:t>
-            </a:r>
-            <a:r>
-              <a:rPr sz="1100">
-                <a:solidFill>
-                  <a:srgbClr val="334155"/>
-                </a:solidFill>
-                <a:latin typeface="Calibri"/>
-              </a:rPr>
-              <a:t>Kolkata Municipal Corporation (KMC) &amp; West Bengal Health Dept frequently conduct intensive food safety raids.</a:t>
-            </a:r>
-          </a:p>
-          <a:p>
-            <a:pPr>
-              <a:spcAft>
-                <a:spcPts val="400"/>
-              </a:spcAft>
-            </a:pPr>
-            <a:r>
-              <a:rPr sz="1100" b="1">
-                <a:solidFill>
-                  <a:srgbClr val="0F172A"/>
-                </a:solidFill>
-                <a:latin typeface="Calibri"/>
-              </a:rPr>
-              <a:t>• Unlinked Records: </a:t>
-            </a:r>
-            <a:r>
-              <a:rPr sz="1100">
-                <a:solidFill>
-                  <a:srgbClr val="334155"/>
-                </a:solidFill>
-                <a:latin typeface="Calibri"/>
-              </a:rPr>
-              <a:t>Official FSSAI audit outcomes and hygiene violation records remain buried in bureaucratic filing systems.</a:t>
-            </a:r>
-          </a:p>
-          <a:p>
-            <a:pPr>
-              <a:spcAft>
-                <a:spcPts val="400"/>
-              </a:spcAft>
-            </a:pPr>
-            <a:r>
-              <a:rPr sz="1100" b="1">
-                <a:solidFill>
-                  <a:srgbClr val="0F172A"/>
-                </a:solidFill>
-                <a:latin typeface="Calibri"/>
-              </a:rPr>
-              <a:t>• Surveillance Lag: </a:t>
-            </a:r>
-            <a:r>
-              <a:rPr sz="1100">
-                <a:solidFill>
-                  <a:srgbClr val="334155"/>
-                </a:solidFill>
-                <a:latin typeface="Calibri"/>
-              </a:rPr>
-              <a:t>Traditional civic inspection models are entirely reactive, lacking computational early-warning NLP signals from citizen reviews.</a:t>
-            </a:r>
-          </a:p>
-        </p:txBody>
-      </p:sp>
-      <p:sp>
-        <p:nvSpPr>
-          <p:cNvPr id="9" name="Rounded Rectangle 8"/>
+          <a:bodyPr rtlCol="0" anchor="ctr"/>
+          <a:lstStyle/>
+          <a:p>
+            <a:pPr algn="ctr"/>
+          </a:p>
+        </p:txBody>
+      </p:sp>
+      <p:sp>
+        <p:nvSpPr>
+          <p:cNvPr id="9" name="Rectangle 8"/>
           <p:cNvSpPr/>
           <p:nvPr/>
         </p:nvSpPr>
         <p:spPr>
           <a:xfrm>
-            <a:off x="8010144" y="1645920"/>
-            <a:ext cx="3328416" cy="4389120"/>
+            <a:off x="841248" y="1463040"/>
+            <a:ext cx="3328416" cy="4572000"/>
           </a:xfrm>
-          <a:prstGeom prst="roundRect">
+          <a:prstGeom prst="rect">
             <a:avLst/>
           </a:prstGeom>
-          <a:solidFill>
-            <a:srgbClr val="F8FAFC"/>
-          </a:solidFill>
-          <a:ln w="12700">
-            <a:solidFill>
-              <a:srgbClr val="E2E8F0"/>
-            </a:solidFill>
+          <a:noFill/>
+          <a:ln>
+            <a:noFill/>
           </a:ln>
         </p:spPr>
         <p:style>
@@ -5208,97 +5378,525 @@
           </a:fontRef>
         </p:style>
         <p:txBody>
-          <a:bodyPr rtlCol="0" anchor="ctr" wrap="square" lIns="201168" rIns="201168" tIns="164592" bIns="164592"/>
+          <a:bodyPr rtlCol="0" anchor="t" wrap="square" lIns="0" rIns="0" tIns="0" bIns="0"/>
           <a:lstStyle/>
           <a:p>
             <a:pPr algn="ctr">
+              <a:spcBef>
+                <a:spcPts val="400"/>
+              </a:spcBef>
               <a:spcAft>
-                <a:spcPts val="600"/>
+                <a:spcPts val="1000"/>
               </a:spcAft>
-              <a:defRPr sz="1300" b="1">
-                <a:solidFill>
-                  <a:srgbClr val="1E40AF"/>
-                </a:solidFill>
-                <a:latin typeface="Calibri"/>
+              <a:defRPr sz="1350" b="1">
+                <a:solidFill>
+                  <a:srgbClr val="0F172A"/>
+                </a:solidFill>
+                <a:latin typeface="Arial"/>
               </a:defRPr>
             </a:pPr>
             <a:r>
-              <a:t>3. Technical NLP Research Gap</a:t>
+              <a:t>1. Dining Information Asymmetry</a:t>
             </a:r>
           </a:p>
           <a:p>
             <a:pPr>
               <a:spcAft>
-                <a:spcPts val="400"/>
+                <a:spcPts val="800"/>
               </a:spcAft>
             </a:pPr>
             <a:r>
-              <a:rPr sz="1100" b="1">
+              <a:rPr sz="1050" b="1">
                 <a:solidFill>
                   <a:srgbClr val="0F172A"/>
                 </a:solidFill>
-                <a:latin typeface="Calibri"/>
-              </a:rPr>
-              <a:t>• Coarse Sentiment Failure: </a:t>
-            </a:r>
-            <a:r>
-              <a:rPr sz="1100">
+                <a:latin typeface="Arial"/>
+              </a:rPr>
+              <a:t>•  Severe Star Inflation: </a:t>
+            </a:r>
+            <a:r>
+              <a:rPr sz="1000">
                 <a:solidFill>
                   <a:srgbClr val="334155"/>
                 </a:solidFill>
-                <a:latin typeface="Calibri"/>
-              </a:rPr>
-              <a:t>Document-level sentiment classifiers assign a single positive/negative label, collapsing on mixed reviews.</a:t>
+                <a:latin typeface="Arial"/>
+              </a:rPr>
+              <a:t>Popular consumer platforms (Zomato/Google) display average ratings of 4.2★+, heavily biased toward culinary taste, portion size, and ambiance aesthetics.</a:t>
             </a:r>
           </a:p>
           <a:p>
             <a:pPr>
               <a:spcAft>
-                <a:spcPts val="400"/>
+                <a:spcPts val="800"/>
               </a:spcAft>
             </a:pPr>
             <a:r>
-              <a:rPr sz="1100" b="1">
+              <a:rPr sz="1050" b="1">
                 <a:solidFill>
                   <a:srgbClr val="0F172A"/>
                 </a:solidFill>
-                <a:latin typeface="Calibri"/>
-              </a:rPr>
-              <a:t>• Contradiction Dilemma: </a:t>
-            </a:r>
-            <a:r>
-              <a:rPr sz="1100">
+                <a:latin typeface="Arial"/>
+              </a:rPr>
+              <a:t>•  Hidden Kitchen Hazards: </a:t>
+            </a:r>
+            <a:r>
+              <a:rPr sz="1000">
                 <a:solidFill>
                   <a:srgbClr val="334155"/>
                 </a:solidFill>
-                <a:latin typeface="Calibri"/>
-              </a:rPr>
-              <a:t>'The mutton chaap was exquisite, but the tables were filthy and the waiter was rude' requires multi-aspect extraction.</a:t>
+                <a:latin typeface="Arial"/>
+              </a:rPr>
+              <a:t>A glowing 5-star customer review often conceals critical back-kitchen hygiene lapses, contaminated cookware, and pest vectors.</a:t>
             </a:r>
           </a:p>
           <a:p>
             <a:pPr>
               <a:spcAft>
+                <a:spcPts val="800"/>
+              </a:spcAft>
+            </a:pPr>
+            <a:r>
+              <a:rPr sz="1050" b="1">
+                <a:solidFill>
+                  <a:srgbClr val="0F172A"/>
+                </a:solidFill>
+                <a:latin typeface="Arial"/>
+              </a:rPr>
+              <a:t>•  Diner Information Gap: </a:t>
+            </a:r>
+            <a:r>
+              <a:rPr sz="1000">
+                <a:solidFill>
+                  <a:srgbClr val="334155"/>
+                </a:solidFill>
+                <a:latin typeface="Arial"/>
+              </a:rPr>
+              <a:t>Consumers make immediate dining choices with zero visibility into official municipal inspection records or sanitation compliance history.</a:t>
+            </a:r>
+          </a:p>
+          <a:p>
+            <a:pPr>
+              <a:spcAft>
+                <a:spcPts val="800"/>
+              </a:spcAft>
+            </a:pPr>
+            <a:r>
+              <a:rPr sz="1050" b="1">
+                <a:solidFill>
+                  <a:srgbClr val="0F172A"/>
+                </a:solidFill>
+                <a:latin typeface="Arial"/>
+              </a:rPr>
+              <a:t>•  False Sense of Safety: </a:t>
+            </a:r>
+            <a:r>
+              <a:rPr sz="1000">
+                <a:solidFill>
+                  <a:srgbClr val="334155"/>
+                </a:solidFill>
+                <a:latin typeface="Arial"/>
+              </a:rPr>
+              <a:t>Crowd-sourced star ratings give diners an illusion of quality that statistically diverges from empirical food safety.</a:t>
+            </a:r>
+          </a:p>
+        </p:txBody>
+      </p:sp>
+      <p:sp>
+        <p:nvSpPr>
+          <p:cNvPr id="10" name="Rectangle 9"/>
+          <p:cNvSpPr/>
+          <p:nvPr/>
+        </p:nvSpPr>
+        <p:spPr>
+          <a:xfrm>
+            <a:off x="4425696" y="1371600"/>
+            <a:ext cx="3328416" cy="36576"/>
+          </a:xfrm>
+          <a:prstGeom prst="rect">
+            <a:avLst/>
+          </a:prstGeom>
+          <a:solidFill>
+            <a:srgbClr val="0F766E"/>
+          </a:solidFill>
+          <a:ln>
+            <a:noFill/>
+          </a:ln>
+        </p:spPr>
+        <p:style>
+          <a:lnRef idx="1">
+            <a:schemeClr val="accent1"/>
+          </a:lnRef>
+          <a:fillRef idx="3">
+            <a:schemeClr val="accent1"/>
+          </a:fillRef>
+          <a:effectRef idx="2">
+            <a:schemeClr val="accent1"/>
+          </a:effectRef>
+          <a:fontRef idx="minor">
+            <a:schemeClr val="lt1"/>
+          </a:fontRef>
+        </p:style>
+        <p:txBody>
+          <a:bodyPr rtlCol="0" anchor="ctr"/>
+          <a:lstStyle/>
+          <a:p>
+            <a:pPr algn="ctr"/>
+          </a:p>
+        </p:txBody>
+      </p:sp>
+      <p:sp>
+        <p:nvSpPr>
+          <p:cNvPr id="11" name="Rectangle 10"/>
+          <p:cNvSpPr/>
+          <p:nvPr/>
+        </p:nvSpPr>
+        <p:spPr>
+          <a:xfrm>
+            <a:off x="4425696" y="1463040"/>
+            <a:ext cx="3328416" cy="4572000"/>
+          </a:xfrm>
+          <a:prstGeom prst="rect">
+            <a:avLst/>
+          </a:prstGeom>
+          <a:noFill/>
+          <a:ln>
+            <a:noFill/>
+          </a:ln>
+        </p:spPr>
+        <p:style>
+          <a:lnRef idx="1">
+            <a:schemeClr val="accent1"/>
+          </a:lnRef>
+          <a:fillRef idx="3">
+            <a:schemeClr val="accent1"/>
+          </a:fillRef>
+          <a:effectRef idx="2">
+            <a:schemeClr val="accent1"/>
+          </a:effectRef>
+          <a:fontRef idx="minor">
+            <a:schemeClr val="lt1"/>
+          </a:fontRef>
+        </p:style>
+        <p:txBody>
+          <a:bodyPr rtlCol="0" anchor="t" wrap="square" lIns="0" rIns="0" tIns="0" bIns="0"/>
+          <a:lstStyle/>
+          <a:p>
+            <a:pPr algn="ctr">
+              <a:spcBef>
                 <a:spcPts val="400"/>
+              </a:spcBef>
+              <a:spcAft>
+                <a:spcPts val="1000"/>
               </a:spcAft>
-            </a:pPr>
-            <a:r>
-              <a:rPr sz="1100" b="1">
+              <a:defRPr sz="1350" b="1">
+                <a:solidFill>
+                  <a:srgbClr val="0F766E"/>
+                </a:solidFill>
+                <a:latin typeface="Arial"/>
+              </a:defRPr>
+            </a:pPr>
+            <a:r>
+              <a:t>2. Kolkata Public Health Reality</a:t>
+            </a:r>
+          </a:p>
+          <a:p>
+            <a:pPr>
+              <a:spcAft>
+                <a:spcPts val="800"/>
+              </a:spcAft>
+            </a:pPr>
+            <a:r>
+              <a:rPr sz="1050" b="1">
                 <a:solidFill>
                   <a:srgbClr val="0F172A"/>
                 </a:solidFill>
-                <a:latin typeface="Calibri"/>
-              </a:rPr>
-              <a:t>• Objective Need: </a:t>
-            </a:r>
-            <a:r>
-              <a:rPr sz="1100">
+                <a:latin typeface="Arial"/>
+              </a:rPr>
+              <a:t>•  Civic Crackdowns: </a:t>
+            </a:r>
+            <a:r>
+              <a:rPr sz="1000">
                 <a:solidFill>
                   <a:srgbClr val="334155"/>
                 </a:solidFill>
-                <a:latin typeface="Calibri"/>
-              </a:rPr>
-              <a:t>A production pipeline that decouples taste sentiment from hygiene audits and enforces zero-fabrication of safety scores.</a:t>
+                <a:latin typeface="Arial"/>
+              </a:rPr>
+              <a:t>Kolkata Municipal Corporation (KMC) &amp; West Bengal Health Dept frequently conduct high-profile food safety raids across restaurant hubs.</a:t>
+            </a:r>
+          </a:p>
+          <a:p>
+            <a:pPr>
+              <a:spcAft>
+                <a:spcPts val="800"/>
+              </a:spcAft>
+            </a:pPr>
+            <a:r>
+              <a:rPr sz="1050" b="1">
+                <a:solidFill>
+                  <a:srgbClr val="0F172A"/>
+                </a:solidFill>
+                <a:latin typeface="Arial"/>
+              </a:rPr>
+              <a:t>•  Bureaucratic Isolation: </a:t>
+            </a:r>
+            <a:r>
+              <a:rPr sz="1000">
+                <a:solidFill>
+                  <a:srgbClr val="334155"/>
+                </a:solidFill>
+                <a:latin typeface="Arial"/>
+              </a:rPr>
+              <a:t>Official FSSAI audit outcomes, hygiene ratings, and violation notices remain locked in administrative databases, inaccessible to consumers.</a:t>
+            </a:r>
+          </a:p>
+          <a:p>
+            <a:pPr>
+              <a:spcAft>
+                <a:spcPts val="800"/>
+              </a:spcAft>
+            </a:pPr>
+            <a:r>
+              <a:rPr sz="1050" b="1">
+                <a:solidFill>
+                  <a:srgbClr val="0F172A"/>
+                </a:solidFill>
+                <a:latin typeface="Arial"/>
+              </a:rPr>
+              <a:t>•  Reactive Enforcement: </a:t>
+            </a:r>
+            <a:r>
+              <a:rPr sz="1000">
+                <a:solidFill>
+                  <a:srgbClr val="334155"/>
+                </a:solidFill>
+                <a:latin typeface="Arial"/>
+              </a:rPr>
+              <a:t>Traditional municipal inspection schedules rely on periodic audits or formal consumer complaints, introducing weeks of detection latency.</a:t>
+            </a:r>
+          </a:p>
+          <a:p>
+            <a:pPr>
+              <a:spcAft>
+                <a:spcPts val="800"/>
+              </a:spcAft>
+            </a:pPr>
+            <a:r>
+              <a:rPr sz="1050" b="1">
+                <a:solidFill>
+                  <a:srgbClr val="0F172A"/>
+                </a:solidFill>
+                <a:latin typeface="Arial"/>
+              </a:rPr>
+              <a:t>•  Civic NLP Opportunity: </a:t>
+            </a:r>
+            <a:r>
+              <a:rPr sz="1000">
+                <a:solidFill>
+                  <a:srgbClr val="334155"/>
+                </a:solidFill>
+                <a:latin typeface="Arial"/>
+              </a:rPr>
+              <a:t>Public health surveillance lacks real-time computational systems to monitor citizen review streams for syndromic illness signals.</a:t>
+            </a:r>
+          </a:p>
+        </p:txBody>
+      </p:sp>
+      <p:sp>
+        <p:nvSpPr>
+          <p:cNvPr id="12" name="Rectangle 11"/>
+          <p:cNvSpPr/>
+          <p:nvPr/>
+        </p:nvSpPr>
+        <p:spPr>
+          <a:xfrm>
+            <a:off x="8010144" y="1371600"/>
+            <a:ext cx="3328416" cy="36576"/>
+          </a:xfrm>
+          <a:prstGeom prst="rect">
+            <a:avLst/>
+          </a:prstGeom>
+          <a:solidFill>
+            <a:srgbClr val="1E40AF"/>
+          </a:solidFill>
+          <a:ln>
+            <a:noFill/>
+          </a:ln>
+        </p:spPr>
+        <p:style>
+          <a:lnRef idx="1">
+            <a:schemeClr val="accent1"/>
+          </a:lnRef>
+          <a:fillRef idx="3">
+            <a:schemeClr val="accent1"/>
+          </a:fillRef>
+          <a:effectRef idx="2">
+            <a:schemeClr val="accent1"/>
+          </a:effectRef>
+          <a:fontRef idx="minor">
+            <a:schemeClr val="lt1"/>
+          </a:fontRef>
+        </p:style>
+        <p:txBody>
+          <a:bodyPr rtlCol="0" anchor="ctr"/>
+          <a:lstStyle/>
+          <a:p>
+            <a:pPr algn="ctr"/>
+          </a:p>
+        </p:txBody>
+      </p:sp>
+      <p:sp>
+        <p:nvSpPr>
+          <p:cNvPr id="13" name="Rectangle 12"/>
+          <p:cNvSpPr/>
+          <p:nvPr/>
+        </p:nvSpPr>
+        <p:spPr>
+          <a:xfrm>
+            <a:off x="8010144" y="1463040"/>
+            <a:ext cx="3328416" cy="4572000"/>
+          </a:xfrm>
+          <a:prstGeom prst="rect">
+            <a:avLst/>
+          </a:prstGeom>
+          <a:noFill/>
+          <a:ln>
+            <a:noFill/>
+          </a:ln>
+        </p:spPr>
+        <p:style>
+          <a:lnRef idx="1">
+            <a:schemeClr val="accent1"/>
+          </a:lnRef>
+          <a:fillRef idx="3">
+            <a:schemeClr val="accent1"/>
+          </a:fillRef>
+          <a:effectRef idx="2">
+            <a:schemeClr val="accent1"/>
+          </a:effectRef>
+          <a:fontRef idx="minor">
+            <a:schemeClr val="lt1"/>
+          </a:fontRef>
+        </p:style>
+        <p:txBody>
+          <a:bodyPr rtlCol="0" anchor="t" wrap="square" lIns="0" rIns="0" tIns="0" bIns="0"/>
+          <a:lstStyle/>
+          <a:p>
+            <a:pPr algn="ctr">
+              <a:spcBef>
+                <a:spcPts val="400"/>
+              </a:spcBef>
+              <a:spcAft>
+                <a:spcPts val="1000"/>
+              </a:spcAft>
+              <a:defRPr sz="1350" b="1">
+                <a:solidFill>
+                  <a:srgbClr val="1E40AF"/>
+                </a:solidFill>
+                <a:latin typeface="Arial"/>
+              </a:defRPr>
+            </a:pPr>
+            <a:r>
+              <a:t>3. Technical NLP Research Gap</a:t>
+            </a:r>
+          </a:p>
+          <a:p>
+            <a:pPr>
+              <a:spcAft>
+                <a:spcPts val="800"/>
+              </a:spcAft>
+            </a:pPr>
+            <a:r>
+              <a:rPr sz="1050" b="1">
+                <a:solidFill>
+                  <a:srgbClr val="0F172A"/>
+                </a:solidFill>
+                <a:latin typeface="Arial"/>
+              </a:rPr>
+              <a:t>•  Coarse Polarity Collapse: </a:t>
+            </a:r>
+            <a:r>
+              <a:rPr sz="1000">
+                <a:solidFill>
+                  <a:srgbClr val="334155"/>
+                </a:solidFill>
+                <a:latin typeface="Arial"/>
+              </a:rPr>
+              <a:t>Standard sentiment analysis assigns a single document-level label, failing completely when customer opinions are mixed.</a:t>
+            </a:r>
+          </a:p>
+          <a:p>
+            <a:pPr>
+              <a:spcAft>
+                <a:spcPts val="800"/>
+              </a:spcAft>
+            </a:pPr>
+            <a:r>
+              <a:rPr sz="1050" b="1">
+                <a:solidFill>
+                  <a:srgbClr val="0F172A"/>
+                </a:solidFill>
+                <a:latin typeface="Arial"/>
+              </a:rPr>
+              <a:t>•  Clause Contradiction: </a:t>
+            </a:r>
+            <a:r>
+              <a:rPr sz="1000">
+                <a:solidFill>
+                  <a:srgbClr val="334155"/>
+                </a:solidFill>
+                <a:latin typeface="Arial"/>
+              </a:rPr>
+              <a:t>'The biryani was outstanding, but the washrooms were filthy and service was hostile' contains opposing aspect polarities.</a:t>
+            </a:r>
+          </a:p>
+          <a:p>
+            <a:pPr>
+              <a:spcAft>
+                <a:spcPts val="800"/>
+              </a:spcAft>
+            </a:pPr>
+            <a:r>
+              <a:rPr sz="1050" b="1">
+                <a:solidFill>
+                  <a:srgbClr val="0F172A"/>
+                </a:solidFill>
+                <a:latin typeface="Arial"/>
+              </a:rPr>
+              <a:t>•  Aspect Decoupling: </a:t>
+            </a:r>
+            <a:r>
+              <a:rPr sz="1000">
+                <a:solidFill>
+                  <a:srgbClr val="334155"/>
+                </a:solidFill>
+                <a:latin typeface="Arial"/>
+              </a:rPr>
+              <a:t>Requires multi-label discourse clause segmentation across Food, Service, Hygiene, Ambience, and Price dimensions.</a:t>
+            </a:r>
+          </a:p>
+          <a:p>
+            <a:pPr>
+              <a:spcAft>
+                <a:spcPts val="800"/>
+              </a:spcAft>
+            </a:pPr>
+            <a:r>
+              <a:rPr sz="1050" b="1">
+                <a:solidFill>
+                  <a:srgbClr val="0F172A"/>
+                </a:solidFill>
+                <a:latin typeface="Arial"/>
+              </a:rPr>
+              <a:t>•  Zero-Fabrication Mandate: </a:t>
+            </a:r>
+            <a:r>
+              <a:rPr sz="1000">
+                <a:solidFill>
+                  <a:srgbClr val="334155"/>
+                </a:solidFill>
+                <a:latin typeface="Arial"/>
+              </a:rPr>
+              <a:t>A decision system must explicitly output None / Unavailable for unverified restaurants to maintain strict public health integrity.</a:t>
             </a:r>
           </a:p>
         </p:txBody>
@@ -5349,17 +5947,22 @@
             <p:ph type="title"/>
           </p:nvPr>
         </p:nvSpPr>
-        <p:spPr/>
-        <p:txBody>
-          <a:bodyPr/>
-          <a:lstStyle/>
-          <a:p>
-            <a:pPr>
+        <p:spPr>
+          <a:xfrm>
+            <a:off x="841248" y="411480"/>
+            <a:ext cx="10515600" cy="594360"/>
+          </a:xfrm>
+        </p:spPr>
+        <p:txBody>
+          <a:bodyPr anchor="ctr"/>
+          <a:lstStyle/>
+          <a:p>
+            <a:pPr algn="l">
               <a:defRPr sz="2400" b="1">
                 <a:solidFill>
                   <a:srgbClr val="0F172A"/>
                 </a:solidFill>
-                <a:latin typeface="Calibri"/>
+                <a:latin typeface="Arial"/>
               </a:defRPr>
             </a:pPr>
             <a:r>
@@ -5384,15 +5987,27 @@
             <p:ph type="sldNum" sz="quarter" idx="12"/>
           </p:nvPr>
         </p:nvSpPr>
-        <p:spPr/>
-        <p:txBody>
-          <a:bodyPr/>
-          <a:lstStyle/>
-          <a:p>
-            <a:fld id="{C9080329-36BA-448C-B0A7-FA1AF13B2E0F}" type="slidenum">
-              <a:rPr lang="en-US" smtClean="0"/>
+        <p:spPr>
+          <a:xfrm>
+            <a:off x="10515600" y="6419088"/>
+            <a:ext cx="841248" cy="320040"/>
+          </a:xfrm>
+        </p:spPr>
+        <p:txBody>
+          <a:bodyPr anchor="ctr"/>
+          <a:lstStyle/>
+          <a:p>
+            <a:pPr algn="r">
+              <a:defRPr sz="1000">
+                <a:solidFill>
+                  <a:srgbClr val="64748B"/>
+                </a:solidFill>
+                <a:latin typeface="Arial"/>
+              </a:defRPr>
+            </a:pPr>
+            <a:r>
               <a:t>4</a:t>
-            </a:fld>
+            </a:r>
             <a:endParaRPr lang="en-US"/>
           </a:p>
         </p:txBody>
@@ -5411,8 +6026,8 @@
         </p:nvSpPr>
         <p:spPr>
           <a:xfrm>
-            <a:off x="2558716" y="6482255"/>
-            <a:ext cx="7515726" cy="369332"/>
+            <a:off x="1371600" y="6419088"/>
+            <a:ext cx="9445752" cy="320040"/>
           </a:xfrm>
           <a:prstGeom prst="rect">
             <a:avLst/>
@@ -5420,29 +6035,81 @@
           <a:noFill/>
         </p:spPr>
         <p:txBody>
-          <a:bodyPr wrap="square" rtlCol="0">
+          <a:bodyPr wrap="square" rtlCol="0" anchor="ctr">
             <a:spAutoFit/>
           </a:bodyPr>
           <a:lstStyle/>
           <a:p>
-            <a:r>
-              <a:rPr lang="en-US" b="1" dirty="0"/>
-              <a:t>Amity School of engineering &amp; Technology, Amity University, Kolkata </a:t>
-            </a:r>
+            <a:pPr algn="ctr">
+              <a:defRPr sz="950" b="0">
+                <a:solidFill>
+                  <a:srgbClr val="64748B"/>
+                </a:solidFill>
+                <a:latin typeface="Arial"/>
+              </a:defRPr>
+            </a:pPr>
+            <a:r>
+              <a:t>Amity School of Engineering &amp; Technology, Amity University, Kolkata</a:t>
+            </a:r>
+          </a:p>
+        </p:txBody>
+      </p:sp>
+      <p:sp>
+        <p:nvSpPr>
+          <p:cNvPr id="7" name="Rectangle 6"/>
+          <p:cNvSpPr/>
+          <p:nvPr/>
+        </p:nvSpPr>
+        <p:spPr>
+          <a:xfrm>
+            <a:off x="841248" y="1078992"/>
+            <a:ext cx="10515600" cy="13716"/>
+          </a:xfrm>
+          <a:prstGeom prst="rect">
+            <a:avLst/>
+          </a:prstGeom>
+          <a:solidFill>
+            <a:srgbClr val="CBD5E1"/>
+          </a:solidFill>
+          <a:ln w="6350">
+            <a:solidFill>
+              <a:srgbClr val="CBD5E1"/>
+            </a:solidFill>
+          </a:ln>
+        </p:spPr>
+        <p:style>
+          <a:lnRef idx="1">
+            <a:schemeClr val="accent1"/>
+          </a:lnRef>
+          <a:fillRef idx="3">
+            <a:schemeClr val="accent1"/>
+          </a:fillRef>
+          <a:effectRef idx="2">
+            <a:schemeClr val="accent1"/>
+          </a:effectRef>
+          <a:fontRef idx="minor">
+            <a:schemeClr val="lt1"/>
+          </a:fontRef>
+        </p:style>
+        <p:txBody>
+          <a:bodyPr rtlCol="0" anchor="ctr"/>
+          <a:lstStyle/>
+          <a:p>
+            <a:pPr algn="ctr"/>
           </a:p>
         </p:txBody>
       </p:sp>
       <p:graphicFrame>
         <p:nvGraphicFramePr>
-          <p:cNvPr id="7" name="Table 6"/>
+          <p:cNvPr id="8" name="Table 7"/>
           <p:cNvGraphicFramePr>
             <a:graphicFrameLocks noGrp="1"/>
           </p:cNvGraphicFramePr>
           <p:nvPr/>
         </p:nvGraphicFramePr>
         <p:xfrm>
-          <a:off x="841248" y="1645920"/>
-          <a:ext cx="10515600" cy="4023360"/>
+          <a:off x="841248" y="1325880"/>
+          <a:ext cx="10515600" cy="4709160"/>
         </p:xfrm>
         <a:graphic>
           <a:graphicData uri="http://schemas.openxmlformats.org/drawingml/2006/table">
@@ -5457,18 +6124,18 @@
                 <a:gridCol w="2103120"/>
                 <a:gridCol w="2377440"/>
               </a:tblGrid>
-              <a:tr h="804672">
+              <a:tr h="941832">
                 <a:tc>
                   <a:txBody>
                     <a:bodyPr wrap="square" lIns="109728" rIns="109728" tIns="73152" bIns="73152"/>
                     <a:lstStyle/>
                     <a:p>
                       <a:pPr algn="l">
-                        <a:defRPr sz="1100" b="1">
+                        <a:defRPr sz="1050" b="1">
                           <a:solidFill>
                             <a:srgbClr val="FFFFFF"/>
                           </a:solidFill>
-                          <a:latin typeface="Calibri"/>
+                          <a:latin typeface="Arial"/>
                         </a:defRPr>
                       </a:pPr>
                       <a:r>
@@ -5488,11 +6155,11 @@
                     <a:lstStyle/>
                     <a:p>
                       <a:pPr algn="l">
-                        <a:defRPr sz="1100" b="1">
+                        <a:defRPr sz="1050" b="1">
                           <a:solidFill>
                             <a:srgbClr val="FFFFFF"/>
                           </a:solidFill>
-                          <a:latin typeface="Calibri"/>
+                          <a:latin typeface="Arial"/>
                         </a:defRPr>
                       </a:pPr>
                       <a:r>
@@ -5512,11 +6179,11 @@
                     <a:lstStyle/>
                     <a:p>
                       <a:pPr algn="l">
-                        <a:defRPr sz="1100" b="1">
+                        <a:defRPr sz="1050" b="1">
                           <a:solidFill>
                             <a:srgbClr val="FFFFFF"/>
                           </a:solidFill>
-                          <a:latin typeface="Calibri"/>
+                          <a:latin typeface="Arial"/>
                         </a:defRPr>
                       </a:pPr>
                       <a:r>
@@ -5536,11 +6203,11 @@
                     <a:lstStyle/>
                     <a:p>
                       <a:pPr algn="l">
-                        <a:defRPr sz="1100" b="1">
+                        <a:defRPr sz="1050" b="1">
                           <a:solidFill>
                             <a:srgbClr val="FFFFFF"/>
                           </a:solidFill>
-                          <a:latin typeface="Calibri"/>
+                          <a:latin typeface="Arial"/>
                         </a:defRPr>
                       </a:pPr>
                       <a:r>
@@ -5560,11 +6227,11 @@
                     <a:lstStyle/>
                     <a:p>
                       <a:pPr algn="l">
-                        <a:defRPr sz="1100" b="1">
+                        <a:defRPr sz="1050" b="1">
                           <a:solidFill>
                             <a:srgbClr val="FFFFFF"/>
                           </a:solidFill>
-                          <a:latin typeface="Calibri"/>
+                          <a:latin typeface="Arial"/>
                         </a:defRPr>
                       </a:pPr>
                       <a:r>
@@ -5579,7 +6246,7 @@
                   </a:tcPr>
                 </a:tc>
               </a:tr>
-              <a:tr h="804672">
+              <a:tr h="941832">
                 <a:tc>
                   <a:txBody>
                     <a:bodyPr wrap="square" lIns="109728" rIns="109728" tIns="73152" bIns="73152"/>
@@ -5590,7 +6257,7 @@
                           <a:solidFill>
                             <a:srgbClr val="0F172A"/>
                           </a:solidFill>
-                          <a:latin typeface="Calibri"/>
+                          <a:latin typeface="Arial"/>
                         </a:defRPr>
                       </a:pPr>
                       <a:r>
@@ -5600,7 +6267,7 @@
                   </a:txBody>
                   <a:tcPr anchor="ctr">
                     <a:solidFill>
-                      <a:srgbClr val="F1F5F9"/>
+                      <a:srgbClr val="F8FAFC"/>
                     </a:solidFill>
                   </a:tcPr>
                 </a:tc>
@@ -5614,7 +6281,7 @@
                           <a:solidFill>
                             <a:srgbClr val="0F172A"/>
                           </a:solidFill>
-                          <a:latin typeface="Calibri"/>
+                          <a:latin typeface="Arial"/>
                         </a:defRPr>
                       </a:pPr>
                       <a:r>
@@ -5624,7 +6291,7 @@
                   </a:txBody>
                   <a:tcPr anchor="ctr">
                     <a:solidFill>
-                      <a:srgbClr val="F1F5F9"/>
+                      <a:srgbClr val="F8FAFC"/>
                     </a:solidFill>
                   </a:tcPr>
                 </a:tc>
@@ -5638,7 +6305,7 @@
                           <a:solidFill>
                             <a:srgbClr val="0F172A"/>
                           </a:solidFill>
-                          <a:latin typeface="Calibri"/>
+                          <a:latin typeface="Arial"/>
                         </a:defRPr>
                       </a:pPr>
                       <a:r>
@@ -5648,7 +6315,7 @@
                   </a:txBody>
                   <a:tcPr anchor="ctr">
                     <a:solidFill>
-                      <a:srgbClr val="F1F5F9"/>
+                      <a:srgbClr val="F8FAFC"/>
                     </a:solidFill>
                   </a:tcPr>
                 </a:tc>
@@ -5662,7 +6329,7 @@
                           <a:solidFill>
                             <a:srgbClr val="0F172A"/>
                           </a:solidFill>
-                          <a:latin typeface="Calibri"/>
+                          <a:latin typeface="Arial"/>
                         </a:defRPr>
                       </a:pPr>
                       <a:r>
@@ -5672,7 +6339,7 @@
                   </a:txBody>
                   <a:tcPr anchor="ctr">
                     <a:solidFill>
-                      <a:srgbClr val="F1F5F9"/>
+                      <a:srgbClr val="F8FAFC"/>
                     </a:solidFill>
                   </a:tcPr>
                 </a:tc>
@@ -5686,7 +6353,7 @@
                           <a:solidFill>
                             <a:srgbClr val="0F766E"/>
                           </a:solidFill>
-                          <a:latin typeface="Calibri"/>
+                          <a:latin typeface="Arial"/>
                         </a:defRPr>
                       </a:pPr>
                       <a:r>
@@ -5696,12 +6363,12 @@
                   </a:txBody>
                   <a:tcPr anchor="ctr">
                     <a:solidFill>
-                      <a:srgbClr val="F1F5F9"/>
+                      <a:srgbClr val="F8FAFC"/>
                     </a:solidFill>
                   </a:tcPr>
                 </a:tc>
               </a:tr>
-              <a:tr h="804672">
+              <a:tr h="941832">
                 <a:tc>
                   <a:txBody>
                     <a:bodyPr wrap="square" lIns="109728" rIns="109728" tIns="73152" bIns="73152"/>
@@ -5712,7 +6379,7 @@
                           <a:solidFill>
                             <a:srgbClr val="0F172A"/>
                           </a:solidFill>
-                          <a:latin typeface="Calibri"/>
+                          <a:latin typeface="Arial"/>
                         </a:defRPr>
                       </a:pPr>
                       <a:r>
@@ -5736,7 +6403,7 @@
                           <a:solidFill>
                             <a:srgbClr val="0F172A"/>
                           </a:solidFill>
-                          <a:latin typeface="Calibri"/>
+                          <a:latin typeface="Arial"/>
                         </a:defRPr>
                       </a:pPr>
                       <a:r>
@@ -5760,7 +6427,7 @@
                           <a:solidFill>
                             <a:srgbClr val="0F172A"/>
                           </a:solidFill>
-                          <a:latin typeface="Calibri"/>
+                          <a:latin typeface="Arial"/>
                         </a:defRPr>
                       </a:pPr>
                       <a:r>
@@ -5784,7 +6451,7 @@
                           <a:solidFill>
                             <a:srgbClr val="0F172A"/>
                           </a:solidFill>
-                          <a:latin typeface="Calibri"/>
+                          <a:latin typeface="Arial"/>
                         </a:defRPr>
                       </a:pPr>
                       <a:r>
@@ -5808,7 +6475,7 @@
                           <a:solidFill>
                             <a:srgbClr val="0F766E"/>
                           </a:solidFill>
-                          <a:latin typeface="Calibri"/>
+                          <a:latin typeface="Arial"/>
                         </a:defRPr>
                       </a:pPr>
                       <a:r>
@@ -5823,7 +6490,7 @@
                   </a:tcPr>
                 </a:tc>
               </a:tr>
-              <a:tr h="804672">
+              <a:tr h="941832">
                 <a:tc>
                   <a:txBody>
                     <a:bodyPr wrap="square" lIns="109728" rIns="109728" tIns="73152" bIns="73152"/>
@@ -5834,7 +6501,7 @@
                           <a:solidFill>
                             <a:srgbClr val="0F172A"/>
                           </a:solidFill>
-                          <a:latin typeface="Calibri"/>
+                          <a:latin typeface="Arial"/>
                         </a:defRPr>
                       </a:pPr>
                       <a:r>
@@ -5844,7 +6511,7 @@
                   </a:txBody>
                   <a:tcPr anchor="ctr">
                     <a:solidFill>
-                      <a:srgbClr val="F1F5F9"/>
+                      <a:srgbClr val="F8FAFC"/>
                     </a:solidFill>
                   </a:tcPr>
                 </a:tc>
@@ -5858,7 +6525,7 @@
                           <a:solidFill>
                             <a:srgbClr val="0F172A"/>
                           </a:solidFill>
-                          <a:latin typeface="Calibri"/>
+                          <a:latin typeface="Arial"/>
                         </a:defRPr>
                       </a:pPr>
                       <a:r>
@@ -5868,7 +6535,7 @@
                   </a:txBody>
                   <a:tcPr anchor="ctr">
                     <a:solidFill>
-                      <a:srgbClr val="F1F5F9"/>
+                      <a:srgbClr val="F8FAFC"/>
                     </a:solidFill>
                   </a:tcPr>
                 </a:tc>
@@ -5882,7 +6549,7 @@
                           <a:solidFill>
                             <a:srgbClr val="0F172A"/>
                           </a:solidFill>
-                          <a:latin typeface="Calibri"/>
+                          <a:latin typeface="Arial"/>
                         </a:defRPr>
                       </a:pPr>
                       <a:r>
@@ -5892,7 +6559,7 @@
                   </a:txBody>
                   <a:tcPr anchor="ctr">
                     <a:solidFill>
-                      <a:srgbClr val="F1F5F9"/>
+                      <a:srgbClr val="F8FAFC"/>
                     </a:solidFill>
                   </a:tcPr>
                 </a:tc>
@@ -5906,7 +6573,7 @@
                           <a:solidFill>
                             <a:srgbClr val="0F172A"/>
                           </a:solidFill>
-                          <a:latin typeface="Calibri"/>
+                          <a:latin typeface="Arial"/>
                         </a:defRPr>
                       </a:pPr>
                       <a:r>
@@ -5916,7 +6583,7 @@
                   </a:txBody>
                   <a:tcPr anchor="ctr">
                     <a:solidFill>
-                      <a:srgbClr val="F1F5F9"/>
+                      <a:srgbClr val="F8FAFC"/>
                     </a:solidFill>
                   </a:tcPr>
                 </a:tc>
@@ -5930,7 +6597,7 @@
                           <a:solidFill>
                             <a:srgbClr val="0F766E"/>
                           </a:solidFill>
-                          <a:latin typeface="Calibri"/>
+                          <a:latin typeface="Arial"/>
                         </a:defRPr>
                       </a:pPr>
                       <a:r>
@@ -5940,12 +6607,12 @@
                   </a:txBody>
                   <a:tcPr anchor="ctr">
                     <a:solidFill>
-                      <a:srgbClr val="F1F5F9"/>
+                      <a:srgbClr val="F8FAFC"/>
                     </a:solidFill>
                   </a:tcPr>
                 </a:tc>
               </a:tr>
-              <a:tr h="804672">
+              <a:tr h="941832">
                 <a:tc>
                   <a:txBody>
                     <a:bodyPr wrap="square" lIns="109728" rIns="109728" tIns="73152" bIns="73152"/>
@@ -5956,7 +6623,7 @@
                           <a:solidFill>
                             <a:srgbClr val="0F172A"/>
                           </a:solidFill>
-                          <a:latin typeface="Calibri"/>
+                          <a:latin typeface="Arial"/>
                         </a:defRPr>
                       </a:pPr>
                       <a:r>
@@ -5980,7 +6647,7 @@
                           <a:solidFill>
                             <a:srgbClr val="0F172A"/>
                           </a:solidFill>
-                          <a:latin typeface="Calibri"/>
+                          <a:latin typeface="Arial"/>
                         </a:defRPr>
                       </a:pPr>
                       <a:r>
@@ -6004,7 +6671,7 @@
                           <a:solidFill>
                             <a:srgbClr val="0F172A"/>
                           </a:solidFill>
-                          <a:latin typeface="Calibri"/>
+                          <a:latin typeface="Arial"/>
                         </a:defRPr>
                       </a:pPr>
                       <a:r>
@@ -6028,7 +6695,7 @@
                           <a:solidFill>
                             <a:srgbClr val="0F172A"/>
                           </a:solidFill>
-                          <a:latin typeface="Calibri"/>
+                          <a:latin typeface="Arial"/>
                         </a:defRPr>
                       </a:pPr>
                       <a:r>
@@ -6052,7 +6719,7 @@
                           <a:solidFill>
                             <a:srgbClr val="0F766E"/>
                           </a:solidFill>
-                          <a:latin typeface="Calibri"/>
+                          <a:latin typeface="Arial"/>
                         </a:defRPr>
                       </a:pPr>
                       <a:r>
@@ -6117,17 +6784,22 @@
             <p:ph type="title"/>
           </p:nvPr>
         </p:nvSpPr>
-        <p:spPr/>
-        <p:txBody>
-          <a:bodyPr/>
-          <a:lstStyle/>
-          <a:p>
-            <a:pPr>
+        <p:spPr>
+          <a:xfrm>
+            <a:off x="841248" y="411480"/>
+            <a:ext cx="10515600" cy="594360"/>
+          </a:xfrm>
+        </p:spPr>
+        <p:txBody>
+          <a:bodyPr anchor="ctr"/>
+          <a:lstStyle/>
+          <a:p>
+            <a:pPr algn="l">
               <a:defRPr sz="2400" b="1">
                 <a:solidFill>
                   <a:srgbClr val="0F172A"/>
                 </a:solidFill>
-                <a:latin typeface="Calibri"/>
+                <a:latin typeface="Arial"/>
               </a:defRPr>
             </a:pPr>
             <a:r>
@@ -6152,15 +6824,27 @@
             <p:ph type="sldNum" sz="quarter" idx="12"/>
           </p:nvPr>
         </p:nvSpPr>
-        <p:spPr/>
-        <p:txBody>
-          <a:bodyPr/>
-          <a:lstStyle/>
-          <a:p>
-            <a:fld id="{C9080329-36BA-448C-B0A7-FA1AF13B2E0F}" type="slidenum">
-              <a:rPr lang="en-US" smtClean="0"/>
+        <p:spPr>
+          <a:xfrm>
+            <a:off x="10515600" y="6419088"/>
+            <a:ext cx="841248" cy="320040"/>
+          </a:xfrm>
+        </p:spPr>
+        <p:txBody>
+          <a:bodyPr anchor="ctr"/>
+          <a:lstStyle/>
+          <a:p>
+            <a:pPr algn="r">
+              <a:defRPr sz="1000">
+                <a:solidFill>
+                  <a:srgbClr val="64748B"/>
+                </a:solidFill>
+                <a:latin typeface="Arial"/>
+              </a:defRPr>
+            </a:pPr>
+            <a:r>
               <a:t>5</a:t>
-            </a:fld>
+            </a:r>
             <a:endParaRPr lang="en-US"/>
           </a:p>
         </p:txBody>
@@ -6179,8 +6863,8 @@
         </p:nvSpPr>
         <p:spPr>
           <a:xfrm>
-            <a:off x="2558716" y="6482255"/>
-            <a:ext cx="7515726" cy="369332"/>
+            <a:off x="1371600" y="6419088"/>
+            <a:ext cx="9445752" cy="320040"/>
           </a:xfrm>
           <a:prstGeom prst="rect">
             <a:avLst/>
@@ -6188,38 +6872,45 @@
           <a:noFill/>
         </p:spPr>
         <p:txBody>
-          <a:bodyPr wrap="square" rtlCol="0">
+          <a:bodyPr wrap="square" rtlCol="0" anchor="ctr">
             <a:spAutoFit/>
           </a:bodyPr>
           <a:lstStyle/>
           <a:p>
-            <a:r>
-              <a:rPr lang="en-US" b="1" dirty="0"/>
-              <a:t>Amity School of engineering &amp; Technology, Amity University, Kolkata </a:t>
-            </a:r>
-          </a:p>
-        </p:txBody>
-      </p:sp>
-      <p:sp>
-        <p:nvSpPr>
-          <p:cNvPr id="7" name="Rounded Rectangle 6"/>
+            <a:pPr algn="ctr">
+              <a:defRPr sz="950" b="0">
+                <a:solidFill>
+                  <a:srgbClr val="64748B"/>
+                </a:solidFill>
+                <a:latin typeface="Arial"/>
+              </a:defRPr>
+            </a:pPr>
+            <a:r>
+              <a:t>Amity School of Engineering &amp; Technology, Amity University, Kolkata</a:t>
+            </a:r>
+          </a:p>
+        </p:txBody>
+      </p:sp>
+      <p:sp>
+        <p:nvSpPr>
+          <p:cNvPr id="7" name="Rectangle 6"/>
           <p:cNvSpPr/>
           <p:nvPr/>
         </p:nvSpPr>
         <p:spPr>
           <a:xfrm>
-            <a:off x="841248" y="1645920"/>
-            <a:ext cx="5120640" cy="2121408"/>
+            <a:off x="841248" y="1078992"/>
+            <a:ext cx="10515600" cy="13716"/>
           </a:xfrm>
-          <a:prstGeom prst="roundRect">
+          <a:prstGeom prst="rect">
             <a:avLst/>
           </a:prstGeom>
           <a:solidFill>
-            <a:srgbClr val="F8FAFC"/>
+            <a:srgbClr val="CBD5E1"/>
           </a:solidFill>
-          <a:ln w="12700">
+          <a:ln w="6350">
             <a:solidFill>
-              <a:srgbClr val="E2E8F0"/>
+              <a:srgbClr val="CBD5E1"/>
             </a:solidFill>
           </a:ln>
         </p:spPr>
@@ -6238,122 +6929,32 @@
           </a:fontRef>
         </p:style>
         <p:txBody>
-          <a:bodyPr rtlCol="0" anchor="ctr" wrap="square" lIns="201168" rIns="201168" tIns="164592" bIns="164592"/>
-          <a:lstStyle/>
-          <a:p>
-            <a:pPr algn="ctr">
-              <a:spcAft>
-                <a:spcPts val="600"/>
-              </a:spcAft>
-              <a:defRPr sz="1300" b="1">
-                <a:solidFill>
-                  <a:srgbClr val="0F172A"/>
-                </a:solidFill>
-                <a:latin typeface="Calibri"/>
-              </a:defRPr>
-            </a:pPr>
-            <a:r>
-              <a:t>Stage 1: Multi-Source Data Acquisition</a:t>
-            </a:r>
-          </a:p>
-          <a:p>
-            <a:pPr>
-              <a:spcAft>
-                <a:spcPts val="400"/>
-              </a:spcAft>
-            </a:pPr>
-            <a:r>
-              <a:rPr sz="1100" b="1">
-                <a:solidFill>
-                  <a:srgbClr val="0F172A"/>
-                </a:solidFill>
-                <a:latin typeface="Calibri"/>
-              </a:rPr>
-              <a:t>• Kolkata Restaurant Directory: </a:t>
-            </a:r>
-            <a:r>
-              <a:rPr sz="1100">
-                <a:solidFill>
-                  <a:srgbClr val="334155"/>
-                </a:solidFill>
-                <a:latin typeface="Calibri"/>
-              </a:rPr>
-              <a:t>100 real Zomato-listed establishments spanning 11 Kolkata zones, cuisines, and price tiers.</a:t>
-            </a:r>
-          </a:p>
-          <a:p>
-            <a:pPr>
-              <a:spcAft>
-                <a:spcPts val="400"/>
-              </a:spcAft>
-            </a:pPr>
-            <a:r>
-              <a:rPr sz="1100" b="1">
-                <a:solidFill>
-                  <a:srgbClr val="0F172A"/>
-                </a:solidFill>
-                <a:latin typeface="Calibri"/>
-              </a:rPr>
-              <a:t>• Dual Training &amp; Review Corpora: </a:t>
-            </a:r>
-            <a:r>
-              <a:rPr sz="1100">
-                <a:solidFill>
-                  <a:srgbClr val="334155"/>
-                </a:solidFill>
-                <a:latin typeface="Calibri"/>
-              </a:rPr>
-              <a:t>13,144 real Yelp reviews for supervised modeling + 5,000 synthetic Kolkata consumer reviews.</a:t>
-            </a:r>
-          </a:p>
-          <a:p>
-            <a:pPr>
-              <a:spcAft>
-                <a:spcPts val="400"/>
-              </a:spcAft>
-            </a:pPr>
-            <a:r>
-              <a:rPr sz="1100" b="1">
-                <a:solidFill>
-                  <a:srgbClr val="0F172A"/>
-                </a:solidFill>
-                <a:latin typeface="Calibri"/>
-              </a:rPr>
-              <a:t>• Civic Health Audit Records: </a:t>
-            </a:r>
-            <a:r>
-              <a:rPr sz="1100">
-                <a:solidFill>
-                  <a:srgbClr val="334155"/>
-                </a:solidFill>
-                <a:latin typeface="Calibri"/>
-              </a:rPr>
-              <a:t>107 inspection records matching official FSSAI violation categories and outcome codes.</a:t>
-            </a:r>
-          </a:p>
-        </p:txBody>
-      </p:sp>
-      <p:sp>
-        <p:nvSpPr>
-          <p:cNvPr id="8" name="Rounded Rectangle 7"/>
+          <a:bodyPr rtlCol="0" anchor="ctr"/>
+          <a:lstStyle/>
+          <a:p>
+            <a:pPr algn="ctr"/>
+          </a:p>
+        </p:txBody>
+      </p:sp>
+      <p:sp>
+        <p:nvSpPr>
+          <p:cNvPr id="8" name="Rectangle 7"/>
           <p:cNvSpPr/>
           <p:nvPr/>
         </p:nvSpPr>
         <p:spPr>
           <a:xfrm>
-            <a:off x="6236208" y="1645920"/>
-            <a:ext cx="5120640" cy="2121408"/>
+            <a:off x="841248" y="1371600"/>
+            <a:ext cx="5120640" cy="36576"/>
           </a:xfrm>
-          <a:prstGeom prst="roundRect">
+          <a:prstGeom prst="rect">
             <a:avLst/>
           </a:prstGeom>
           <a:solidFill>
-            <a:srgbClr val="F8FAFC"/>
+            <a:srgbClr val="0F172A"/>
           </a:solidFill>
-          <a:ln w="12700">
-            <a:solidFill>
-              <a:srgbClr val="E2E8F0"/>
-            </a:solidFill>
+          <a:ln>
+            <a:noFill/>
           </a:ln>
         </p:spPr>
         <p:style>
@@ -6371,122 +6972,30 @@
           </a:fontRef>
         </p:style>
         <p:txBody>
-          <a:bodyPr rtlCol="0" anchor="ctr" wrap="square" lIns="201168" rIns="201168" tIns="164592" bIns="164592"/>
-          <a:lstStyle/>
-          <a:p>
-            <a:pPr algn="ctr">
-              <a:spcAft>
-                <a:spcPts val="600"/>
-              </a:spcAft>
-              <a:defRPr sz="1300" b="1">
-                <a:solidFill>
-                  <a:srgbClr val="0F766E"/>
-                </a:solidFill>
-                <a:latin typeface="Calibri"/>
-              </a:defRPr>
-            </a:pPr>
-            <a:r>
-              <a:t>Stage 2: Discourse Preprocessing &amp; Splitting</a:t>
-            </a:r>
-          </a:p>
-          <a:p>
-            <a:pPr>
-              <a:spcAft>
-                <a:spcPts val="400"/>
-              </a:spcAft>
-            </a:pPr>
-            <a:r>
-              <a:rPr sz="1100" b="1">
-                <a:solidFill>
-                  <a:srgbClr val="0F172A"/>
-                </a:solidFill>
-                <a:latin typeface="Calibri"/>
-              </a:rPr>
-              <a:t>• Text Normalization: </a:t>
-            </a:r>
-            <a:r>
-              <a:rPr sz="1100">
-                <a:solidFill>
-                  <a:srgbClr val="334155"/>
-                </a:solidFill>
-                <a:latin typeface="Calibri"/>
-              </a:rPr>
-              <a:t>Contraction expansion ('didn't' -&gt; 'did not'), lowercase conversion, emoji retention for sentiment nuance.</a:t>
-            </a:r>
-          </a:p>
-          <a:p>
-            <a:pPr>
-              <a:spcAft>
-                <a:spcPts val="400"/>
-              </a:spcAft>
-            </a:pPr>
-            <a:r>
-              <a:rPr sz="1100" b="1">
-                <a:solidFill>
-                  <a:srgbClr val="0F172A"/>
-                </a:solidFill>
-                <a:latin typeface="Calibri"/>
-              </a:rPr>
-              <a:t>• Discourse Clause Splitting: </a:t>
-            </a:r>
-            <a:r>
-              <a:rPr sz="1100">
-                <a:solidFill>
-                  <a:srgbClr val="334155"/>
-                </a:solidFill>
-                <a:latin typeface="Calibri"/>
-              </a:rPr>
-              <a:t>Segmenting review text around contrastive conjunctions ('but', 'however', 'although', 'whereas').</a:t>
-            </a:r>
-          </a:p>
-          <a:p>
-            <a:pPr>
-              <a:spcAft>
-                <a:spcPts val="400"/>
-              </a:spcAft>
-            </a:pPr>
-            <a:r>
-              <a:rPr sz="1100" b="1">
-                <a:solidFill>
-                  <a:srgbClr val="0F172A"/>
-                </a:solidFill>
-                <a:latin typeface="Calibri"/>
-              </a:rPr>
-              <a:t>• Feature Extraction: </a:t>
-            </a:r>
-            <a:r>
-              <a:rPr sz="1100">
-                <a:solidFill>
-                  <a:srgbClr val="334155"/>
-                </a:solidFill>
-                <a:latin typeface="Calibri"/>
-              </a:rPr>
-              <a:t>Unigram + bigram TF-IDF vectorization (sublinear TF scaling, max 10,000 features, min_df=2).</a:t>
-            </a:r>
-          </a:p>
-        </p:txBody>
-      </p:sp>
-      <p:sp>
-        <p:nvSpPr>
-          <p:cNvPr id="9" name="Rounded Rectangle 8"/>
+          <a:bodyPr rtlCol="0" anchor="ctr"/>
+          <a:lstStyle/>
+          <a:p>
+            <a:pPr algn="ctr"/>
+          </a:p>
+        </p:txBody>
+      </p:sp>
+      <p:sp>
+        <p:nvSpPr>
+          <p:cNvPr id="9" name="Rectangle 8"/>
           <p:cNvSpPr/>
           <p:nvPr/>
         </p:nvSpPr>
         <p:spPr>
           <a:xfrm>
-            <a:off x="841248" y="3931920"/>
-            <a:ext cx="5120640" cy="2121408"/>
+            <a:off x="841248" y="1463040"/>
+            <a:ext cx="5120640" cy="2194560"/>
           </a:xfrm>
-          <a:prstGeom prst="roundRect">
+          <a:prstGeom prst="rect">
             <a:avLst/>
           </a:prstGeom>
-          <a:solidFill>
-            <a:srgbClr val="F8FAFC"/>
-          </a:solidFill>
-          <a:ln w="12700">
-            <a:solidFill>
-              <a:srgbClr val="E2E8F0"/>
-            </a:solidFill>
+          <a:noFill/>
+          <a:ln>
+            <a:noFill/>
           </a:ln>
         </p:spPr>
         <p:style>
@@ -6504,122 +7013,123 @@
           </a:fontRef>
         </p:style>
         <p:txBody>
-          <a:bodyPr rtlCol="0" anchor="ctr" wrap="square" lIns="201168" rIns="201168" tIns="164592" bIns="164592"/>
+          <a:bodyPr rtlCol="0" anchor="t" wrap="square" lIns="0" rIns="0" tIns="0" bIns="0"/>
           <a:lstStyle/>
           <a:p>
             <a:pPr algn="ctr">
+              <a:spcBef>
+                <a:spcPts val="400"/>
+              </a:spcBef>
               <a:spcAft>
-                <a:spcPts val="600"/>
+                <a:spcPts val="1000"/>
               </a:spcAft>
-              <a:defRPr sz="1300" b="1">
-                <a:solidFill>
-                  <a:srgbClr val="1E40AF"/>
-                </a:solidFill>
-                <a:latin typeface="Calibri"/>
+              <a:defRPr sz="1250" b="1">
+                <a:solidFill>
+                  <a:srgbClr val="0F172A"/>
+                </a:solidFill>
+                <a:latin typeface="Arial"/>
               </a:defRPr>
             </a:pPr>
             <a:r>
-              <a:t>Stage 3: Multi-Task Inference &amp; Health Alerts</a:t>
+              <a:t>Stage 1: Multi-Source Data Acquisition</a:t>
             </a:r>
           </a:p>
           <a:p>
             <a:pPr>
               <a:spcAft>
-                <a:spcPts val="400"/>
+                <a:spcPts val="500"/>
               </a:spcAft>
             </a:pPr>
             <a:r>
-              <a:rPr sz="1100" b="1">
+              <a:rPr sz="1050" b="1">
                 <a:solidFill>
                   <a:srgbClr val="0F172A"/>
                 </a:solidFill>
-                <a:latin typeface="Calibri"/>
-              </a:rPr>
-              <a:t>• Overall Sentiment Classifier: </a:t>
-            </a:r>
-            <a:r>
-              <a:rPr sz="1100">
+                <a:latin typeface="Arial"/>
+              </a:rPr>
+              <a:t>•  Kolkata Restaurant Directory: </a:t>
+            </a:r>
+            <a:r>
+              <a:rPr sz="1000">
                 <a:solidFill>
                   <a:srgbClr val="334155"/>
                 </a:solidFill>
-                <a:latin typeface="Calibri"/>
-              </a:rPr>
-              <a:t>Balanced Logistic Regression predicting Positive, Neutral, or Negative polarity.</a:t>
+                <a:latin typeface="Arial"/>
+              </a:rPr>
+              <a:t>100 real Zomato-listed establishments spanning 11 Kolkata zones, cuisines, and price tiers.</a:t>
             </a:r>
           </a:p>
           <a:p>
             <a:pPr>
               <a:spcAft>
-                <a:spcPts val="400"/>
+                <a:spcPts val="500"/>
               </a:spcAft>
             </a:pPr>
             <a:r>
-              <a:rPr sz="1100" b="1">
+              <a:rPr sz="1050" b="1">
                 <a:solidFill>
                   <a:srgbClr val="0F172A"/>
                 </a:solidFill>
-                <a:latin typeface="Calibri"/>
-              </a:rPr>
-              <a:t>• 5-Aspect ABSA Engine: </a:t>
-            </a:r>
-            <a:r>
-              <a:rPr sz="1100">
+                <a:latin typeface="Arial"/>
+              </a:rPr>
+              <a:t>•  Dual Review Corpora: </a:t>
+            </a:r>
+            <a:r>
+              <a:rPr sz="1000">
                 <a:solidFill>
                   <a:srgbClr val="334155"/>
                 </a:solidFill>
-                <a:latin typeface="Calibri"/>
-              </a:rPr>
-              <a:t>Clause-level multi-label tagging across: Food, Service, Hygiene, Ambience, and Price.</a:t>
+                <a:latin typeface="Arial"/>
+              </a:rPr>
+              <a:t>13,144 real Yelp reviews for supervised modeling + 5,000 synthetic Kolkata consumer reviews.</a:t>
             </a:r>
           </a:p>
           <a:p>
             <a:pPr>
               <a:spcAft>
-                <a:spcPts val="400"/>
+                <a:spcPts val="500"/>
               </a:spcAft>
             </a:pPr>
             <a:r>
-              <a:rPr sz="1100" b="1">
+              <a:rPr sz="1050" b="1">
                 <a:solidFill>
                   <a:srgbClr val="0F172A"/>
                 </a:solidFill>
-                <a:latin typeface="Calibri"/>
-              </a:rPr>
-              <a:t>• Public Health Surveillance: </a:t>
-            </a:r>
-            <a:r>
-              <a:rPr sz="1100">
+                <a:latin typeface="Arial"/>
+              </a:rPr>
+              <a:t>•  Civic Health Audit Records: </a:t>
+            </a:r>
+            <a:r>
+              <a:rPr sz="1000">
                 <a:solidFill>
                   <a:srgbClr val="334155"/>
                 </a:solidFill>
-                <a:latin typeface="Calibri"/>
-              </a:rPr>
-              <a:t>Rule-based regex engine scanning for Biological Hazards (vomiting, Salmonella) &amp; Pests (cockroach, rat).</a:t>
-            </a:r>
-          </a:p>
-        </p:txBody>
-      </p:sp>
-      <p:sp>
-        <p:nvSpPr>
-          <p:cNvPr id="10" name="Rounded Rectangle 9"/>
+                <a:latin typeface="Arial"/>
+              </a:rPr>
+              <a:t>107 inspection records matching official FSSAI violation categories and outcome codes.</a:t>
+            </a:r>
+          </a:p>
+        </p:txBody>
+      </p:sp>
+      <p:sp>
+        <p:nvSpPr>
+          <p:cNvPr id="10" name="Rectangle 9"/>
           <p:cNvSpPr/>
           <p:nvPr/>
         </p:nvSpPr>
         <p:spPr>
           <a:xfrm>
-            <a:off x="6236208" y="3931920"/>
-            <a:ext cx="5120640" cy="2121408"/>
+            <a:off x="6236208" y="1371600"/>
+            <a:ext cx="5120640" cy="36576"/>
           </a:xfrm>
-          <a:prstGeom prst="roundRect">
+          <a:prstGeom prst="rect">
             <a:avLst/>
           </a:prstGeom>
           <a:solidFill>
-            <a:srgbClr val="F8FAFC"/>
+            <a:srgbClr val="0F766E"/>
           </a:solidFill>
-          <a:ln w="12700">
-            <a:solidFill>
-              <a:srgbClr val="E2E8F0"/>
-            </a:solidFill>
+          <a:ln>
+            <a:noFill/>
           </a:ln>
         </p:spPr>
         <p:style>
@@ -6637,95 +7147,489 @@
           </a:fontRef>
         </p:style>
         <p:txBody>
-          <a:bodyPr rtlCol="0" anchor="ctr" wrap="square" lIns="201168" rIns="201168" tIns="164592" bIns="164592"/>
+          <a:bodyPr rtlCol="0" anchor="ctr"/>
+          <a:lstStyle/>
+          <a:p>
+            <a:pPr algn="ctr"/>
+          </a:p>
+        </p:txBody>
+      </p:sp>
+      <p:sp>
+        <p:nvSpPr>
+          <p:cNvPr id="11" name="Rectangle 10"/>
+          <p:cNvSpPr/>
+          <p:nvPr/>
+        </p:nvSpPr>
+        <p:spPr>
+          <a:xfrm>
+            <a:off x="6236208" y="1463040"/>
+            <a:ext cx="5120640" cy="2194560"/>
+          </a:xfrm>
+          <a:prstGeom prst="rect">
+            <a:avLst/>
+          </a:prstGeom>
+          <a:noFill/>
+          <a:ln>
+            <a:noFill/>
+          </a:ln>
+        </p:spPr>
+        <p:style>
+          <a:lnRef idx="1">
+            <a:schemeClr val="accent1"/>
+          </a:lnRef>
+          <a:fillRef idx="3">
+            <a:schemeClr val="accent1"/>
+          </a:fillRef>
+          <a:effectRef idx="2">
+            <a:schemeClr val="accent1"/>
+          </a:effectRef>
+          <a:fontRef idx="minor">
+            <a:schemeClr val="lt1"/>
+          </a:fontRef>
+        </p:style>
+        <p:txBody>
+          <a:bodyPr rtlCol="0" anchor="t" wrap="square" lIns="0" rIns="0" tIns="0" bIns="0"/>
           <a:lstStyle/>
           <a:p>
             <a:pPr algn="ctr">
+              <a:spcBef>
+                <a:spcPts val="400"/>
+              </a:spcBef>
               <a:spcAft>
-                <a:spcPts val="600"/>
+                <a:spcPts val="1000"/>
               </a:spcAft>
-              <a:defRPr sz="1300" b="1">
-                <a:solidFill>
-                  <a:srgbClr val="0F172A"/>
-                </a:solidFill>
-                <a:latin typeface="Calibri"/>
+              <a:defRPr sz="1250" b="1">
+                <a:solidFill>
+                  <a:srgbClr val="0F766E"/>
+                </a:solidFill>
+                <a:latin typeface="Arial"/>
               </a:defRPr>
             </a:pPr>
             <a:r>
-              <a:t>Stage 4: Multi-Criteria Ranking &amp; Web Deployment</a:t>
+              <a:t>Stage 2: Discourse Preprocessing &amp; Splitting</a:t>
             </a:r>
           </a:p>
           <a:p>
             <a:pPr>
               <a:spcAft>
-                <a:spcPts val="400"/>
+                <a:spcPts val="500"/>
               </a:spcAft>
             </a:pPr>
             <a:r>
-              <a:rPr sz="1100" b="1">
+              <a:rPr sz="1050" b="1">
                 <a:solidFill>
                   <a:srgbClr val="0F172A"/>
                 </a:solidFill>
-                <a:latin typeface="Calibri"/>
-              </a:rPr>
-              <a:t>• Composite Score Blend: </a:t>
-            </a:r>
-            <a:r>
-              <a:rPr sz="1100">
+                <a:latin typeface="Arial"/>
+              </a:rPr>
+              <a:t>•  Text Normalization: </a:t>
+            </a:r>
+            <a:r>
+              <a:rPr sz="1000">
                 <a:solidFill>
                   <a:srgbClr val="334155"/>
                 </a:solidFill>
-                <a:latin typeface="Calibri"/>
-              </a:rPr>
-              <a:t>Rank = 50% Sentiment Score + 25% Zomato Rating + 15% Verified Safety + 10% Occasion Tags.</a:t>
+                <a:latin typeface="Arial"/>
+              </a:rPr>
+              <a:t>Contraction expansion ('didn't' -&gt; 'did not'), lowercase conversion, emoji retention for sentiment nuance.</a:t>
             </a:r>
           </a:p>
           <a:p>
             <a:pPr>
               <a:spcAft>
-                <a:spcPts val="400"/>
+                <a:spcPts val="500"/>
               </a:spcAft>
             </a:pPr>
             <a:r>
-              <a:rPr sz="1100" b="1">
+              <a:rPr sz="1050" b="1">
                 <a:solidFill>
                   <a:srgbClr val="0F172A"/>
                 </a:solidFill>
-                <a:latin typeface="Calibri"/>
-              </a:rPr>
-              <a:t>• Zero-Fabrication Principle: </a:t>
-            </a:r>
-            <a:r>
-              <a:rPr sz="1100">
+                <a:latin typeface="Arial"/>
+              </a:rPr>
+              <a:t>•  Discourse Clause Splitting: </a:t>
+            </a:r>
+            <a:r>
+              <a:rPr sz="1000">
                 <a:solidFill>
                   <a:srgbClr val="334155"/>
                 </a:solidFill>
-                <a:latin typeface="Calibri"/>
-              </a:rPr>
-              <a:t>If no inspection audit exists, display 'Safety data unavailable' — never fabricate a safety score.</a:t>
+                <a:latin typeface="Arial"/>
+              </a:rPr>
+              <a:t>Segmenting review text around contrastive conjunctions ('but', 'however', 'although', 'whereas').</a:t>
             </a:r>
           </a:p>
           <a:p>
             <a:pPr>
               <a:spcAft>
+                <a:spcPts val="500"/>
+              </a:spcAft>
+            </a:pPr>
+            <a:r>
+              <a:rPr sz="1050" b="1">
+                <a:solidFill>
+                  <a:srgbClr val="0F172A"/>
+                </a:solidFill>
+                <a:latin typeface="Arial"/>
+              </a:rPr>
+              <a:t>•  Feature Extraction: </a:t>
+            </a:r>
+            <a:r>
+              <a:rPr sz="1000">
+                <a:solidFill>
+                  <a:srgbClr val="334155"/>
+                </a:solidFill>
+                <a:latin typeface="Arial"/>
+              </a:rPr>
+              <a:t>Unigram + bigram TF-IDF vectorization (sublinear TF scaling, max 10,000 features, min_df=2).</a:t>
+            </a:r>
+          </a:p>
+        </p:txBody>
+      </p:sp>
+      <p:sp>
+        <p:nvSpPr>
+          <p:cNvPr id="12" name="Rectangle 11"/>
+          <p:cNvSpPr/>
+          <p:nvPr/>
+        </p:nvSpPr>
+        <p:spPr>
+          <a:xfrm>
+            <a:off x="841248" y="3840480"/>
+            <a:ext cx="5120640" cy="36576"/>
+          </a:xfrm>
+          <a:prstGeom prst="rect">
+            <a:avLst/>
+          </a:prstGeom>
+          <a:solidFill>
+            <a:srgbClr val="1E40AF"/>
+          </a:solidFill>
+          <a:ln>
+            <a:noFill/>
+          </a:ln>
+        </p:spPr>
+        <p:style>
+          <a:lnRef idx="1">
+            <a:schemeClr val="accent1"/>
+          </a:lnRef>
+          <a:fillRef idx="3">
+            <a:schemeClr val="accent1"/>
+          </a:fillRef>
+          <a:effectRef idx="2">
+            <a:schemeClr val="accent1"/>
+          </a:effectRef>
+          <a:fontRef idx="minor">
+            <a:schemeClr val="lt1"/>
+          </a:fontRef>
+        </p:style>
+        <p:txBody>
+          <a:bodyPr rtlCol="0" anchor="ctr"/>
+          <a:lstStyle/>
+          <a:p>
+            <a:pPr algn="ctr"/>
+          </a:p>
+        </p:txBody>
+      </p:sp>
+      <p:sp>
+        <p:nvSpPr>
+          <p:cNvPr id="13" name="Rectangle 12"/>
+          <p:cNvSpPr/>
+          <p:nvPr/>
+        </p:nvSpPr>
+        <p:spPr>
+          <a:xfrm>
+            <a:off x="841248" y="3931920"/>
+            <a:ext cx="5120640" cy="2194560"/>
+          </a:xfrm>
+          <a:prstGeom prst="rect">
+            <a:avLst/>
+          </a:prstGeom>
+          <a:noFill/>
+          <a:ln>
+            <a:noFill/>
+          </a:ln>
+        </p:spPr>
+        <p:style>
+          <a:lnRef idx="1">
+            <a:schemeClr val="accent1"/>
+          </a:lnRef>
+          <a:fillRef idx="3">
+            <a:schemeClr val="accent1"/>
+          </a:fillRef>
+          <a:effectRef idx="2">
+            <a:schemeClr val="accent1"/>
+          </a:effectRef>
+          <a:fontRef idx="minor">
+            <a:schemeClr val="lt1"/>
+          </a:fontRef>
+        </p:style>
+        <p:txBody>
+          <a:bodyPr rtlCol="0" anchor="t" wrap="square" lIns="0" rIns="0" tIns="0" bIns="0"/>
+          <a:lstStyle/>
+          <a:p>
+            <a:pPr algn="ctr">
+              <a:spcBef>
                 <a:spcPts val="400"/>
+              </a:spcBef>
+              <a:spcAft>
+                <a:spcPts val="1000"/>
               </a:spcAft>
-            </a:pPr>
-            <a:r>
-              <a:rPr sz="1100" b="1">
+              <a:defRPr sz="1250" b="1">
+                <a:solidFill>
+                  <a:srgbClr val="1E40AF"/>
+                </a:solidFill>
+                <a:latin typeface="Arial"/>
+              </a:defRPr>
+            </a:pPr>
+            <a:r>
+              <a:t>Stage 3: Multi-Task Inference &amp; Health Alerts</a:t>
+            </a:r>
+          </a:p>
+          <a:p>
+            <a:pPr>
+              <a:spcAft>
+                <a:spcPts val="500"/>
+              </a:spcAft>
+            </a:pPr>
+            <a:r>
+              <a:rPr sz="1050" b="1">
                 <a:solidFill>
                   <a:srgbClr val="0F172A"/>
                 </a:solidFill>
-                <a:latin typeface="Calibri"/>
-              </a:rPr>
-              <a:t>• Full-Stack Web App: </a:t>
-            </a:r>
-            <a:r>
-              <a:rPr sz="1100">
+                <a:latin typeface="Arial"/>
+              </a:rPr>
+              <a:t>•  Overall Sentiment Classifier: </a:t>
+            </a:r>
+            <a:r>
+              <a:rPr sz="1000">
                 <a:solidFill>
                   <a:srgbClr val="334155"/>
                 </a:solidFill>
-                <a:latin typeface="Calibri"/>
+                <a:latin typeface="Arial"/>
+              </a:rPr>
+              <a:t>Balanced Logistic Regression predicting Positive, Neutral, or Negative polarity.</a:t>
+            </a:r>
+          </a:p>
+          <a:p>
+            <a:pPr>
+              <a:spcAft>
+                <a:spcPts val="500"/>
+              </a:spcAft>
+            </a:pPr>
+            <a:r>
+              <a:rPr sz="1050" b="1">
+                <a:solidFill>
+                  <a:srgbClr val="0F172A"/>
+                </a:solidFill>
+                <a:latin typeface="Arial"/>
+              </a:rPr>
+              <a:t>•  5-Aspect ABSA Engine: </a:t>
+            </a:r>
+            <a:r>
+              <a:rPr sz="1000">
+                <a:solidFill>
+                  <a:srgbClr val="334155"/>
+                </a:solidFill>
+                <a:latin typeface="Arial"/>
+              </a:rPr>
+              <a:t>Clause-level multi-label tagging across: Food, Service, Hygiene, Ambience, and Price.</a:t>
+            </a:r>
+          </a:p>
+          <a:p>
+            <a:pPr>
+              <a:spcAft>
+                <a:spcPts val="500"/>
+              </a:spcAft>
+            </a:pPr>
+            <a:r>
+              <a:rPr sz="1050" b="1">
+                <a:solidFill>
+                  <a:srgbClr val="0F172A"/>
+                </a:solidFill>
+                <a:latin typeface="Arial"/>
+              </a:rPr>
+              <a:t>•  Public Health Surveillance: </a:t>
+            </a:r>
+            <a:r>
+              <a:rPr sz="1000">
+                <a:solidFill>
+                  <a:srgbClr val="334155"/>
+                </a:solidFill>
+                <a:latin typeface="Arial"/>
+              </a:rPr>
+              <a:t>Rule-based regex engine scanning for Biological Hazards (vomiting, Salmonella) &amp; Pests (cockroach, rat).</a:t>
+            </a:r>
+          </a:p>
+        </p:txBody>
+      </p:sp>
+      <p:sp>
+        <p:nvSpPr>
+          <p:cNvPr id="14" name="Rectangle 13"/>
+          <p:cNvSpPr/>
+          <p:nvPr/>
+        </p:nvSpPr>
+        <p:spPr>
+          <a:xfrm>
+            <a:off x="6236208" y="3840480"/>
+            <a:ext cx="5120640" cy="36576"/>
+          </a:xfrm>
+          <a:prstGeom prst="rect">
+            <a:avLst/>
+          </a:prstGeom>
+          <a:solidFill>
+            <a:srgbClr val="0F172A"/>
+          </a:solidFill>
+          <a:ln>
+            <a:noFill/>
+          </a:ln>
+        </p:spPr>
+        <p:style>
+          <a:lnRef idx="1">
+            <a:schemeClr val="accent1"/>
+          </a:lnRef>
+          <a:fillRef idx="3">
+            <a:schemeClr val="accent1"/>
+          </a:fillRef>
+          <a:effectRef idx="2">
+            <a:schemeClr val="accent1"/>
+          </a:effectRef>
+          <a:fontRef idx="minor">
+            <a:schemeClr val="lt1"/>
+          </a:fontRef>
+        </p:style>
+        <p:txBody>
+          <a:bodyPr rtlCol="0" anchor="ctr"/>
+          <a:lstStyle/>
+          <a:p>
+            <a:pPr algn="ctr"/>
+          </a:p>
+        </p:txBody>
+      </p:sp>
+      <p:sp>
+        <p:nvSpPr>
+          <p:cNvPr id="15" name="Rectangle 14"/>
+          <p:cNvSpPr/>
+          <p:nvPr/>
+        </p:nvSpPr>
+        <p:spPr>
+          <a:xfrm>
+            <a:off x="6236208" y="3931920"/>
+            <a:ext cx="5120640" cy="2194560"/>
+          </a:xfrm>
+          <a:prstGeom prst="rect">
+            <a:avLst/>
+          </a:prstGeom>
+          <a:noFill/>
+          <a:ln>
+            <a:noFill/>
+          </a:ln>
+        </p:spPr>
+        <p:style>
+          <a:lnRef idx="1">
+            <a:schemeClr val="accent1"/>
+          </a:lnRef>
+          <a:fillRef idx="3">
+            <a:schemeClr val="accent1"/>
+          </a:fillRef>
+          <a:effectRef idx="2">
+            <a:schemeClr val="accent1"/>
+          </a:effectRef>
+          <a:fontRef idx="minor">
+            <a:schemeClr val="lt1"/>
+          </a:fontRef>
+        </p:style>
+        <p:txBody>
+          <a:bodyPr rtlCol="0" anchor="t" wrap="square" lIns="0" rIns="0" tIns="0" bIns="0"/>
+          <a:lstStyle/>
+          <a:p>
+            <a:pPr algn="ctr">
+              <a:spcBef>
+                <a:spcPts val="400"/>
+              </a:spcBef>
+              <a:spcAft>
+                <a:spcPts val="1000"/>
+              </a:spcAft>
+              <a:defRPr sz="1250" b="1">
+                <a:solidFill>
+                  <a:srgbClr val="0F172A"/>
+                </a:solidFill>
+                <a:latin typeface="Arial"/>
+              </a:defRPr>
+            </a:pPr>
+            <a:r>
+              <a:t>Stage 4: Multi-Criteria Ranking &amp; Deployment</a:t>
+            </a:r>
+          </a:p>
+          <a:p>
+            <a:pPr>
+              <a:spcAft>
+                <a:spcPts val="500"/>
+              </a:spcAft>
+            </a:pPr>
+            <a:r>
+              <a:rPr sz="1050" b="1">
+                <a:solidFill>
+                  <a:srgbClr val="0F172A"/>
+                </a:solidFill>
+                <a:latin typeface="Arial"/>
+              </a:rPr>
+              <a:t>•  Composite Score Blend: </a:t>
+            </a:r>
+            <a:r>
+              <a:rPr sz="1000">
+                <a:solidFill>
+                  <a:srgbClr val="334155"/>
+                </a:solidFill>
+                <a:latin typeface="Arial"/>
+              </a:rPr>
+              <a:t>Rank = 50% Sentiment Score + 25% Zomato Rating + 15% Verified Safety + 10% Occasion Tags.</a:t>
+            </a:r>
+          </a:p>
+          <a:p>
+            <a:pPr>
+              <a:spcAft>
+                <a:spcPts val="500"/>
+              </a:spcAft>
+            </a:pPr>
+            <a:r>
+              <a:rPr sz="1050" b="1">
+                <a:solidFill>
+                  <a:srgbClr val="0F172A"/>
+                </a:solidFill>
+                <a:latin typeface="Arial"/>
+              </a:rPr>
+              <a:t>•  Zero-Fabrication Principle: </a:t>
+            </a:r>
+            <a:r>
+              <a:rPr sz="1000">
+                <a:solidFill>
+                  <a:srgbClr val="334155"/>
+                </a:solidFill>
+                <a:latin typeface="Arial"/>
+              </a:rPr>
+              <a:t>If no inspection audit exists, display 'Safety data unavailable' — never fabricate a safety score.</a:t>
+            </a:r>
+          </a:p>
+          <a:p>
+            <a:pPr>
+              <a:spcAft>
+                <a:spcPts val="500"/>
+              </a:spcAft>
+            </a:pPr>
+            <a:r>
+              <a:rPr sz="1050" b="1">
+                <a:solidFill>
+                  <a:srgbClr val="0F172A"/>
+                </a:solidFill>
+                <a:latin typeface="Arial"/>
+              </a:rPr>
+              <a:t>•  Full-Stack Web App: </a:t>
+            </a:r>
+            <a:r>
+              <a:rPr sz="1000">
+                <a:solidFill>
+                  <a:srgbClr val="334155"/>
+                </a:solidFill>
+                <a:latin typeface="Arial"/>
               </a:rPr>
               <a:t>Streamlit Cloud dashboard, SQLite database for user reviews, Plotly aspect radar charts, batch CSV processing.</a:t>
             </a:r>
@@ -6778,17 +7682,22 @@
             <p:ph type="title"/>
           </p:nvPr>
         </p:nvSpPr>
-        <p:spPr/>
-        <p:txBody>
-          <a:bodyPr/>
-          <a:lstStyle/>
-          <a:p>
-            <a:pPr>
+        <p:spPr>
+          <a:xfrm>
+            <a:off x="841248" y="411480"/>
+            <a:ext cx="10515600" cy="594360"/>
+          </a:xfrm>
+        </p:spPr>
+        <p:txBody>
+          <a:bodyPr anchor="ctr"/>
+          <a:lstStyle/>
+          <a:p>
+            <a:pPr algn="l">
               <a:defRPr sz="2400" b="1">
                 <a:solidFill>
                   <a:srgbClr val="0F172A"/>
                 </a:solidFill>
-                <a:latin typeface="Calibri"/>
+                <a:latin typeface="Arial"/>
               </a:defRPr>
             </a:pPr>
             <a:r>
@@ -6813,15 +7722,27 @@
             <p:ph type="sldNum" sz="quarter" idx="12"/>
           </p:nvPr>
         </p:nvSpPr>
-        <p:spPr/>
-        <p:txBody>
-          <a:bodyPr/>
-          <a:lstStyle/>
-          <a:p>
-            <a:fld id="{C9080329-36BA-448C-B0A7-FA1AF13B2E0F}" type="slidenum">
-              <a:rPr lang="en-US" smtClean="0"/>
+        <p:spPr>
+          <a:xfrm>
+            <a:off x="10515600" y="6419088"/>
+            <a:ext cx="841248" cy="320040"/>
+          </a:xfrm>
+        </p:spPr>
+        <p:txBody>
+          <a:bodyPr anchor="ctr"/>
+          <a:lstStyle/>
+          <a:p>
+            <a:pPr algn="r">
+              <a:defRPr sz="1000">
+                <a:solidFill>
+                  <a:srgbClr val="64748B"/>
+                </a:solidFill>
+                <a:latin typeface="Arial"/>
+              </a:defRPr>
+            </a:pPr>
+            <a:r>
               <a:t>6</a:t>
-            </a:fld>
+            </a:r>
             <a:endParaRPr lang="en-US"/>
           </a:p>
         </p:txBody>
@@ -6840,8 +7761,8 @@
         </p:nvSpPr>
         <p:spPr>
           <a:xfrm>
-            <a:off x="2558716" y="6482255"/>
-            <a:ext cx="7515726" cy="369332"/>
+            <a:off x="1371600" y="6419088"/>
+            <a:ext cx="9445752" cy="320040"/>
           </a:xfrm>
           <a:prstGeom prst="rect">
             <a:avLst/>
@@ -6849,38 +7770,45 @@
           <a:noFill/>
         </p:spPr>
         <p:txBody>
-          <a:bodyPr wrap="square" rtlCol="0">
+          <a:bodyPr wrap="square" rtlCol="0" anchor="ctr">
             <a:spAutoFit/>
           </a:bodyPr>
           <a:lstStyle/>
           <a:p>
-            <a:r>
-              <a:rPr lang="en-US" b="1" dirty="0"/>
-              <a:t>Amity School of engineering &amp; Technology, Amity University, Kolkata </a:t>
-            </a:r>
-          </a:p>
-        </p:txBody>
-      </p:sp>
-      <p:sp>
-        <p:nvSpPr>
-          <p:cNvPr id="7" name="Rounded Rectangle 6"/>
+            <a:pPr algn="ctr">
+              <a:defRPr sz="950" b="0">
+                <a:solidFill>
+                  <a:srgbClr val="64748B"/>
+                </a:solidFill>
+                <a:latin typeface="Arial"/>
+              </a:defRPr>
+            </a:pPr>
+            <a:r>
+              <a:t>Amity School of Engineering &amp; Technology, Amity University, Kolkata</a:t>
+            </a:r>
+          </a:p>
+        </p:txBody>
+      </p:sp>
+      <p:sp>
+        <p:nvSpPr>
+          <p:cNvPr id="7" name="Rectangle 6"/>
           <p:cNvSpPr/>
           <p:nvPr/>
         </p:nvSpPr>
         <p:spPr>
           <a:xfrm>
-            <a:off x="841248" y="1645920"/>
-            <a:ext cx="5120640" cy="4389120"/>
+            <a:off x="841248" y="1078992"/>
+            <a:ext cx="10515600" cy="13716"/>
           </a:xfrm>
-          <a:prstGeom prst="roundRect">
+          <a:prstGeom prst="rect">
             <a:avLst/>
           </a:prstGeom>
           <a:solidFill>
-            <a:srgbClr val="F8FAFC"/>
+            <a:srgbClr val="CBD5E1"/>
           </a:solidFill>
-          <a:ln w="12700">
+          <a:ln w="6350">
             <a:solidFill>
-              <a:srgbClr val="E2E8F0"/>
+              <a:srgbClr val="CBD5E1"/>
             </a:solidFill>
           </a:ln>
         </p:spPr>
@@ -6899,197 +7827,32 @@
           </a:fontRef>
         </p:style>
         <p:txBody>
-          <a:bodyPr rtlCol="0" anchor="ctr" wrap="square" lIns="201168" rIns="201168" tIns="164592" bIns="164592"/>
-          <a:lstStyle/>
-          <a:p>
-            <a:pPr algn="ctr">
-              <a:spcAft>
-                <a:spcPts val="600"/>
-              </a:spcAft>
-              <a:defRPr sz="1300" b="1">
-                <a:solidFill>
-                  <a:srgbClr val="0F766E"/>
-                </a:solidFill>
-                <a:latin typeface="Calibri"/>
-              </a:defRPr>
-            </a:pPr>
-            <a:r>
-              <a:t>Data Partitioning &amp; Class Imbalance Strategy</a:t>
-            </a:r>
-          </a:p>
-          <a:p>
-            <a:pPr>
-              <a:spcAft>
-                <a:spcPts val="400"/>
-              </a:spcAft>
-            </a:pPr>
-            <a:r>
-              <a:rPr sz="1100" b="1">
-                <a:solidFill>
-                  <a:srgbClr val="0F172A"/>
-                </a:solidFill>
-                <a:latin typeface="Calibri"/>
-              </a:rPr>
-              <a:t>• Training Benchmark Corpus: </a:t>
-            </a:r>
-            <a:r>
-              <a:rPr sz="1100">
-                <a:solidFill>
-                  <a:srgbClr val="334155"/>
-                </a:solidFill>
-                <a:latin typeface="Calibri"/>
-              </a:rPr>
-              <a:t>13,144 real English restaurant reviews from Yelp Open Dataset mapped to 3 sentiment classes.</a:t>
-            </a:r>
-          </a:p>
-          <a:p>
-            <a:pPr>
-              <a:spcAft>
-                <a:spcPts val="400"/>
-              </a:spcAft>
-            </a:pPr>
-            <a:r>
-              <a:rPr sz="1100" b="1">
-                <a:solidFill>
-                  <a:srgbClr val="0F172A"/>
-                </a:solidFill>
-                <a:latin typeface="Calibri"/>
-              </a:rPr>
-              <a:t>• Strict 80 / 10 / 10 Split: </a:t>
-            </a:r>
-            <a:r>
-              <a:rPr sz="1100">
-                <a:solidFill>
-                  <a:srgbClr val="334155"/>
-                </a:solidFill>
-                <a:latin typeface="Calibri"/>
-              </a:rPr>
-              <a:t>Train: 10,515 reviews (80%) | Validation: 1,314 reviews (10%) | Test: 1,315 reviews (10%).</a:t>
-            </a:r>
-          </a:p>
-          <a:p>
-            <a:pPr>
-              <a:spcAft>
-                <a:spcPts val="400"/>
-              </a:spcAft>
-            </a:pPr>
-            <a:r>
-              <a:rPr sz="1100" b="1">
-                <a:solidFill>
-                  <a:srgbClr val="0F172A"/>
-                </a:solidFill>
-                <a:latin typeface="Calibri"/>
-              </a:rPr>
-              <a:t>• Stratified Sampling (Seed 42): </a:t>
-            </a:r>
-            <a:r>
-              <a:rPr sz="1100">
-                <a:solidFill>
-                  <a:srgbClr val="334155"/>
-                </a:solidFill>
-                <a:latin typeface="Calibri"/>
-              </a:rPr>
-              <a:t>Exact class ratio preserved across splits; the test set was locked until final benchmark evaluation.</a:t>
-            </a:r>
-          </a:p>
-          <a:p>
-            <a:pPr>
-              <a:spcAft>
-                <a:spcPts val="400"/>
-              </a:spcAft>
-            </a:pPr>
-            <a:r>
-              <a:rPr sz="1100" b="1">
-                <a:solidFill>
-                  <a:srgbClr val="0F172A"/>
-                </a:solidFill>
-                <a:latin typeface="Calibri"/>
-              </a:rPr>
-              <a:t>• Severe Class Imbalance: </a:t>
-            </a:r>
-            <a:r>
-              <a:rPr sz="1100">
-                <a:solidFill>
-                  <a:srgbClr val="334155"/>
-                </a:solidFill>
-                <a:latin typeface="Calibri"/>
-              </a:rPr>
-              <a:t>Review distribution: 66.2% Positive, 25.8% Neutral, 8.0% Negative.</a:t>
-            </a:r>
-          </a:p>
-          <a:p>
-            <a:pPr>
-              <a:spcAft>
-                <a:spcPts val="400"/>
-              </a:spcAft>
-            </a:pPr>
-            <a:r>
-              <a:rPr sz="1100" b="1">
-                <a:solidFill>
-                  <a:srgbClr val="0F172A"/>
-                </a:solidFill>
-                <a:latin typeface="Calibri"/>
-              </a:rPr>
-              <a:t>• Imbalance Mitigation: </a:t>
-            </a:r>
-            <a:r>
-              <a:rPr sz="1100">
-                <a:solidFill>
-                  <a:srgbClr val="334155"/>
-                </a:solidFill>
-                <a:latin typeface="Calibri"/>
-              </a:rPr>
-              <a:t>Applied inverse class weighting (class_weight='balanced') and weighted cross-entropy to prevent majority-class bias.</a:t>
-            </a:r>
-          </a:p>
-          <a:p>
-            <a:pPr>
-              <a:spcAft>
-                <a:spcPts val="400"/>
-              </a:spcAft>
-            </a:pPr>
-            <a:r>
-              <a:rPr sz="1100" b="1">
-                <a:solidFill>
-                  <a:srgbClr val="0F172A"/>
-                </a:solidFill>
-                <a:latin typeface="Calibri"/>
-              </a:rPr>
-              <a:t>• ABSA Validation Set: </a:t>
-            </a:r>
-            <a:r>
-              <a:rPr sz="1100">
-                <a:solidFill>
-                  <a:srgbClr val="334155"/>
-                </a:solidFill>
-                <a:latin typeface="Calibri"/>
-              </a:rPr>
-              <a:t>Validated aspect tagging on 86 annotated SemEval restaurant benchmark samples.</a:t>
-            </a:r>
-          </a:p>
-        </p:txBody>
-      </p:sp>
-      <p:sp>
-        <p:nvSpPr>
-          <p:cNvPr id="8" name="Rounded Rectangle 7"/>
+          <a:bodyPr rtlCol="0" anchor="ctr"/>
+          <a:lstStyle/>
+          <a:p>
+            <a:pPr algn="ctr"/>
+          </a:p>
+        </p:txBody>
+      </p:sp>
+      <p:sp>
+        <p:nvSpPr>
+          <p:cNvPr id="8" name="Rectangle 7"/>
           <p:cNvSpPr/>
           <p:nvPr/>
         </p:nvSpPr>
         <p:spPr>
           <a:xfrm>
-            <a:off x="6236208" y="1645920"/>
-            <a:ext cx="5120640" cy="4389120"/>
+            <a:off x="841248" y="1371600"/>
+            <a:ext cx="5120640" cy="36576"/>
           </a:xfrm>
-          <a:prstGeom prst="roundRect">
+          <a:prstGeom prst="rect">
             <a:avLst/>
           </a:prstGeom>
           <a:solidFill>
-            <a:srgbClr val="F8FAFC"/>
+            <a:srgbClr val="0F766E"/>
           </a:solidFill>
-          <a:ln w="12700">
-            <a:solidFill>
-              <a:srgbClr val="E2E8F0"/>
-            </a:solidFill>
+          <a:ln>
+            <a:noFill/>
           </a:ln>
         </p:spPr>
         <p:style>
@@ -7107,170 +7870,464 @@
           </a:fontRef>
         </p:style>
         <p:txBody>
-          <a:bodyPr rtlCol="0" anchor="ctr" wrap="square" lIns="201168" rIns="201168" tIns="164592" bIns="164592"/>
+          <a:bodyPr rtlCol="0" anchor="ctr"/>
+          <a:lstStyle/>
+          <a:p>
+            <a:pPr algn="ctr"/>
+          </a:p>
+        </p:txBody>
+      </p:sp>
+      <p:sp>
+        <p:nvSpPr>
+          <p:cNvPr id="9" name="Rectangle 8"/>
+          <p:cNvSpPr/>
+          <p:nvPr/>
+        </p:nvSpPr>
+        <p:spPr>
+          <a:xfrm>
+            <a:off x="841248" y="1463040"/>
+            <a:ext cx="5120640" cy="4572000"/>
+          </a:xfrm>
+          <a:prstGeom prst="rect">
+            <a:avLst/>
+          </a:prstGeom>
+          <a:noFill/>
+          <a:ln>
+            <a:noFill/>
+          </a:ln>
+        </p:spPr>
+        <p:style>
+          <a:lnRef idx="1">
+            <a:schemeClr val="accent1"/>
+          </a:lnRef>
+          <a:fillRef idx="3">
+            <a:schemeClr val="accent1"/>
+          </a:fillRef>
+          <a:effectRef idx="2">
+            <a:schemeClr val="accent1"/>
+          </a:effectRef>
+          <a:fontRef idx="minor">
+            <a:schemeClr val="lt1"/>
+          </a:fontRef>
+        </p:style>
+        <p:txBody>
+          <a:bodyPr rtlCol="0" anchor="t" wrap="square" lIns="0" rIns="0" tIns="0" bIns="0"/>
           <a:lstStyle/>
           <a:p>
             <a:pPr algn="ctr">
+              <a:spcBef>
+                <a:spcPts val="400"/>
+              </a:spcBef>
               <a:spcAft>
-                <a:spcPts val="600"/>
+                <a:spcPts val="1000"/>
               </a:spcAft>
-              <a:defRPr sz="1300" b="1">
-                <a:solidFill>
-                  <a:srgbClr val="1E40AF"/>
-                </a:solidFill>
-                <a:latin typeface="Calibri"/>
+              <a:defRPr sz="1350" b="1">
+                <a:solidFill>
+                  <a:srgbClr val="0F766E"/>
+                </a:solidFill>
+                <a:latin typeface="Arial"/>
               </a:defRPr>
             </a:pPr>
             <a:r>
-              <a:t>Software Stack, Hardware &amp; Evaluation Metrics</a:t>
+              <a:t>Data Partitioning &amp; Class Imbalance Strategy</a:t>
             </a:r>
           </a:p>
           <a:p>
             <a:pPr>
               <a:spcAft>
-                <a:spcPts val="400"/>
+                <a:spcPts val="800"/>
               </a:spcAft>
             </a:pPr>
             <a:r>
-              <a:rPr sz="1100" b="1">
+              <a:rPr sz="1050" b="1">
                 <a:solidFill>
                   <a:srgbClr val="0F172A"/>
                 </a:solidFill>
-                <a:latin typeface="Calibri"/>
-              </a:rPr>
-              <a:t>• Development Environment: </a:t>
-            </a:r>
-            <a:r>
-              <a:rPr sz="1100">
+                <a:latin typeface="Arial"/>
+              </a:rPr>
+              <a:t>•  Training Benchmark Corpus: </a:t>
+            </a:r>
+            <a:r>
+              <a:rPr sz="1000">
                 <a:solidFill>
                   <a:srgbClr val="334155"/>
                 </a:solidFill>
-                <a:latin typeface="Calibri"/>
-              </a:rPr>
-              <a:t>Python 3.12 within isolated virtual environment; pinned requirements for strict reproducibility.</a:t>
+                <a:latin typeface="Arial"/>
+              </a:rPr>
+              <a:t>13,144 real English restaurant reviews from Yelp Open Dataset mapped to 3 sentiment classes.</a:t>
             </a:r>
           </a:p>
           <a:p>
             <a:pPr>
               <a:spcAft>
-                <a:spcPts val="400"/>
+                <a:spcPts val="800"/>
               </a:spcAft>
             </a:pPr>
             <a:r>
-              <a:rPr sz="1100" b="1">
+              <a:rPr sz="1050" b="1">
                 <a:solidFill>
                   <a:srgbClr val="0F172A"/>
                 </a:solidFill>
-                <a:latin typeface="Calibri"/>
-              </a:rPr>
-              <a:t>• NLP &amp; Machine Learning: </a:t>
-            </a:r>
-            <a:r>
-              <a:rPr sz="1100">
+                <a:latin typeface="Arial"/>
+              </a:rPr>
+              <a:t>•  Strict 80 / 10 / 10 Split: </a:t>
+            </a:r>
+            <a:r>
+              <a:rPr sz="1000">
                 <a:solidFill>
                   <a:srgbClr val="334155"/>
                 </a:solidFill>
-                <a:latin typeface="Calibri"/>
-              </a:rPr>
-              <a:t>Scikit-Learn 1.4, PyTorch 2.2, Hugging Face Transformers, Joblib serialization.</a:t>
+                <a:latin typeface="Arial"/>
+              </a:rPr>
+              <a:t>Train: 10,515 reviews (80%) | Validation: 1,314 reviews (10%) | Test: 1,315 reviews (10%).</a:t>
             </a:r>
           </a:p>
           <a:p>
             <a:pPr>
               <a:spcAft>
-                <a:spcPts val="400"/>
+                <a:spcPts val="800"/>
               </a:spcAft>
             </a:pPr>
             <a:r>
-              <a:rPr sz="1100" b="1">
+              <a:rPr sz="1050" b="1">
                 <a:solidFill>
                   <a:srgbClr val="0F172A"/>
                 </a:solidFill>
-                <a:latin typeface="Calibri"/>
-              </a:rPr>
-              <a:t>• Persistence &amp; Database: </a:t>
-            </a:r>
-            <a:r>
-              <a:rPr sz="1100">
+                <a:latin typeface="Arial"/>
+              </a:rPr>
+              <a:t>•  Stratified Sampling (Seed 42): </a:t>
+            </a:r>
+            <a:r>
+              <a:rPr sz="1000">
                 <a:solidFill>
                   <a:srgbClr val="334155"/>
                 </a:solidFill>
-                <a:latin typeface="Calibri"/>
-              </a:rPr>
-              <a:t>SQLite relational store (data/user_reviews.db) logging live consumer reviews and recalculating scores.</a:t>
+                <a:latin typeface="Arial"/>
+              </a:rPr>
+              <a:t>Exact class ratio preserved across splits; the test set was locked until final benchmark evaluation.</a:t>
             </a:r>
           </a:p>
           <a:p>
             <a:pPr>
               <a:spcAft>
-                <a:spcPts val="400"/>
+                <a:spcPts val="800"/>
               </a:spcAft>
             </a:pPr>
             <a:r>
-              <a:rPr sz="1100" b="1">
+              <a:rPr sz="1050" b="1">
                 <a:solidFill>
                   <a:srgbClr val="0F172A"/>
                 </a:solidFill>
-                <a:latin typeface="Calibri"/>
-              </a:rPr>
-              <a:t>• Interactive Web Interface: </a:t>
-            </a:r>
-            <a:r>
-              <a:rPr sz="1100">
+                <a:latin typeface="Arial"/>
+              </a:rPr>
+              <a:t>•  Severe Class Imbalance: </a:t>
+            </a:r>
+            <a:r>
+              <a:rPr sz="1000">
                 <a:solidFill>
                   <a:srgbClr val="334155"/>
                 </a:solidFill>
-                <a:latin typeface="Calibri"/>
-              </a:rPr>
-              <a:t>Streamlit 1.66 framework with native DOM injection (st.html) and Plotly interactive data visualizations.</a:t>
+                <a:latin typeface="Arial"/>
+              </a:rPr>
+              <a:t>Review distribution: 66.2% Positive, 25.8% Neutral, 8.0% Negative.</a:t>
             </a:r>
           </a:p>
           <a:p>
             <a:pPr>
               <a:spcAft>
-                <a:spcPts val="400"/>
+                <a:spcPts val="800"/>
               </a:spcAft>
             </a:pPr>
             <a:r>
-              <a:rPr sz="1100" b="1">
+              <a:rPr sz="1050" b="1">
                 <a:solidFill>
                   <a:srgbClr val="0F172A"/>
                 </a:solidFill>
-                <a:latin typeface="Calibri"/>
-              </a:rPr>
-              <a:t>• Primary Evaluation Metric: </a:t>
-            </a:r>
-            <a:r>
-              <a:rPr sz="1100">
+                <a:latin typeface="Arial"/>
+              </a:rPr>
+              <a:t>•  Imbalance Mitigation: </a:t>
+            </a:r>
+            <a:r>
+              <a:rPr sz="1000">
                 <a:solidFill>
                   <a:srgbClr val="334155"/>
                 </a:solidFill>
-                <a:latin typeface="Calibri"/>
-              </a:rPr>
-              <a:t>Macro-Averaged F1-Score: Treating minority negative reviews with equal weight to majority positive reviews.</a:t>
+                <a:latin typeface="Arial"/>
+              </a:rPr>
+              <a:t>Applied inverse class weighting (class_weight='balanced') and weighted cross-entropy to prevent majority-class bias.</a:t>
             </a:r>
           </a:p>
           <a:p>
             <a:pPr>
               <a:spcAft>
+                <a:spcPts val="800"/>
+              </a:spcAft>
+            </a:pPr>
+            <a:r>
+              <a:rPr sz="1050" b="1">
+                <a:solidFill>
+                  <a:srgbClr val="0F172A"/>
+                </a:solidFill>
+                <a:latin typeface="Arial"/>
+              </a:rPr>
+              <a:t>•  ABSA Validation Set: </a:t>
+            </a:r>
+            <a:r>
+              <a:rPr sz="1000">
+                <a:solidFill>
+                  <a:srgbClr val="334155"/>
+                </a:solidFill>
+                <a:latin typeface="Arial"/>
+              </a:rPr>
+              <a:t>Validated aspect tagging on 86 annotated SemEval restaurant benchmark samples.</a:t>
+            </a:r>
+          </a:p>
+        </p:txBody>
+      </p:sp>
+      <p:sp>
+        <p:nvSpPr>
+          <p:cNvPr id="10" name="Rectangle 9"/>
+          <p:cNvSpPr/>
+          <p:nvPr/>
+        </p:nvSpPr>
+        <p:spPr>
+          <a:xfrm>
+            <a:off x="6236208" y="1371600"/>
+            <a:ext cx="5120640" cy="36576"/>
+          </a:xfrm>
+          <a:prstGeom prst="rect">
+            <a:avLst/>
+          </a:prstGeom>
+          <a:solidFill>
+            <a:srgbClr val="1E40AF"/>
+          </a:solidFill>
+          <a:ln>
+            <a:noFill/>
+          </a:ln>
+        </p:spPr>
+        <p:style>
+          <a:lnRef idx="1">
+            <a:schemeClr val="accent1"/>
+          </a:lnRef>
+          <a:fillRef idx="3">
+            <a:schemeClr val="accent1"/>
+          </a:fillRef>
+          <a:effectRef idx="2">
+            <a:schemeClr val="accent1"/>
+          </a:effectRef>
+          <a:fontRef idx="minor">
+            <a:schemeClr val="lt1"/>
+          </a:fontRef>
+        </p:style>
+        <p:txBody>
+          <a:bodyPr rtlCol="0" anchor="ctr"/>
+          <a:lstStyle/>
+          <a:p>
+            <a:pPr algn="ctr"/>
+          </a:p>
+        </p:txBody>
+      </p:sp>
+      <p:sp>
+        <p:nvSpPr>
+          <p:cNvPr id="11" name="Rectangle 10"/>
+          <p:cNvSpPr/>
+          <p:nvPr/>
+        </p:nvSpPr>
+        <p:spPr>
+          <a:xfrm>
+            <a:off x="6236208" y="1463040"/>
+            <a:ext cx="5120640" cy="4572000"/>
+          </a:xfrm>
+          <a:prstGeom prst="rect">
+            <a:avLst/>
+          </a:prstGeom>
+          <a:noFill/>
+          <a:ln>
+            <a:noFill/>
+          </a:ln>
+        </p:spPr>
+        <p:style>
+          <a:lnRef idx="1">
+            <a:schemeClr val="accent1"/>
+          </a:lnRef>
+          <a:fillRef idx="3">
+            <a:schemeClr val="accent1"/>
+          </a:fillRef>
+          <a:effectRef idx="2">
+            <a:schemeClr val="accent1"/>
+          </a:effectRef>
+          <a:fontRef idx="minor">
+            <a:schemeClr val="lt1"/>
+          </a:fontRef>
+        </p:style>
+        <p:txBody>
+          <a:bodyPr rtlCol="0" anchor="t" wrap="square" lIns="0" rIns="0" tIns="0" bIns="0"/>
+          <a:lstStyle/>
+          <a:p>
+            <a:pPr algn="ctr">
+              <a:spcBef>
                 <a:spcPts val="400"/>
+              </a:spcBef>
+              <a:spcAft>
+                <a:spcPts val="1000"/>
               </a:spcAft>
-            </a:pPr>
-            <a:r>
-              <a:rPr sz="1100" b="1">
+              <a:defRPr sz="1350" b="1">
+                <a:solidFill>
+                  <a:srgbClr val="1E40AF"/>
+                </a:solidFill>
+                <a:latin typeface="Arial"/>
+              </a:defRPr>
+            </a:pPr>
+            <a:r>
+              <a:t>Software Stack, Hardware &amp; Evaluation Metrics</a:t>
+            </a:r>
+          </a:p>
+          <a:p>
+            <a:pPr>
+              <a:spcAft>
+                <a:spcPts val="800"/>
+              </a:spcAft>
+            </a:pPr>
+            <a:r>
+              <a:rPr sz="1050" b="1">
                 <a:solidFill>
                   <a:srgbClr val="0F172A"/>
                 </a:solidFill>
-                <a:latin typeface="Calibri"/>
-              </a:rPr>
-              <a:t>• Operational Metrics: </a:t>
-            </a:r>
-            <a:r>
-              <a:rPr sz="1100">
+                <a:latin typeface="Arial"/>
+              </a:rPr>
+              <a:t>•  Development Environment: </a:t>
+            </a:r>
+            <a:r>
+              <a:rPr sz="1000">
                 <a:solidFill>
                   <a:srgbClr val="334155"/>
                 </a:solidFill>
-                <a:latin typeface="Calibri"/>
+                <a:latin typeface="Arial"/>
+              </a:rPr>
+              <a:t>Python 3.12 within isolated virtual environment; pinned requirements for strict reproducibility.</a:t>
+            </a:r>
+          </a:p>
+          <a:p>
+            <a:pPr>
+              <a:spcAft>
+                <a:spcPts val="800"/>
+              </a:spcAft>
+            </a:pPr>
+            <a:r>
+              <a:rPr sz="1050" b="1">
+                <a:solidFill>
+                  <a:srgbClr val="0F172A"/>
+                </a:solidFill>
+                <a:latin typeface="Arial"/>
+              </a:rPr>
+              <a:t>•  NLP &amp; Machine Learning: </a:t>
+            </a:r>
+            <a:r>
+              <a:rPr sz="1000">
+                <a:solidFill>
+                  <a:srgbClr val="334155"/>
+                </a:solidFill>
+                <a:latin typeface="Arial"/>
+              </a:rPr>
+              <a:t>Scikit-Learn 1.4, PyTorch 2.2, Hugging Face Transformers, Joblib serialization.</a:t>
+            </a:r>
+          </a:p>
+          <a:p>
+            <a:pPr>
+              <a:spcAft>
+                <a:spcPts val="800"/>
+              </a:spcAft>
+            </a:pPr>
+            <a:r>
+              <a:rPr sz="1050" b="1">
+                <a:solidFill>
+                  <a:srgbClr val="0F172A"/>
+                </a:solidFill>
+                <a:latin typeface="Arial"/>
+              </a:rPr>
+              <a:t>•  Persistence &amp; Database: </a:t>
+            </a:r>
+            <a:r>
+              <a:rPr sz="1000">
+                <a:solidFill>
+                  <a:srgbClr val="334155"/>
+                </a:solidFill>
+                <a:latin typeface="Arial"/>
+              </a:rPr>
+              <a:t>SQLite relational store (data/user_reviews.db) logging live consumer reviews and recalculating scores.</a:t>
+            </a:r>
+          </a:p>
+          <a:p>
+            <a:pPr>
+              <a:spcAft>
+                <a:spcPts val="800"/>
+              </a:spcAft>
+            </a:pPr>
+            <a:r>
+              <a:rPr sz="1050" b="1">
+                <a:solidFill>
+                  <a:srgbClr val="0F172A"/>
+                </a:solidFill>
+                <a:latin typeface="Arial"/>
+              </a:rPr>
+              <a:t>•  Interactive Web Interface: </a:t>
+            </a:r>
+            <a:r>
+              <a:rPr sz="1000">
+                <a:solidFill>
+                  <a:srgbClr val="334155"/>
+                </a:solidFill>
+                <a:latin typeface="Arial"/>
+              </a:rPr>
+              <a:t>Streamlit 1.66 framework with native DOM injection (st.html) and Plotly interactive data visualizations.</a:t>
+            </a:r>
+          </a:p>
+          <a:p>
+            <a:pPr>
+              <a:spcAft>
+                <a:spcPts val="800"/>
+              </a:spcAft>
+            </a:pPr>
+            <a:r>
+              <a:rPr sz="1050" b="1">
+                <a:solidFill>
+                  <a:srgbClr val="0F172A"/>
+                </a:solidFill>
+                <a:latin typeface="Arial"/>
+              </a:rPr>
+              <a:t>•  Primary Evaluation Metric: </a:t>
+            </a:r>
+            <a:r>
+              <a:rPr sz="1000">
+                <a:solidFill>
+                  <a:srgbClr val="334155"/>
+                </a:solidFill>
+                <a:latin typeface="Arial"/>
+              </a:rPr>
+              <a:t>Macro-Averaged F1-Score: Treating minority negative reviews with equal weight to majority positive reviews.</a:t>
+            </a:r>
+          </a:p>
+          <a:p>
+            <a:pPr>
+              <a:spcAft>
+                <a:spcPts val="800"/>
+              </a:spcAft>
+            </a:pPr>
+            <a:r>
+              <a:rPr sz="1050" b="1">
+                <a:solidFill>
+                  <a:srgbClr val="0F172A"/>
+                </a:solidFill>
+                <a:latin typeface="Arial"/>
+              </a:rPr>
+              <a:t>•  Operational Metrics: </a:t>
+            </a:r>
+            <a:r>
+              <a:rPr sz="1000">
+                <a:solidFill>
+                  <a:srgbClr val="334155"/>
+                </a:solidFill>
+                <a:latin typeface="Arial"/>
               </a:rPr>
               <a:t>Accuracy, per-class Precision/Recall, Confusion Matrix, and Single-review Inference Latency (ms).</a:t>
             </a:r>
@@ -7323,17 +8380,22 @@
             <p:ph type="title"/>
           </p:nvPr>
         </p:nvSpPr>
-        <p:spPr/>
-        <p:txBody>
-          <a:bodyPr/>
-          <a:lstStyle/>
-          <a:p>
-            <a:pPr>
+        <p:spPr>
+          <a:xfrm>
+            <a:off x="841248" y="411480"/>
+            <a:ext cx="10515600" cy="594360"/>
+          </a:xfrm>
+        </p:spPr>
+        <p:txBody>
+          <a:bodyPr anchor="ctr"/>
+          <a:lstStyle/>
+          <a:p>
+            <a:pPr algn="l">
               <a:defRPr sz="2400" b="1">
                 <a:solidFill>
                   <a:srgbClr val="0F172A"/>
                 </a:solidFill>
-                <a:latin typeface="Calibri"/>
+                <a:latin typeface="Arial"/>
               </a:defRPr>
             </a:pPr>
             <a:r>
@@ -7358,15 +8420,27 @@
             <p:ph type="sldNum" sz="quarter" idx="12"/>
           </p:nvPr>
         </p:nvSpPr>
-        <p:spPr/>
-        <p:txBody>
-          <a:bodyPr/>
-          <a:lstStyle/>
-          <a:p>
-            <a:fld id="{C9080329-36BA-448C-B0A7-FA1AF13B2E0F}" type="slidenum">
-              <a:rPr lang="en-US" smtClean="0"/>
+        <p:spPr>
+          <a:xfrm>
+            <a:off x="10515600" y="6419088"/>
+            <a:ext cx="841248" cy="320040"/>
+          </a:xfrm>
+        </p:spPr>
+        <p:txBody>
+          <a:bodyPr anchor="ctr"/>
+          <a:lstStyle/>
+          <a:p>
+            <a:pPr algn="r">
+              <a:defRPr sz="1000">
+                <a:solidFill>
+                  <a:srgbClr val="64748B"/>
+                </a:solidFill>
+                <a:latin typeface="Arial"/>
+              </a:defRPr>
+            </a:pPr>
+            <a:r>
               <a:t>7</a:t>
-            </a:fld>
+            </a:r>
             <a:endParaRPr lang="en-US"/>
           </a:p>
         </p:txBody>
@@ -7385,8 +8459,8 @@
         </p:nvSpPr>
         <p:spPr>
           <a:xfrm>
-            <a:off x="2558716" y="6482255"/>
-            <a:ext cx="7515726" cy="369332"/>
+            <a:off x="1371600" y="6419088"/>
+            <a:ext cx="9445752" cy="320040"/>
           </a:xfrm>
           <a:prstGeom prst="rect">
             <a:avLst/>
@@ -7394,29 +8468,81 @@
           <a:noFill/>
         </p:spPr>
         <p:txBody>
-          <a:bodyPr wrap="square" rtlCol="0">
+          <a:bodyPr wrap="square" rtlCol="0" anchor="ctr">
             <a:spAutoFit/>
           </a:bodyPr>
           <a:lstStyle/>
           <a:p>
-            <a:r>
-              <a:rPr lang="en-US" b="1" dirty="0"/>
-              <a:t>Amity School of engineering &amp; Technology, Amity University, Kolkata </a:t>
-            </a:r>
+            <a:pPr algn="ctr">
+              <a:defRPr sz="950" b="0">
+                <a:solidFill>
+                  <a:srgbClr val="64748B"/>
+                </a:solidFill>
+                <a:latin typeface="Arial"/>
+              </a:defRPr>
+            </a:pPr>
+            <a:r>
+              <a:t>Amity School of Engineering &amp; Technology, Amity University, Kolkata</a:t>
+            </a:r>
+          </a:p>
+        </p:txBody>
+      </p:sp>
+      <p:sp>
+        <p:nvSpPr>
+          <p:cNvPr id="7" name="Rectangle 6"/>
+          <p:cNvSpPr/>
+          <p:nvPr/>
+        </p:nvSpPr>
+        <p:spPr>
+          <a:xfrm>
+            <a:off x="841248" y="1078992"/>
+            <a:ext cx="10515600" cy="13716"/>
+          </a:xfrm>
+          <a:prstGeom prst="rect">
+            <a:avLst/>
+          </a:prstGeom>
+          <a:solidFill>
+            <a:srgbClr val="CBD5E1"/>
+          </a:solidFill>
+          <a:ln w="6350">
+            <a:solidFill>
+              <a:srgbClr val="CBD5E1"/>
+            </a:solidFill>
+          </a:ln>
+        </p:spPr>
+        <p:style>
+          <a:lnRef idx="1">
+            <a:schemeClr val="accent1"/>
+          </a:lnRef>
+          <a:fillRef idx="3">
+            <a:schemeClr val="accent1"/>
+          </a:fillRef>
+          <a:effectRef idx="2">
+            <a:schemeClr val="accent1"/>
+          </a:effectRef>
+          <a:fontRef idx="minor">
+            <a:schemeClr val="lt1"/>
+          </a:fontRef>
+        </p:style>
+        <p:txBody>
+          <a:bodyPr rtlCol="0" anchor="ctr"/>
+          <a:lstStyle/>
+          <a:p>
+            <a:pPr algn="ctr"/>
           </a:p>
         </p:txBody>
       </p:sp>
       <p:graphicFrame>
         <p:nvGraphicFramePr>
-          <p:cNvPr id="7" name="Table 6"/>
+          <p:cNvPr id="8" name="Table 7"/>
           <p:cNvGraphicFramePr>
             <a:graphicFrameLocks noGrp="1"/>
           </p:cNvGraphicFramePr>
           <p:nvPr/>
         </p:nvGraphicFramePr>
         <p:xfrm>
-          <a:off x="841248" y="1645920"/>
-          <a:ext cx="10515600" cy="2377440"/>
+          <a:off x="841248" y="1325880"/>
+          <a:ext cx="10515600" cy="2148840"/>
         </p:xfrm>
         <a:graphic>
           <a:graphicData uri="http://schemas.openxmlformats.org/drawingml/2006/table">
@@ -7433,18 +8559,18 @@
                 <a:gridCol w="1280160"/>
                 <a:gridCol w="1737360"/>
               </a:tblGrid>
-              <a:tr h="475488">
+              <a:tr h="429768">
                 <a:tc>
                   <a:txBody>
                     <a:bodyPr wrap="square" lIns="109728" rIns="109728" tIns="73152" bIns="73152"/>
                     <a:lstStyle/>
                     <a:p>
                       <a:pPr algn="l">
-                        <a:defRPr sz="1100" b="1">
+                        <a:defRPr sz="1050" b="1">
                           <a:solidFill>
                             <a:srgbClr val="FFFFFF"/>
                           </a:solidFill>
-                          <a:latin typeface="Calibri"/>
+                          <a:latin typeface="Arial"/>
                         </a:defRPr>
                       </a:pPr>
                       <a:r>
@@ -7464,11 +8590,11 @@
                     <a:lstStyle/>
                     <a:p>
                       <a:pPr algn="l">
-                        <a:defRPr sz="1100" b="1">
+                        <a:defRPr sz="1050" b="1">
                           <a:solidFill>
                             <a:srgbClr val="FFFFFF"/>
                           </a:solidFill>
-                          <a:latin typeface="Calibri"/>
+                          <a:latin typeface="Arial"/>
                         </a:defRPr>
                       </a:pPr>
                       <a:r>
@@ -7488,11 +8614,11 @@
                     <a:lstStyle/>
                     <a:p>
                       <a:pPr algn="l">
-                        <a:defRPr sz="1100" b="1">
+                        <a:defRPr sz="1050" b="1">
                           <a:solidFill>
                             <a:srgbClr val="FFFFFF"/>
                           </a:solidFill>
-                          <a:latin typeface="Calibri"/>
+                          <a:latin typeface="Arial"/>
                         </a:defRPr>
                       </a:pPr>
                       <a:r>
@@ -7512,11 +8638,11 @@
                     <a:lstStyle/>
                     <a:p>
                       <a:pPr algn="l">
-                        <a:defRPr sz="1100" b="1">
+                        <a:defRPr sz="1050" b="1">
                           <a:solidFill>
                             <a:srgbClr val="FFFFFF"/>
                           </a:solidFill>
-                          <a:latin typeface="Calibri"/>
+                          <a:latin typeface="Arial"/>
                         </a:defRPr>
                       </a:pPr>
                       <a:r>
@@ -7536,11 +8662,11 @@
                     <a:lstStyle/>
                     <a:p>
                       <a:pPr algn="l">
-                        <a:defRPr sz="1100" b="1">
+                        <a:defRPr sz="1050" b="1">
                           <a:solidFill>
                             <a:srgbClr val="FFFFFF"/>
                           </a:solidFill>
-                          <a:latin typeface="Calibri"/>
+                          <a:latin typeface="Arial"/>
                         </a:defRPr>
                       </a:pPr>
                       <a:r>
@@ -7560,11 +8686,11 @@
                     <a:lstStyle/>
                     <a:p>
                       <a:pPr algn="l">
-                        <a:defRPr sz="1100" b="1">
+                        <a:defRPr sz="1050" b="1">
                           <a:solidFill>
                             <a:srgbClr val="FFFFFF"/>
                           </a:solidFill>
-                          <a:latin typeface="Calibri"/>
+                          <a:latin typeface="Arial"/>
                         </a:defRPr>
                       </a:pPr>
                       <a:r>
@@ -7584,11 +8710,11 @@
                     <a:lstStyle/>
                     <a:p>
                       <a:pPr algn="l">
-                        <a:defRPr sz="1100" b="1">
+                        <a:defRPr sz="1050" b="1">
                           <a:solidFill>
                             <a:srgbClr val="FFFFFF"/>
                           </a:solidFill>
-                          <a:latin typeface="Calibri"/>
+                          <a:latin typeface="Arial"/>
                         </a:defRPr>
                       </a:pPr>
                       <a:r>
@@ -7603,7 +8729,7 @@
                   </a:tcPr>
                 </a:tc>
               </a:tr>
-              <a:tr h="475488">
+              <a:tr h="429768">
                 <a:tc>
                   <a:txBody>
                     <a:bodyPr wrap="square" lIns="109728" rIns="109728" tIns="73152" bIns="73152"/>
@@ -7614,7 +8740,7 @@
                           <a:solidFill>
                             <a:srgbClr val="0F766E"/>
                           </a:solidFill>
-                          <a:latin typeface="Calibri"/>
+                          <a:latin typeface="Arial"/>
                         </a:defRPr>
                       </a:pPr>
                       <a:r>
@@ -7624,7 +8750,127 @@
                   </a:txBody>
                   <a:tcPr anchor="ctr">
                     <a:solidFill>
-                      <a:srgbClr val="F1F5F9"/>
+                      <a:srgbClr val="F8FAFC"/>
+                    </a:solidFill>
+                  </a:tcPr>
+                </a:tc>
+                <a:tc>
+                  <a:txBody>
+                    <a:bodyPr wrap="square" lIns="109728" rIns="109728" tIns="73152" bIns="73152"/>
+                    <a:lstStyle/>
+                    <a:p>
+                      <a:pPr algn="ctr">
+                        <a:defRPr sz="1000" b="1">
+                          <a:solidFill>
+                            <a:srgbClr val="0F766E"/>
+                          </a:solidFill>
+                          <a:latin typeface="Arial"/>
+                        </a:defRPr>
+                      </a:pPr>
+                      <a:r>
+                        <a:t>68.21%</a:t>
+                      </a:r>
+                    </a:p>
+                  </a:txBody>
+                  <a:tcPr anchor="ctr">
+                    <a:solidFill>
+                      <a:srgbClr val="F8FAFC"/>
+                    </a:solidFill>
+                  </a:tcPr>
+                </a:tc>
+                <a:tc>
+                  <a:txBody>
+                    <a:bodyPr wrap="square" lIns="109728" rIns="109728" tIns="73152" bIns="73152"/>
+                    <a:lstStyle/>
+                    <a:p>
+                      <a:pPr algn="ctr">
+                        <a:defRPr sz="1000" b="1">
+                          <a:solidFill>
+                            <a:srgbClr val="0F766E"/>
+                          </a:solidFill>
+                          <a:latin typeface="Arial"/>
+                        </a:defRPr>
+                      </a:pPr>
+                      <a:r>
+                        <a:t>0.6537</a:t>
+                      </a:r>
+                    </a:p>
+                  </a:txBody>
+                  <a:tcPr anchor="ctr">
+                    <a:solidFill>
+                      <a:srgbClr val="F8FAFC"/>
+                    </a:solidFill>
+                  </a:tcPr>
+                </a:tc>
+                <a:tc>
+                  <a:txBody>
+                    <a:bodyPr wrap="square" lIns="109728" rIns="109728" tIns="73152" bIns="73152"/>
+                    <a:lstStyle/>
+                    <a:p>
+                      <a:pPr algn="ctr">
+                        <a:defRPr sz="1000" b="1">
+                          <a:solidFill>
+                            <a:srgbClr val="0F766E"/>
+                          </a:solidFill>
+                          <a:latin typeface="Arial"/>
+                        </a:defRPr>
+                      </a:pPr>
+                      <a:r>
+                        <a:t>0.8124</a:t>
+                      </a:r>
+                    </a:p>
+                  </a:txBody>
+                  <a:tcPr anchor="ctr">
+                    <a:solidFill>
+                      <a:srgbClr val="F8FAFC"/>
+                    </a:solidFill>
+                  </a:tcPr>
+                </a:tc>
+                <a:tc>
+                  <a:txBody>
+                    <a:bodyPr wrap="square" lIns="109728" rIns="109728" tIns="73152" bIns="73152"/>
+                    <a:lstStyle/>
+                    <a:p>
+                      <a:pPr algn="ctr">
+                        <a:defRPr sz="1000" b="1">
+                          <a:solidFill>
+                            <a:srgbClr val="0F766E"/>
+                          </a:solidFill>
+                          <a:latin typeface="Arial"/>
+                        </a:defRPr>
+                      </a:pPr>
+                      <a:r>
+                        <a:t>0.6409</a:t>
+                      </a:r>
+                    </a:p>
+                  </a:txBody>
+                  <a:tcPr anchor="ctr">
+                    <a:solidFill>
+                      <a:srgbClr val="F8FAFC"/>
+                    </a:solidFill>
+                  </a:tcPr>
+                </a:tc>
+                <a:tc>
+                  <a:txBody>
+                    <a:bodyPr wrap="square" lIns="109728" rIns="109728" tIns="73152" bIns="73152"/>
+                    <a:lstStyle/>
+                    <a:p>
+                      <a:pPr algn="ctr">
+                        <a:defRPr sz="1000" b="1">
+                          <a:solidFill>
+                            <a:srgbClr val="0F766E"/>
+                          </a:solidFill>
+                          <a:latin typeface="Arial"/>
+                        </a:defRPr>
+                      </a:pPr>
+                      <a:r>
+                        <a:t>0.5079</a:t>
+                      </a:r>
+                    </a:p>
+                  </a:txBody>
+                  <a:tcPr anchor="ctr">
+                    <a:solidFill>
+                      <a:srgbClr val="F8FAFC"/>
                     </a:solidFill>
                   </a:tcPr>
                 </a:tc>
@@ -7638,127 +8884,7 @@
                           <a:solidFill>
                             <a:srgbClr val="0F766E"/>
                           </a:solidFill>
-                          <a:latin typeface="Calibri"/>
-                        </a:defRPr>
-                      </a:pPr>
-                      <a:r>
-                        <a:t>68.21%</a:t>
-                      </a:r>
-                    </a:p>
-                  </a:txBody>
-                  <a:tcPr anchor="ctr">
-                    <a:solidFill>
-                      <a:srgbClr val="F1F5F9"/>
-                    </a:solidFill>
-                  </a:tcPr>
-                </a:tc>
-                <a:tc>
-                  <a:txBody>
-                    <a:bodyPr wrap="square" lIns="109728" rIns="109728" tIns="73152" bIns="73152"/>
-                    <a:lstStyle/>
-                    <a:p>
-                      <a:pPr algn="l">
-                        <a:defRPr sz="1000" b="1">
-                          <a:solidFill>
-                            <a:srgbClr val="0F766E"/>
-                          </a:solidFill>
-                          <a:latin typeface="Calibri"/>
-                        </a:defRPr>
-                      </a:pPr>
-                      <a:r>
-                        <a:t>0.6537</a:t>
-                      </a:r>
-                    </a:p>
-                  </a:txBody>
-                  <a:tcPr anchor="ctr">
-                    <a:solidFill>
-                      <a:srgbClr val="F1F5F9"/>
-                    </a:solidFill>
-                  </a:tcPr>
-                </a:tc>
-                <a:tc>
-                  <a:txBody>
-                    <a:bodyPr wrap="square" lIns="109728" rIns="109728" tIns="73152" bIns="73152"/>
-                    <a:lstStyle/>
-                    <a:p>
-                      <a:pPr algn="l">
-                        <a:defRPr sz="1000" b="1">
-                          <a:solidFill>
-                            <a:srgbClr val="0F766E"/>
-                          </a:solidFill>
-                          <a:latin typeface="Calibri"/>
-                        </a:defRPr>
-                      </a:pPr>
-                      <a:r>
-                        <a:t>0.8124</a:t>
-                      </a:r>
-                    </a:p>
-                  </a:txBody>
-                  <a:tcPr anchor="ctr">
-                    <a:solidFill>
-                      <a:srgbClr val="F1F5F9"/>
-                    </a:solidFill>
-                  </a:tcPr>
-                </a:tc>
-                <a:tc>
-                  <a:txBody>
-                    <a:bodyPr wrap="square" lIns="109728" rIns="109728" tIns="73152" bIns="73152"/>
-                    <a:lstStyle/>
-                    <a:p>
-                      <a:pPr algn="l">
-                        <a:defRPr sz="1000" b="1">
-                          <a:solidFill>
-                            <a:srgbClr val="0F766E"/>
-                          </a:solidFill>
-                          <a:latin typeface="Calibri"/>
-                        </a:defRPr>
-                      </a:pPr>
-                      <a:r>
-                        <a:t>0.6409</a:t>
-                      </a:r>
-                    </a:p>
-                  </a:txBody>
-                  <a:tcPr anchor="ctr">
-                    <a:solidFill>
-                      <a:srgbClr val="F1F5F9"/>
-                    </a:solidFill>
-                  </a:tcPr>
-                </a:tc>
-                <a:tc>
-                  <a:txBody>
-                    <a:bodyPr wrap="square" lIns="109728" rIns="109728" tIns="73152" bIns="73152"/>
-                    <a:lstStyle/>
-                    <a:p>
-                      <a:pPr algn="l">
-                        <a:defRPr sz="1000" b="1">
-                          <a:solidFill>
-                            <a:srgbClr val="0F766E"/>
-                          </a:solidFill>
-                          <a:latin typeface="Calibri"/>
-                        </a:defRPr>
-                      </a:pPr>
-                      <a:r>
-                        <a:t>0.5079</a:t>
-                      </a:r>
-                    </a:p>
-                  </a:txBody>
-                  <a:tcPr anchor="ctr">
-                    <a:solidFill>
-                      <a:srgbClr val="F1F5F9"/>
-                    </a:solidFill>
-                  </a:tcPr>
-                </a:tc>
-                <a:tc>
-                  <a:txBody>
-                    <a:bodyPr wrap="square" lIns="109728" rIns="109728" tIns="73152" bIns="73152"/>
-                    <a:lstStyle/>
-                    <a:p>
-                      <a:pPr algn="l">
-                        <a:defRPr sz="1000" b="1">
-                          <a:solidFill>
-                            <a:srgbClr val="0F766E"/>
-                          </a:solidFill>
-                          <a:latin typeface="Calibri"/>
+                          <a:latin typeface="Arial"/>
                         </a:defRPr>
                       </a:pPr>
                       <a:r>
@@ -7768,12 +8894,12 @@
                   </a:txBody>
                   <a:tcPr anchor="ctr">
                     <a:solidFill>
-                      <a:srgbClr val="F1F5F9"/>
+                      <a:srgbClr val="F8FAFC"/>
                     </a:solidFill>
                   </a:tcPr>
                 </a:tc>
               </a:tr>
-              <a:tr h="475488">
+              <a:tr h="429768">
                 <a:tc>
                   <a:txBody>
                     <a:bodyPr wrap="square" lIns="109728" rIns="109728" tIns="73152" bIns="73152"/>
@@ -7784,7 +8910,7 @@
                           <a:solidFill>
                             <a:srgbClr val="0F172A"/>
                           </a:solidFill>
-                          <a:latin typeface="Calibri"/>
+                          <a:latin typeface="Arial"/>
                         </a:defRPr>
                       </a:pPr>
                       <a:r>
@@ -7803,12 +8929,12 @@
                     <a:bodyPr wrap="square" lIns="109728" rIns="109728" tIns="73152" bIns="73152"/>
                     <a:lstStyle/>
                     <a:p>
-                      <a:pPr algn="l">
+                      <a:pPr algn="ctr">
                         <a:defRPr sz="1000" b="0">
                           <a:solidFill>
                             <a:srgbClr val="0F172A"/>
                           </a:solidFill>
-                          <a:latin typeface="Calibri"/>
+                          <a:latin typeface="Arial"/>
                         </a:defRPr>
                       </a:pPr>
                       <a:r>
@@ -7827,12 +8953,12 @@
                     <a:bodyPr wrap="square" lIns="109728" rIns="109728" tIns="73152" bIns="73152"/>
                     <a:lstStyle/>
                     <a:p>
-                      <a:pPr algn="l">
+                      <a:pPr algn="ctr">
                         <a:defRPr sz="1000" b="0">
                           <a:solidFill>
                             <a:srgbClr val="0F172A"/>
                           </a:solidFill>
-                          <a:latin typeface="Calibri"/>
+                          <a:latin typeface="Arial"/>
                         </a:defRPr>
                       </a:pPr>
                       <a:r>
@@ -7851,12 +8977,12 @@
                     <a:bodyPr wrap="square" lIns="109728" rIns="109728" tIns="73152" bIns="73152"/>
                     <a:lstStyle/>
                     <a:p>
-                      <a:pPr algn="l">
+                      <a:pPr algn="ctr">
                         <a:defRPr sz="1000" b="0">
                           <a:solidFill>
                             <a:srgbClr val="0F172A"/>
                           </a:solidFill>
-                          <a:latin typeface="Calibri"/>
+                          <a:latin typeface="Arial"/>
                         </a:defRPr>
                       </a:pPr>
                       <a:r>
@@ -7875,12 +9001,12 @@
                     <a:bodyPr wrap="square" lIns="109728" rIns="109728" tIns="73152" bIns="73152"/>
                     <a:lstStyle/>
                     <a:p>
-                      <a:pPr algn="l">
+                      <a:pPr algn="ctr">
                         <a:defRPr sz="1000" b="0">
                           <a:solidFill>
                             <a:srgbClr val="0F172A"/>
                           </a:solidFill>
-                          <a:latin typeface="Calibri"/>
+                          <a:latin typeface="Arial"/>
                         </a:defRPr>
                       </a:pPr>
                       <a:r>
@@ -7899,12 +9025,12 @@
                     <a:bodyPr wrap="square" lIns="109728" rIns="109728" tIns="73152" bIns="73152"/>
                     <a:lstStyle/>
                     <a:p>
-                      <a:pPr algn="l">
+                      <a:pPr algn="ctr">
                         <a:defRPr sz="1000" b="0">
                           <a:solidFill>
                             <a:srgbClr val="0F172A"/>
                           </a:solidFill>
-                          <a:latin typeface="Calibri"/>
+                          <a:latin typeface="Arial"/>
                         </a:defRPr>
                       </a:pPr>
                       <a:r>
@@ -7928,7 +9054,7 @@
                           <a:solidFill>
                             <a:srgbClr val="0F172A"/>
                           </a:solidFill>
-                          <a:latin typeface="Calibri"/>
+                          <a:latin typeface="Arial"/>
                         </a:defRPr>
                       </a:pPr>
                       <a:r>
@@ -7943,7 +9069,7 @@
                   </a:tcPr>
                 </a:tc>
               </a:tr>
-              <a:tr h="475488">
+              <a:tr h="429768">
                 <a:tc>
                   <a:txBody>
                     <a:bodyPr wrap="square" lIns="109728" rIns="109728" tIns="73152" bIns="73152"/>
@@ -7954,7 +9080,7 @@
                           <a:solidFill>
                             <a:srgbClr val="0F172A"/>
                           </a:solidFill>
-                          <a:latin typeface="Calibri"/>
+                          <a:latin typeface="Arial"/>
                         </a:defRPr>
                       </a:pPr>
                       <a:r>
@@ -7964,7 +9090,127 @@
                   </a:txBody>
                   <a:tcPr anchor="ctr">
                     <a:solidFill>
-                      <a:srgbClr val="F1F5F9"/>
+                      <a:srgbClr val="F8FAFC"/>
+                    </a:solidFill>
+                  </a:tcPr>
+                </a:tc>
+                <a:tc>
+                  <a:txBody>
+                    <a:bodyPr wrap="square" lIns="109728" rIns="109728" tIns="73152" bIns="73152"/>
+                    <a:lstStyle/>
+                    <a:p>
+                      <a:pPr algn="ctr">
+                        <a:defRPr sz="1000" b="0">
+                          <a:solidFill>
+                            <a:srgbClr val="0F172A"/>
+                          </a:solidFill>
+                          <a:latin typeface="Arial"/>
+                        </a:defRPr>
+                      </a:pPr>
+                      <a:r>
+                        <a:t>71.02%</a:t>
+                      </a:r>
+                    </a:p>
+                  </a:txBody>
+                  <a:tcPr anchor="ctr">
+                    <a:solidFill>
+                      <a:srgbClr val="F8FAFC"/>
+                    </a:solidFill>
+                  </a:tcPr>
+                </a:tc>
+                <a:tc>
+                  <a:txBody>
+                    <a:bodyPr wrap="square" lIns="109728" rIns="109728" tIns="73152" bIns="73152"/>
+                    <a:lstStyle/>
+                    <a:p>
+                      <a:pPr algn="ctr">
+                        <a:defRPr sz="1000" b="0">
+                          <a:solidFill>
+                            <a:srgbClr val="0F172A"/>
+                          </a:solidFill>
+                          <a:latin typeface="Arial"/>
+                        </a:defRPr>
+                      </a:pPr>
+                      <a:r>
+                        <a:t>0.6310</a:t>
+                      </a:r>
+                    </a:p>
+                  </a:txBody>
+                  <a:tcPr anchor="ctr">
+                    <a:solidFill>
+                      <a:srgbClr val="F8FAFC"/>
+                    </a:solidFill>
+                  </a:tcPr>
+                </a:tc>
+                <a:tc>
+                  <a:txBody>
+                    <a:bodyPr wrap="square" lIns="109728" rIns="109728" tIns="73152" bIns="73152"/>
+                    <a:lstStyle/>
+                    <a:p>
+                      <a:pPr algn="ctr">
+                        <a:defRPr sz="1000" b="0">
+                          <a:solidFill>
+                            <a:srgbClr val="0F172A"/>
+                          </a:solidFill>
+                          <a:latin typeface="Arial"/>
+                        </a:defRPr>
+                      </a:pPr>
+                      <a:r>
+                        <a:t>0.8415</a:t>
+                      </a:r>
+                    </a:p>
+                  </a:txBody>
+                  <a:tcPr anchor="ctr">
+                    <a:solidFill>
+                      <a:srgbClr val="F8FAFC"/>
+                    </a:solidFill>
+                  </a:tcPr>
+                </a:tc>
+                <a:tc>
+                  <a:txBody>
+                    <a:bodyPr wrap="square" lIns="109728" rIns="109728" tIns="73152" bIns="73152"/>
+                    <a:lstStyle/>
+                    <a:p>
+                      <a:pPr algn="ctr">
+                        <a:defRPr sz="1000" b="0">
+                          <a:solidFill>
+                            <a:srgbClr val="0F172A"/>
+                          </a:solidFill>
+                          <a:latin typeface="Arial"/>
+                        </a:defRPr>
+                      </a:pPr>
+                      <a:r>
+                        <a:t>0.6095</a:t>
+                      </a:r>
+                    </a:p>
+                  </a:txBody>
+                  <a:tcPr anchor="ctr">
+                    <a:solidFill>
+                      <a:srgbClr val="F8FAFC"/>
+                    </a:solidFill>
+                  </a:tcPr>
+                </a:tc>
+                <a:tc>
+                  <a:txBody>
+                    <a:bodyPr wrap="square" lIns="109728" rIns="109728" tIns="73152" bIns="73152"/>
+                    <a:lstStyle/>
+                    <a:p>
+                      <a:pPr algn="ctr">
+                        <a:defRPr sz="1000" b="0">
+                          <a:solidFill>
+                            <a:srgbClr val="0F172A"/>
+                          </a:solidFill>
+                          <a:latin typeface="Arial"/>
+                        </a:defRPr>
+                      </a:pPr>
+                      <a:r>
+                        <a:t>0.4420</a:t>
+                      </a:r>
+                    </a:p>
+                  </a:txBody>
+                  <a:tcPr anchor="ctr">
+                    <a:solidFill>
+                      <a:srgbClr val="F8FAFC"/>
                     </a:solidFill>
                   </a:tcPr>
                 </a:tc>
@@ -7978,127 +9224,7 @@
                           <a:solidFill>
                             <a:srgbClr val="0F172A"/>
                           </a:solidFill>
-                          <a:latin typeface="Calibri"/>
-                        </a:defRPr>
-                      </a:pPr>
-                      <a:r>
-                        <a:t>71.02%</a:t>
-                      </a:r>
-                    </a:p>
-                  </a:txBody>
-                  <a:tcPr anchor="ctr">
-                    <a:solidFill>
-                      <a:srgbClr val="F1F5F9"/>
-                    </a:solidFill>
-                  </a:tcPr>
-                </a:tc>
-                <a:tc>
-                  <a:txBody>
-                    <a:bodyPr wrap="square" lIns="109728" rIns="109728" tIns="73152" bIns="73152"/>
-                    <a:lstStyle/>
-                    <a:p>
-                      <a:pPr algn="l">
-                        <a:defRPr sz="1000" b="0">
-                          <a:solidFill>
-                            <a:srgbClr val="0F172A"/>
-                          </a:solidFill>
-                          <a:latin typeface="Calibri"/>
-                        </a:defRPr>
-                      </a:pPr>
-                      <a:r>
-                        <a:t>0.6310</a:t>
-                      </a:r>
-                    </a:p>
-                  </a:txBody>
-                  <a:tcPr anchor="ctr">
-                    <a:solidFill>
-                      <a:srgbClr val="F1F5F9"/>
-                    </a:solidFill>
-                  </a:tcPr>
-                </a:tc>
-                <a:tc>
-                  <a:txBody>
-                    <a:bodyPr wrap="square" lIns="109728" rIns="109728" tIns="73152" bIns="73152"/>
-                    <a:lstStyle/>
-                    <a:p>
-                      <a:pPr algn="l">
-                        <a:defRPr sz="1000" b="0">
-                          <a:solidFill>
-                            <a:srgbClr val="0F172A"/>
-                          </a:solidFill>
-                          <a:latin typeface="Calibri"/>
-                        </a:defRPr>
-                      </a:pPr>
-                      <a:r>
-                        <a:t>0.8415</a:t>
-                      </a:r>
-                    </a:p>
-                  </a:txBody>
-                  <a:tcPr anchor="ctr">
-                    <a:solidFill>
-                      <a:srgbClr val="F1F5F9"/>
-                    </a:solidFill>
-                  </a:tcPr>
-                </a:tc>
-                <a:tc>
-                  <a:txBody>
-                    <a:bodyPr wrap="square" lIns="109728" rIns="109728" tIns="73152" bIns="73152"/>
-                    <a:lstStyle/>
-                    <a:p>
-                      <a:pPr algn="l">
-                        <a:defRPr sz="1000" b="0">
-                          <a:solidFill>
-                            <a:srgbClr val="0F172A"/>
-                          </a:solidFill>
-                          <a:latin typeface="Calibri"/>
-                        </a:defRPr>
-                      </a:pPr>
-                      <a:r>
-                        <a:t>0.6095</a:t>
-                      </a:r>
-                    </a:p>
-                  </a:txBody>
-                  <a:tcPr anchor="ctr">
-                    <a:solidFill>
-                      <a:srgbClr val="F1F5F9"/>
-                    </a:solidFill>
-                  </a:tcPr>
-                </a:tc>
-                <a:tc>
-                  <a:txBody>
-                    <a:bodyPr wrap="square" lIns="109728" rIns="109728" tIns="73152" bIns="73152"/>
-                    <a:lstStyle/>
-                    <a:p>
-                      <a:pPr algn="l">
-                        <a:defRPr sz="1000" b="0">
-                          <a:solidFill>
-                            <a:srgbClr val="0F172A"/>
-                          </a:solidFill>
-                          <a:latin typeface="Calibri"/>
-                        </a:defRPr>
-                      </a:pPr>
-                      <a:r>
-                        <a:t>0.4420</a:t>
-                      </a:r>
-                    </a:p>
-                  </a:txBody>
-                  <a:tcPr anchor="ctr">
-                    <a:solidFill>
-                      <a:srgbClr val="F1F5F9"/>
-                    </a:solidFill>
-                  </a:tcPr>
-                </a:tc>
-                <a:tc>
-                  <a:txBody>
-                    <a:bodyPr wrap="square" lIns="109728" rIns="109728" tIns="73152" bIns="73152"/>
-                    <a:lstStyle/>
-                    <a:p>
-                      <a:pPr algn="l">
-                        <a:defRPr sz="1000" b="0">
-                          <a:solidFill>
-                            <a:srgbClr val="0F172A"/>
-                          </a:solidFill>
-                          <a:latin typeface="Calibri"/>
+                          <a:latin typeface="Arial"/>
                         </a:defRPr>
                       </a:pPr>
                       <a:r>
@@ -8108,12 +9234,12 @@
                   </a:txBody>
                   <a:tcPr anchor="ctr">
                     <a:solidFill>
-                      <a:srgbClr val="F1F5F9"/>
+                      <a:srgbClr val="F8FAFC"/>
                     </a:solidFill>
                   </a:tcPr>
                 </a:tc>
               </a:tr>
-              <a:tr h="475488">
+              <a:tr h="429768">
                 <a:tc>
                   <a:txBody>
                     <a:bodyPr wrap="square" lIns="109728" rIns="109728" tIns="73152" bIns="73152"/>
@@ -8124,7 +9250,7 @@
                           <a:solidFill>
                             <a:srgbClr val="0F172A"/>
                           </a:solidFill>
-                          <a:latin typeface="Calibri"/>
+                          <a:latin typeface="Arial"/>
                         </a:defRPr>
                       </a:pPr>
                       <a:r>
@@ -8143,12 +9269,12 @@
                     <a:bodyPr wrap="square" lIns="109728" rIns="109728" tIns="73152" bIns="73152"/>
                     <a:lstStyle/>
                     <a:p>
-                      <a:pPr algn="l">
+                      <a:pPr algn="ctr">
                         <a:defRPr sz="1000" b="0">
                           <a:solidFill>
                             <a:srgbClr val="0F172A"/>
                           </a:solidFill>
-                          <a:latin typeface="Calibri"/>
+                          <a:latin typeface="Arial"/>
                         </a:defRPr>
                       </a:pPr>
                       <a:r>
@@ -8167,12 +9293,12 @@
                     <a:bodyPr wrap="square" lIns="109728" rIns="109728" tIns="73152" bIns="73152"/>
                     <a:lstStyle/>
                     <a:p>
-                      <a:pPr algn="l">
+                      <a:pPr algn="ctr">
                         <a:defRPr sz="1000" b="0">
                           <a:solidFill>
                             <a:srgbClr val="0F172A"/>
                           </a:solidFill>
-                          <a:latin typeface="Calibri"/>
+                          <a:latin typeface="Arial"/>
                         </a:defRPr>
                       </a:pPr>
                       <a:r>
@@ -8191,12 +9317,12 @@
                     <a:bodyPr wrap="square" lIns="109728" rIns="109728" tIns="73152" bIns="73152"/>
                     <a:lstStyle/>
                     <a:p>
-                      <a:pPr algn="l">
+                      <a:pPr algn="ctr">
                         <a:defRPr sz="1000" b="0">
                           <a:solidFill>
                             <a:srgbClr val="0F172A"/>
                           </a:solidFill>
-                          <a:latin typeface="Calibri"/>
+                          <a:latin typeface="Arial"/>
                         </a:defRPr>
                       </a:pPr>
                       <a:r>
@@ -8215,12 +9341,12 @@
                     <a:bodyPr wrap="square" lIns="109728" rIns="109728" tIns="73152" bIns="73152"/>
                     <a:lstStyle/>
                     <a:p>
-                      <a:pPr algn="l">
+                      <a:pPr algn="ctr">
                         <a:defRPr sz="1000" b="0">
                           <a:solidFill>
                             <a:srgbClr val="0F172A"/>
                           </a:solidFill>
-                          <a:latin typeface="Calibri"/>
+                          <a:latin typeface="Arial"/>
                         </a:defRPr>
                       </a:pPr>
                       <a:r>
@@ -8239,12 +9365,12 @@
                     <a:bodyPr wrap="square" lIns="109728" rIns="109728" tIns="73152" bIns="73152"/>
                     <a:lstStyle/>
                     <a:p>
-                      <a:pPr algn="l">
+                      <a:pPr algn="ctr">
                         <a:defRPr sz="1000" b="0">
                           <a:solidFill>
                             <a:srgbClr val="0F172A"/>
                           </a:solidFill>
-                          <a:latin typeface="Calibri"/>
+                          <a:latin typeface="Arial"/>
                         </a:defRPr>
                       </a:pPr>
                       <a:r>
@@ -8268,7 +9394,7 @@
                           <a:solidFill>
                             <a:srgbClr val="0F172A"/>
                           </a:solidFill>
-                          <a:latin typeface="Calibri"/>
+                          <a:latin typeface="Arial"/>
                         </a:defRPr>
                       </a:pPr>
                       <a:r>
@@ -8289,25 +9415,23 @@
       </p:graphicFrame>
       <p:sp>
         <p:nvSpPr>
-          <p:cNvPr id="8" name="Rounded Rectangle 7"/>
+          <p:cNvPr id="9" name="Rectangle 8"/>
           <p:cNvSpPr/>
           <p:nvPr/>
         </p:nvSpPr>
         <p:spPr>
           <a:xfrm>
-            <a:off x="841248" y="4206240"/>
-            <a:ext cx="5120640" cy="1965960"/>
+            <a:off x="841248" y="3794760"/>
+            <a:ext cx="5120640" cy="36576"/>
           </a:xfrm>
-          <a:prstGeom prst="roundRect">
+          <a:prstGeom prst="rect">
             <a:avLst/>
           </a:prstGeom>
           <a:solidFill>
-            <a:srgbClr val="F8FAFC"/>
+            <a:srgbClr val="0F172A"/>
           </a:solidFill>
-          <a:ln w="12700">
-            <a:solidFill>
-              <a:srgbClr val="E2E8F0"/>
-            </a:solidFill>
+          <a:ln>
+            <a:noFill/>
           </a:ln>
         </p:spPr>
         <p:style>
@@ -8325,97 +9449,30 @@
           </a:fontRef>
         </p:style>
         <p:txBody>
-          <a:bodyPr rtlCol="0" anchor="ctr" wrap="square" lIns="201168" rIns="201168" tIns="164592" bIns="164592"/>
-          <a:lstStyle/>
-          <a:p>
-            <a:pPr algn="ctr">
-              <a:spcAft>
-                <a:spcPts val="600"/>
-              </a:spcAft>
-              <a:defRPr sz="1300" b="1">
-                <a:solidFill>
-                  <a:srgbClr val="0F172A"/>
-                </a:solidFill>
-                <a:latin typeface="Calibri"/>
-              </a:defRPr>
-            </a:pPr>
-            <a:r>
-              <a:t>Key Finding 1: Why Balanced LogReg Won</a:t>
-            </a:r>
-          </a:p>
-          <a:p>
-            <a:pPr>
-              <a:spcAft>
-                <a:spcPts val="400"/>
-              </a:spcAft>
-            </a:pPr>
-            <a:r>
-              <a:rPr sz="1100" b="1">
-                <a:solidFill>
-                  <a:srgbClr val="0F172A"/>
-                </a:solidFill>
-                <a:latin typeface="Calibri"/>
-              </a:rPr>
-              <a:t>• Minority Class Superiority: </a:t>
-            </a:r>
-            <a:r>
-              <a:rPr sz="1100">
-                <a:solidFill>
-                  <a:srgbClr val="334155"/>
-                </a:solidFill>
-                <a:latin typeface="Calibri"/>
-              </a:rPr>
-              <a:t>Balanced LogReg achieved the highest Negative-class F1 (0.5079 vs DistilBERT's 0.4420). In health surveillance, missing a negative illness review is far more costly than a false positive.</a:t>
-            </a:r>
-          </a:p>
-          <a:p>
-            <a:pPr>
-              <a:spcAft>
-                <a:spcPts val="400"/>
-              </a:spcAft>
-            </a:pPr>
-            <a:r>
-              <a:rPr sz="1100" b="1">
-                <a:solidFill>
-                  <a:srgbClr val="0F172A"/>
-                </a:solidFill>
-                <a:latin typeface="Calibri"/>
-              </a:rPr>
-              <a:t>• Ultra-Low Latency: </a:t>
-            </a:r>
-            <a:r>
-              <a:rPr sz="1100">
-                <a:solidFill>
-                  <a:srgbClr val="334155"/>
-                </a:solidFill>
-                <a:latin typeface="Calibri"/>
-              </a:rPr>
-              <a:t>Inference executed in 0.8 ms per review (vs 42.5 ms for DistilBERT), enabling instantaneous processing in web applications.</a:t>
-            </a:r>
-          </a:p>
-        </p:txBody>
-      </p:sp>
-      <p:sp>
-        <p:nvSpPr>
-          <p:cNvPr id="9" name="Rounded Rectangle 8"/>
+          <a:bodyPr rtlCol="0" anchor="ctr"/>
+          <a:lstStyle/>
+          <a:p>
+            <a:pPr algn="ctr"/>
+          </a:p>
+        </p:txBody>
+      </p:sp>
+      <p:sp>
+        <p:nvSpPr>
+          <p:cNvPr id="10" name="Rectangle 9"/>
           <p:cNvSpPr/>
           <p:nvPr/>
         </p:nvSpPr>
         <p:spPr>
           <a:xfrm>
-            <a:off x="6236208" y="4206240"/>
-            <a:ext cx="5120640" cy="1965960"/>
+            <a:off x="841248" y="3886200"/>
+            <a:ext cx="5120640" cy="2240280"/>
           </a:xfrm>
-          <a:prstGeom prst="roundRect">
+          <a:prstGeom prst="rect">
             <a:avLst/>
           </a:prstGeom>
-          <a:solidFill>
-            <a:srgbClr val="F8FAFC"/>
-          </a:solidFill>
-          <a:ln w="12700">
-            <a:solidFill>
-              <a:srgbClr val="E2E8F0"/>
-            </a:solidFill>
+          <a:noFill/>
+          <a:ln>
+            <a:noFill/>
           </a:ln>
         </p:spPr>
         <p:style>
@@ -8433,70 +9490,223 @@
           </a:fontRef>
         </p:style>
         <p:txBody>
-          <a:bodyPr rtlCol="0" anchor="ctr" wrap="square" lIns="201168" rIns="201168" tIns="164592" bIns="164592"/>
+          <a:bodyPr rtlCol="0" anchor="t" wrap="square" lIns="0" rIns="0" tIns="0" bIns="0"/>
           <a:lstStyle/>
           <a:p>
             <a:pPr algn="ctr">
+              <a:spcBef>
+                <a:spcPts val="400"/>
+              </a:spcBef>
+              <a:spcAft>
+                <a:spcPts val="1000"/>
+              </a:spcAft>
+              <a:defRPr sz="1250" b="1">
+                <a:solidFill>
+                  <a:srgbClr val="0F172A"/>
+                </a:solidFill>
+                <a:latin typeface="Arial"/>
+              </a:defRPr>
+            </a:pPr>
+            <a:r>
+              <a:t>Key Finding 1: Why Balanced LogReg Won</a:t>
+            </a:r>
+          </a:p>
+          <a:p>
+            <a:pPr>
               <a:spcAft>
                 <a:spcPts val="600"/>
               </a:spcAft>
-              <a:defRPr sz="1300" b="1">
-                <a:solidFill>
-                  <a:srgbClr val="1E40AF"/>
-                </a:solidFill>
-                <a:latin typeface="Calibri"/>
-              </a:defRPr>
-            </a:pPr>
-            <a:r>
-              <a:t>Key Finding 2: Sentiment vs Safety Divergence</a:t>
+            </a:pPr>
+            <a:r>
+              <a:rPr sz="1050" b="1">
+                <a:solidFill>
+                  <a:srgbClr val="0F172A"/>
+                </a:solidFill>
+                <a:latin typeface="Arial"/>
+              </a:rPr>
+              <a:t>•  Minority Class Superiority: </a:t>
+            </a:r>
+            <a:r>
+              <a:rPr sz="1000">
+                <a:solidFill>
+                  <a:srgbClr val="334155"/>
+                </a:solidFill>
+                <a:latin typeface="Arial"/>
+              </a:rPr>
+              <a:t>Balanced LogReg achieved the highest Negative-class F1 (0.5079 vs DistilBERT's 0.4420). In health surveillance, missing a negative illness review is far more costly than a false positive.</a:t>
             </a:r>
           </a:p>
           <a:p>
             <a:pPr>
               <a:spcAft>
+                <a:spcPts val="600"/>
+              </a:spcAft>
+            </a:pPr>
+            <a:r>
+              <a:rPr sz="1050" b="1">
+                <a:solidFill>
+                  <a:srgbClr val="0F172A"/>
+                </a:solidFill>
+                <a:latin typeface="Arial"/>
+              </a:rPr>
+              <a:t>•  Ultra-Low Latency: </a:t>
+            </a:r>
+            <a:r>
+              <a:rPr sz="1000">
+                <a:solidFill>
+                  <a:srgbClr val="334155"/>
+                </a:solidFill>
+                <a:latin typeface="Arial"/>
+              </a:rPr>
+              <a:t>Inference executed in 0.8 ms per review (vs 42.5 ms for DistilBERT), enabling instantaneous processing in web applications.</a:t>
+            </a:r>
+          </a:p>
+        </p:txBody>
+      </p:sp>
+      <p:sp>
+        <p:nvSpPr>
+          <p:cNvPr id="11" name="Rectangle 10"/>
+          <p:cNvSpPr/>
+          <p:nvPr/>
+        </p:nvSpPr>
+        <p:spPr>
+          <a:xfrm>
+            <a:off x="6236208" y="3794760"/>
+            <a:ext cx="5120640" cy="36576"/>
+          </a:xfrm>
+          <a:prstGeom prst="rect">
+            <a:avLst/>
+          </a:prstGeom>
+          <a:solidFill>
+            <a:srgbClr val="1E40AF"/>
+          </a:solidFill>
+          <a:ln>
+            <a:noFill/>
+          </a:ln>
+        </p:spPr>
+        <p:style>
+          <a:lnRef idx="1">
+            <a:schemeClr val="accent1"/>
+          </a:lnRef>
+          <a:fillRef idx="3">
+            <a:schemeClr val="accent1"/>
+          </a:fillRef>
+          <a:effectRef idx="2">
+            <a:schemeClr val="accent1"/>
+          </a:effectRef>
+          <a:fontRef idx="minor">
+            <a:schemeClr val="lt1"/>
+          </a:fontRef>
+        </p:style>
+        <p:txBody>
+          <a:bodyPr rtlCol="0" anchor="ctr"/>
+          <a:lstStyle/>
+          <a:p>
+            <a:pPr algn="ctr"/>
+          </a:p>
+        </p:txBody>
+      </p:sp>
+      <p:sp>
+        <p:nvSpPr>
+          <p:cNvPr id="12" name="Rectangle 11"/>
+          <p:cNvSpPr/>
+          <p:nvPr/>
+        </p:nvSpPr>
+        <p:spPr>
+          <a:xfrm>
+            <a:off x="6236208" y="3886200"/>
+            <a:ext cx="5120640" cy="2240280"/>
+          </a:xfrm>
+          <a:prstGeom prst="rect">
+            <a:avLst/>
+          </a:prstGeom>
+          <a:noFill/>
+          <a:ln>
+            <a:noFill/>
+          </a:ln>
+        </p:spPr>
+        <p:style>
+          <a:lnRef idx="1">
+            <a:schemeClr val="accent1"/>
+          </a:lnRef>
+          <a:fillRef idx="3">
+            <a:schemeClr val="accent1"/>
+          </a:fillRef>
+          <a:effectRef idx="2">
+            <a:schemeClr val="accent1"/>
+          </a:effectRef>
+          <a:fontRef idx="minor">
+            <a:schemeClr val="lt1"/>
+          </a:fontRef>
+        </p:style>
+        <p:txBody>
+          <a:bodyPr rtlCol="0" anchor="t" wrap="square" lIns="0" rIns="0" tIns="0" bIns="0"/>
+          <a:lstStyle/>
+          <a:p>
+            <a:pPr algn="ctr">
+              <a:spcBef>
                 <a:spcPts val="400"/>
+              </a:spcBef>
+              <a:spcAft>
+                <a:spcPts val="1000"/>
               </a:spcAft>
-            </a:pPr>
-            <a:r>
-              <a:rPr sz="1100" b="1">
-                <a:solidFill>
-                  <a:srgbClr val="0F172A"/>
-                </a:solidFill>
-                <a:latin typeface="Calibri"/>
-              </a:rPr>
-              <a:t>• Statistical Disconnect: </a:t>
-            </a:r>
-            <a:r>
-              <a:rPr sz="1100">
-                <a:solidFill>
-                  <a:srgbClr val="334155"/>
-                </a:solidFill>
-                <a:latin typeface="Calibri"/>
-              </a:rPr>
-              <a:t>Correlation between Customer Sentiment and Municipal Safety Score was only r = 0.08 across 100 Kolkata listings.</a:t>
+              <a:defRPr sz="1250" b="1">
+                <a:solidFill>
+                  <a:srgbClr val="1E40AF"/>
+                </a:solidFill>
+                <a:latin typeface="Arial"/>
+              </a:defRPr>
+            </a:pPr>
+            <a:r>
+              <a:t>Key Finding 2: Sentiment vs Safety Divergence</a:t>
             </a:r>
           </a:p>
           <a:p>
             <a:pPr>
               <a:spcAft>
-                <a:spcPts val="400"/>
+                <a:spcPts val="600"/>
               </a:spcAft>
             </a:pPr>
             <a:r>
-              <a:rPr sz="1100" b="1">
+              <a:rPr sz="1050" b="1">
                 <a:solidFill>
                   <a:srgbClr val="0F172A"/>
                 </a:solidFill>
-                <a:latin typeface="Calibri"/>
-              </a:rPr>
-              <a:t>• Empirical Confirmation: </a:t>
-            </a:r>
-            <a:r>
-              <a:rPr sz="1100">
+                <a:latin typeface="Arial"/>
+              </a:rPr>
+              <a:t>•  Statistical Disconnect: </a:t>
+            </a:r>
+            <a:r>
+              <a:rPr sz="1000">
                 <a:solidFill>
                   <a:srgbClr val="334155"/>
                 </a:solidFill>
-                <a:latin typeface="Calibri"/>
+                <a:latin typeface="Arial"/>
+              </a:rPr>
+              <a:t>Correlation between Customer Sentiment and Municipal Safety Score was only r = 0.08 across 100 Kolkata listings.</a:t>
+            </a:r>
+          </a:p>
+          <a:p>
+            <a:pPr>
+              <a:spcAft>
+                <a:spcPts val="600"/>
+              </a:spcAft>
+            </a:pPr>
+            <a:r>
+              <a:rPr sz="1050" b="1">
+                <a:solidFill>
+                  <a:srgbClr val="0F172A"/>
+                </a:solidFill>
+                <a:latin typeface="Arial"/>
+              </a:rPr>
+              <a:t>•  Empirical Confirmation: </a:t>
+            </a:r>
+            <a:r>
+              <a:rPr sz="1000">
+                <a:solidFill>
+                  <a:srgbClr val="334155"/>
+                </a:solidFill>
+                <a:latin typeface="Arial"/>
               </a:rPr>
               <a:t>Proves that customer reviews primarily capture taste and ambiance, empirically justifying the requirement for independent civic food safety verification.</a:t>
             </a:r>
@@ -8549,17 +9759,22 @@
             <p:ph type="title"/>
           </p:nvPr>
         </p:nvSpPr>
-        <p:spPr/>
-        <p:txBody>
-          <a:bodyPr/>
-          <a:lstStyle/>
-          <a:p>
-            <a:pPr>
+        <p:spPr>
+          <a:xfrm>
+            <a:off x="841248" y="411480"/>
+            <a:ext cx="10515600" cy="594360"/>
+          </a:xfrm>
+        </p:spPr>
+        <p:txBody>
+          <a:bodyPr anchor="ctr"/>
+          <a:lstStyle/>
+          <a:p>
+            <a:pPr algn="l">
               <a:defRPr sz="2400" b="1">
                 <a:solidFill>
                   <a:srgbClr val="0F172A"/>
                 </a:solidFill>
-                <a:latin typeface="Calibri"/>
+                <a:latin typeface="Arial"/>
               </a:defRPr>
             </a:pPr>
             <a:r>
@@ -8584,15 +9799,27 @@
             <p:ph type="sldNum" sz="quarter" idx="12"/>
           </p:nvPr>
         </p:nvSpPr>
-        <p:spPr/>
-        <p:txBody>
-          <a:bodyPr/>
-          <a:lstStyle/>
-          <a:p>
-            <a:fld id="{C9080329-36BA-448C-B0A7-FA1AF13B2E0F}" type="slidenum">
-              <a:rPr lang="en-US" smtClean="0"/>
+        <p:spPr>
+          <a:xfrm>
+            <a:off x="10515600" y="6419088"/>
+            <a:ext cx="841248" cy="320040"/>
+          </a:xfrm>
+        </p:spPr>
+        <p:txBody>
+          <a:bodyPr anchor="ctr"/>
+          <a:lstStyle/>
+          <a:p>
+            <a:pPr algn="r">
+              <a:defRPr sz="1000">
+                <a:solidFill>
+                  <a:srgbClr val="64748B"/>
+                </a:solidFill>
+                <a:latin typeface="Arial"/>
+              </a:defRPr>
+            </a:pPr>
+            <a:r>
               <a:t>8</a:t>
-            </a:fld>
+            </a:r>
             <a:endParaRPr lang="en-US"/>
           </a:p>
         </p:txBody>
@@ -8611,8 +9838,8 @@
         </p:nvSpPr>
         <p:spPr>
           <a:xfrm>
-            <a:off x="2558716" y="6482255"/>
-            <a:ext cx="7515726" cy="369332"/>
+            <a:off x="1371600" y="6419088"/>
+            <a:ext cx="9445752" cy="320040"/>
           </a:xfrm>
           <a:prstGeom prst="rect">
             <a:avLst/>
@@ -8620,38 +9847,45 @@
           <a:noFill/>
         </p:spPr>
         <p:txBody>
-          <a:bodyPr wrap="square" rtlCol="0">
+          <a:bodyPr wrap="square" rtlCol="0" anchor="ctr">
             <a:spAutoFit/>
           </a:bodyPr>
           <a:lstStyle/>
           <a:p>
-            <a:r>
-              <a:rPr lang="en-US" b="1" dirty="0"/>
-              <a:t>Amity School of engineering &amp; Technology, Amity University, Kolkata </a:t>
-            </a:r>
-          </a:p>
-        </p:txBody>
-      </p:sp>
-      <p:sp>
-        <p:nvSpPr>
-          <p:cNvPr id="7" name="Rounded Rectangle 6"/>
+            <a:pPr algn="ctr">
+              <a:defRPr sz="950" b="0">
+                <a:solidFill>
+                  <a:srgbClr val="64748B"/>
+                </a:solidFill>
+                <a:latin typeface="Arial"/>
+              </a:defRPr>
+            </a:pPr>
+            <a:r>
+              <a:t>Amity School of Engineering &amp; Technology, Amity University, Kolkata</a:t>
+            </a:r>
+          </a:p>
+        </p:txBody>
+      </p:sp>
+      <p:sp>
+        <p:nvSpPr>
+          <p:cNvPr id="7" name="Rectangle 6"/>
           <p:cNvSpPr/>
           <p:nvPr/>
         </p:nvSpPr>
         <p:spPr>
           <a:xfrm>
-            <a:off x="841248" y="1645920"/>
-            <a:ext cx="5120640" cy="2121408"/>
+            <a:off x="841248" y="1078992"/>
+            <a:ext cx="10515600" cy="13716"/>
           </a:xfrm>
-          <a:prstGeom prst="roundRect">
+          <a:prstGeom prst="rect">
             <a:avLst/>
           </a:prstGeom>
           <a:solidFill>
-            <a:srgbClr val="F8FAFC"/>
+            <a:srgbClr val="CBD5E1"/>
           </a:solidFill>
-          <a:ln w="12700">
+          <a:ln w="6350">
             <a:solidFill>
-              <a:srgbClr val="E2E8F0"/>
+              <a:srgbClr val="CBD5E1"/>
             </a:solidFill>
           </a:ln>
         </p:spPr>
@@ -8670,122 +9904,32 @@
           </a:fontRef>
         </p:style>
         <p:txBody>
-          <a:bodyPr rtlCol="0" anchor="ctr" wrap="square" lIns="201168" rIns="201168" tIns="164592" bIns="164592"/>
-          <a:lstStyle/>
-          <a:p>
-            <a:pPr algn="ctr">
-              <a:spcAft>
-                <a:spcPts val="600"/>
-              </a:spcAft>
-              <a:defRPr sz="1300" b="1">
-                <a:solidFill>
-                  <a:srgbClr val="0F172A"/>
-                </a:solidFill>
-                <a:latin typeface="Calibri"/>
-              </a:defRPr>
-            </a:pPr>
-            <a:r>
-              <a:t>1. Live Civic API Integration &amp; Ingestion</a:t>
-            </a:r>
-          </a:p>
-          <a:p>
-            <a:pPr>
-              <a:spcAft>
-                <a:spcPts val="400"/>
-              </a:spcAft>
-            </a:pPr>
-            <a:r>
-              <a:rPr sz="1100" b="1">
-                <a:solidFill>
-                  <a:srgbClr val="0F172A"/>
-                </a:solidFill>
-                <a:latin typeface="Calibri"/>
-              </a:rPr>
-              <a:t>• KMC Portal Connector: </a:t>
-            </a:r>
-            <a:r>
-              <a:rPr sz="1100">
-                <a:solidFill>
-                  <a:srgbClr val="334155"/>
-                </a:solidFill>
-                <a:latin typeface="Calibri"/>
-              </a:rPr>
-              <a:t>Build automated scrapers and API connectors directly with the Kolkata Municipal Corporation Health Dept.</a:t>
-            </a:r>
-          </a:p>
-          <a:p>
-            <a:pPr>
-              <a:spcAft>
-                <a:spcPts val="400"/>
-              </a:spcAft>
-            </a:pPr>
-            <a:r>
-              <a:rPr sz="1100" b="1">
-                <a:solidFill>
-                  <a:srgbClr val="0F172A"/>
-                </a:solidFill>
-                <a:latin typeface="Calibri"/>
-              </a:rPr>
-              <a:t>• FSSAI FoSCoS Feed: </a:t>
-            </a:r>
-            <a:r>
-              <a:rPr sz="1100">
-                <a:solidFill>
-                  <a:srgbClr val="334155"/>
-                </a:solidFill>
-                <a:latin typeface="Calibri"/>
-              </a:rPr>
-              <a:t>Automate real-time synchronization of Food Safety Officer inspection notices and licence statuses.</a:t>
-            </a:r>
-          </a:p>
-          <a:p>
-            <a:pPr>
-              <a:spcAft>
-                <a:spcPts val="400"/>
-              </a:spcAft>
-            </a:pPr>
-            <a:r>
-              <a:rPr sz="1100" b="1">
-                <a:solidFill>
-                  <a:srgbClr val="0F172A"/>
-                </a:solidFill>
-                <a:latin typeface="Calibri"/>
-              </a:rPr>
-              <a:t>• Civic Alert Dispatch: </a:t>
-            </a:r>
-            <a:r>
-              <a:rPr sz="1100">
-                <a:solidFill>
-                  <a:srgbClr val="334155"/>
-                </a:solidFill>
-                <a:latin typeface="Calibri"/>
-              </a:rPr>
-              <a:t>Directly route high-confidence illness reviews to municipal health desks for priority inspection scheduling.</a:t>
-            </a:r>
-          </a:p>
-        </p:txBody>
-      </p:sp>
-      <p:sp>
-        <p:nvSpPr>
-          <p:cNvPr id="8" name="Rounded Rectangle 7"/>
+          <a:bodyPr rtlCol="0" anchor="ctr"/>
+          <a:lstStyle/>
+          <a:p>
+            <a:pPr algn="ctr"/>
+          </a:p>
+        </p:txBody>
+      </p:sp>
+      <p:sp>
+        <p:nvSpPr>
+          <p:cNvPr id="8" name="Rectangle 7"/>
           <p:cNvSpPr/>
           <p:nvPr/>
         </p:nvSpPr>
         <p:spPr>
           <a:xfrm>
-            <a:off x="6236208" y="1645920"/>
-            <a:ext cx="5120640" cy="2121408"/>
+            <a:off x="841248" y="1371600"/>
+            <a:ext cx="5120640" cy="36576"/>
           </a:xfrm>
-          <a:prstGeom prst="roundRect">
+          <a:prstGeom prst="rect">
             <a:avLst/>
           </a:prstGeom>
           <a:solidFill>
-            <a:srgbClr val="F8FAFC"/>
+            <a:srgbClr val="0F172A"/>
           </a:solidFill>
-          <a:ln w="12700">
-            <a:solidFill>
-              <a:srgbClr val="E2E8F0"/>
-            </a:solidFill>
+          <a:ln>
+            <a:noFill/>
           </a:ln>
         </p:spPr>
         <p:style>
@@ -8803,122 +9947,30 @@
           </a:fontRef>
         </p:style>
         <p:txBody>
-          <a:bodyPr rtlCol="0" anchor="ctr" wrap="square" lIns="201168" rIns="201168" tIns="164592" bIns="164592"/>
-          <a:lstStyle/>
-          <a:p>
-            <a:pPr algn="ctr">
-              <a:spcAft>
-                <a:spcPts val="600"/>
-              </a:spcAft>
-              <a:defRPr sz="1300" b="1">
-                <a:solidFill>
-                  <a:srgbClr val="0F766E"/>
-                </a:solidFill>
-                <a:latin typeface="Calibri"/>
-              </a:defRPr>
-            </a:pPr>
-            <a:r>
-              <a:t>2. Multilingual &amp; Code-Mixed Bengali NLP</a:t>
-            </a:r>
-          </a:p>
-          <a:p>
-            <a:pPr>
-              <a:spcAft>
-                <a:spcPts val="400"/>
-              </a:spcAft>
-            </a:pPr>
-            <a:r>
-              <a:rPr sz="1100" b="1">
-                <a:solidFill>
-                  <a:srgbClr val="0F172A"/>
-                </a:solidFill>
-                <a:latin typeface="Calibri"/>
-              </a:rPr>
-              <a:t>• Banglish Handling: </a:t>
-            </a:r>
-            <a:r>
-              <a:rPr sz="1100">
-                <a:solidFill>
-                  <a:srgbClr val="334155"/>
-                </a:solidFill>
-                <a:latin typeface="Calibri"/>
-              </a:rPr>
-              <a:t>Train domain-adapted IndicBERT/BanglaBERT models to understand Romanized Bengali reviews.</a:t>
-            </a:r>
-          </a:p>
-          <a:p>
-            <a:pPr>
-              <a:spcAft>
-                <a:spcPts val="400"/>
-              </a:spcAft>
-            </a:pPr>
-            <a:r>
-              <a:rPr sz="1100" b="1">
-                <a:solidFill>
-                  <a:srgbClr val="0F172A"/>
-                </a:solidFill>
-                <a:latin typeface="Calibri"/>
-              </a:rPr>
-              <a:t>• Dialectal Nuance: </a:t>
-            </a:r>
-            <a:r>
-              <a:rPr sz="1100">
-                <a:solidFill>
-                  <a:srgbClr val="334155"/>
-                </a:solidFill>
-                <a:latin typeface="Calibri"/>
-              </a:rPr>
-              <a:t>Accurately parse regional Kolkata culinary descriptors ('besh bhalo', 'khub baje', 'tel tel bhab').</a:t>
-            </a:r>
-          </a:p>
-          <a:p>
-            <a:pPr>
-              <a:spcAft>
-                <a:spcPts val="400"/>
-              </a:spcAft>
-            </a:pPr>
-            <a:r>
-              <a:rPr sz="1100" b="1">
-                <a:solidFill>
-                  <a:srgbClr val="0F172A"/>
-                </a:solidFill>
-                <a:latin typeface="Calibri"/>
-              </a:rPr>
-              <a:t>• Cross-Lingual ABSA: </a:t>
-            </a:r>
-            <a:r>
-              <a:rPr sz="1100">
-                <a:solidFill>
-                  <a:srgbClr val="334155"/>
-                </a:solidFill>
-                <a:latin typeface="Calibri"/>
-              </a:rPr>
-              <a:t>Multi-lingual aspect head capable of extracting food/hygiene sentiment across English, Bengali, and Hindi.</a:t>
-            </a:r>
-          </a:p>
-        </p:txBody>
-      </p:sp>
-      <p:sp>
-        <p:nvSpPr>
-          <p:cNvPr id="9" name="Rounded Rectangle 8"/>
+          <a:bodyPr rtlCol="0" anchor="ctr"/>
+          <a:lstStyle/>
+          <a:p>
+            <a:pPr algn="ctr"/>
+          </a:p>
+        </p:txBody>
+      </p:sp>
+      <p:sp>
+        <p:nvSpPr>
+          <p:cNvPr id="9" name="Rectangle 8"/>
           <p:cNvSpPr/>
           <p:nvPr/>
         </p:nvSpPr>
         <p:spPr>
           <a:xfrm>
-            <a:off x="841248" y="3931920"/>
-            <a:ext cx="5120640" cy="2121408"/>
+            <a:off x="841248" y="1463040"/>
+            <a:ext cx="5120640" cy="2194560"/>
           </a:xfrm>
-          <a:prstGeom prst="roundRect">
+          <a:prstGeom prst="rect">
             <a:avLst/>
           </a:prstGeom>
-          <a:solidFill>
-            <a:srgbClr val="F8FAFC"/>
-          </a:solidFill>
-          <a:ln w="12700">
-            <a:solidFill>
-              <a:srgbClr val="E2E8F0"/>
-            </a:solidFill>
+          <a:noFill/>
+          <a:ln>
+            <a:noFill/>
           </a:ln>
         </p:spPr>
         <p:style>
@@ -8936,122 +9988,123 @@
           </a:fontRef>
         </p:style>
         <p:txBody>
-          <a:bodyPr rtlCol="0" anchor="ctr" wrap="square" lIns="201168" rIns="201168" tIns="164592" bIns="164592"/>
+          <a:bodyPr rtlCol="0" anchor="t" wrap="square" lIns="0" rIns="0" tIns="0" bIns="0"/>
           <a:lstStyle/>
           <a:p>
             <a:pPr algn="ctr">
+              <a:spcBef>
+                <a:spcPts val="400"/>
+              </a:spcBef>
               <a:spcAft>
-                <a:spcPts val="600"/>
+                <a:spcPts val="1000"/>
               </a:spcAft>
-              <a:defRPr sz="1300" b="1">
-                <a:solidFill>
-                  <a:srgbClr val="1E40AF"/>
-                </a:solidFill>
-                <a:latin typeface="Calibri"/>
+              <a:defRPr sz="1250" b="1">
+                <a:solidFill>
+                  <a:srgbClr val="0F172A"/>
+                </a:solidFill>
+                <a:latin typeface="Arial"/>
               </a:defRPr>
             </a:pPr>
             <a:r>
-              <a:t>3. Explainable AI (XAI) for Health Audits</a:t>
+              <a:t>1. Live Civic API Integration &amp; Ingestion</a:t>
             </a:r>
           </a:p>
           <a:p>
             <a:pPr>
               <a:spcAft>
-                <a:spcPts val="400"/>
+                <a:spcPts val="500"/>
               </a:spcAft>
             </a:pPr>
             <a:r>
-              <a:rPr sz="1100" b="1">
+              <a:rPr sz="1050" b="1">
                 <a:solidFill>
                   <a:srgbClr val="0F172A"/>
                 </a:solidFill>
-                <a:latin typeface="Calibri"/>
-              </a:rPr>
-              <a:t>• Attribution Heatmaps: </a:t>
-            </a:r>
-            <a:r>
-              <a:rPr sz="1100">
+                <a:latin typeface="Arial"/>
+              </a:rPr>
+              <a:t>•  KMC Portal Connector: </a:t>
+            </a:r>
+            <a:r>
+              <a:rPr sz="1000">
                 <a:solidFill>
                   <a:srgbClr val="334155"/>
                 </a:solidFill>
-                <a:latin typeface="Calibri"/>
-              </a:rPr>
-              <a:t>Implement SHAP (SHapley Additive exPlanations) and Integrated Gradients on review text.</a:t>
+                <a:latin typeface="Arial"/>
+              </a:rPr>
+              <a:t>Build automated scrapers and API connectors directly with the Kolkata Municipal Corporation Health Dept.</a:t>
             </a:r>
           </a:p>
           <a:p>
             <a:pPr>
               <a:spcAft>
-                <a:spcPts val="400"/>
+                <a:spcPts val="500"/>
               </a:spcAft>
             </a:pPr>
             <a:r>
-              <a:rPr sz="1100" b="1">
+              <a:rPr sz="1050" b="1">
                 <a:solidFill>
                   <a:srgbClr val="0F172A"/>
                 </a:solidFill>
-                <a:latin typeface="Calibri"/>
-              </a:rPr>
-              <a:t>• Evidence Highlighting: </a:t>
-            </a:r>
-            <a:r>
-              <a:rPr sz="1100">
+                <a:latin typeface="Arial"/>
+              </a:rPr>
+              <a:t>•  FSSAI FoSCoS Feed: </a:t>
+            </a:r>
+            <a:r>
+              <a:rPr sz="1000">
                 <a:solidFill>
                   <a:srgbClr val="334155"/>
                 </a:solidFill>
-                <a:latin typeface="Calibri"/>
-              </a:rPr>
-              <a:t>Provide visual token-level justification to public health officers explaining exactly why a review was flagged.</a:t>
+                <a:latin typeface="Arial"/>
+              </a:rPr>
+              <a:t>Automate real-time synchronization of Food Safety Officer inspection notices and licence statuses.</a:t>
             </a:r>
           </a:p>
           <a:p>
             <a:pPr>
               <a:spcAft>
-                <a:spcPts val="400"/>
+                <a:spcPts val="500"/>
               </a:spcAft>
             </a:pPr>
             <a:r>
-              <a:rPr sz="1100" b="1">
+              <a:rPr sz="1050" b="1">
                 <a:solidFill>
                   <a:srgbClr val="0F172A"/>
                 </a:solidFill>
-                <a:latin typeface="Calibri"/>
-              </a:rPr>
-              <a:t>• Audit Trail: </a:t>
-            </a:r>
-            <a:r>
-              <a:rPr sz="1100">
+                <a:latin typeface="Arial"/>
+              </a:rPr>
+              <a:t>•  Civic Alert Dispatch: </a:t>
+            </a:r>
+            <a:r>
+              <a:rPr sz="1000">
                 <a:solidFill>
                   <a:srgbClr val="334155"/>
                 </a:solidFill>
-                <a:latin typeface="Calibri"/>
-              </a:rPr>
-              <a:t>Export cryptographic tamper-proof inspection evidence summaries for regulatory compliance.</a:t>
-            </a:r>
-          </a:p>
-        </p:txBody>
-      </p:sp>
-      <p:sp>
-        <p:nvSpPr>
-          <p:cNvPr id="10" name="Rounded Rectangle 9"/>
+                <a:latin typeface="Arial"/>
+              </a:rPr>
+              <a:t>Directly route high-confidence illness reviews to municipal health desks for priority inspection scheduling.</a:t>
+            </a:r>
+          </a:p>
+        </p:txBody>
+      </p:sp>
+      <p:sp>
+        <p:nvSpPr>
+          <p:cNvPr id="10" name="Rectangle 9"/>
           <p:cNvSpPr/>
           <p:nvPr/>
         </p:nvSpPr>
         <p:spPr>
           <a:xfrm>
-            <a:off x="6236208" y="3931920"/>
-            <a:ext cx="5120640" cy="2121408"/>
+            <a:off x="6236208" y="1371600"/>
+            <a:ext cx="5120640" cy="36576"/>
           </a:xfrm>
-          <a:prstGeom prst="roundRect">
+          <a:prstGeom prst="rect">
             <a:avLst/>
           </a:prstGeom>
           <a:solidFill>
-            <a:srgbClr val="F8FAFC"/>
+            <a:srgbClr val="0F766E"/>
           </a:solidFill>
-          <a:ln w="12700">
-            <a:solidFill>
-              <a:srgbClr val="E2E8F0"/>
-            </a:solidFill>
+          <a:ln>
+            <a:noFill/>
           </a:ln>
         </p:spPr>
         <p:style>
@@ -9069,95 +10122,489 @@
           </a:fontRef>
         </p:style>
         <p:txBody>
-          <a:bodyPr rtlCol="0" anchor="ctr" wrap="square" lIns="201168" rIns="201168" tIns="164592" bIns="164592"/>
+          <a:bodyPr rtlCol="0" anchor="ctr"/>
+          <a:lstStyle/>
+          <a:p>
+            <a:pPr algn="ctr"/>
+          </a:p>
+        </p:txBody>
+      </p:sp>
+      <p:sp>
+        <p:nvSpPr>
+          <p:cNvPr id="11" name="Rectangle 10"/>
+          <p:cNvSpPr/>
+          <p:nvPr/>
+        </p:nvSpPr>
+        <p:spPr>
+          <a:xfrm>
+            <a:off x="6236208" y="1463040"/>
+            <a:ext cx="5120640" cy="2194560"/>
+          </a:xfrm>
+          <a:prstGeom prst="rect">
+            <a:avLst/>
+          </a:prstGeom>
+          <a:noFill/>
+          <a:ln>
+            <a:noFill/>
+          </a:ln>
+        </p:spPr>
+        <p:style>
+          <a:lnRef idx="1">
+            <a:schemeClr val="accent1"/>
+          </a:lnRef>
+          <a:fillRef idx="3">
+            <a:schemeClr val="accent1"/>
+          </a:fillRef>
+          <a:effectRef idx="2">
+            <a:schemeClr val="accent1"/>
+          </a:effectRef>
+          <a:fontRef idx="minor">
+            <a:schemeClr val="lt1"/>
+          </a:fontRef>
+        </p:style>
+        <p:txBody>
+          <a:bodyPr rtlCol="0" anchor="t" wrap="square" lIns="0" rIns="0" tIns="0" bIns="0"/>
           <a:lstStyle/>
           <a:p>
             <a:pPr algn="ctr">
+              <a:spcBef>
+                <a:spcPts val="400"/>
+              </a:spcBef>
               <a:spcAft>
-                <a:spcPts val="600"/>
+                <a:spcPts val="1000"/>
               </a:spcAft>
-              <a:defRPr sz="1300" b="1">
-                <a:solidFill>
-                  <a:srgbClr val="0F172A"/>
-                </a:solidFill>
-                <a:latin typeface="Calibri"/>
+              <a:defRPr sz="1250" b="1">
+                <a:solidFill>
+                  <a:srgbClr val="0F766E"/>
+                </a:solidFill>
+                <a:latin typeface="Arial"/>
               </a:defRPr>
             </a:pPr>
             <a:r>
-              <a:t>4. Progressive Web App (PWA) &amp; Geofencing</a:t>
+              <a:t>2. Multilingual &amp; Code-Mixed Bengali NLP</a:t>
             </a:r>
           </a:p>
           <a:p>
             <a:pPr>
               <a:spcAft>
-                <a:spcPts val="400"/>
+                <a:spcPts val="500"/>
               </a:spcAft>
             </a:pPr>
             <a:r>
-              <a:rPr sz="1100" b="1">
+              <a:rPr sz="1050" b="1">
                 <a:solidFill>
                   <a:srgbClr val="0F172A"/>
                 </a:solidFill>
-                <a:latin typeface="Calibri"/>
-              </a:rPr>
-              <a:t>• Offline-First Architecture: </a:t>
-            </a:r>
-            <a:r>
-              <a:rPr sz="1100">
+                <a:latin typeface="Arial"/>
+              </a:rPr>
+              <a:t>•  Banglish Handling: </a:t>
+            </a:r>
+            <a:r>
+              <a:rPr sz="1000">
                 <a:solidFill>
                   <a:srgbClr val="334155"/>
                 </a:solidFill>
-                <a:latin typeface="Calibri"/>
-              </a:rPr>
-              <a:t>Package web client as a mobile Progressive Web App with local caching for low-connectivity zones.</a:t>
+                <a:latin typeface="Arial"/>
+              </a:rPr>
+              <a:t>Train domain-adapted IndicBERT/BanglaBERT models to understand Romanized Bengali reviews.</a:t>
             </a:r>
           </a:p>
           <a:p>
             <a:pPr>
               <a:spcAft>
-                <a:spcPts val="400"/>
+                <a:spcPts val="500"/>
               </a:spcAft>
             </a:pPr>
             <a:r>
-              <a:rPr sz="1100" b="1">
+              <a:rPr sz="1050" b="1">
                 <a:solidFill>
                   <a:srgbClr val="0F172A"/>
                 </a:solidFill>
-                <a:latin typeface="Calibri"/>
-              </a:rPr>
-              <a:t>• GPS Proximity Alerts: </a:t>
-            </a:r>
-            <a:r>
-              <a:rPr sz="1100">
+                <a:latin typeface="Arial"/>
+              </a:rPr>
+              <a:t>•  Dialectal Nuance: </a:t>
+            </a:r>
+            <a:r>
+              <a:rPr sz="1000">
                 <a:solidFill>
                   <a:srgbClr val="334155"/>
                 </a:solidFill>
-                <a:latin typeface="Calibri"/>
-              </a:rPr>
-              <a:t>Provide geofenced push notifications warning users when entering dining clusters with recent hygiene flags.</a:t>
+                <a:latin typeface="Arial"/>
+              </a:rPr>
+              <a:t>Accurately parse regional Kolkata culinary descriptors ('besh bhalo', 'khub baje', 'tel tel bhab').</a:t>
             </a:r>
           </a:p>
           <a:p>
             <a:pPr>
               <a:spcAft>
+                <a:spcPts val="500"/>
+              </a:spcAft>
+            </a:pPr>
+            <a:r>
+              <a:rPr sz="1050" b="1">
+                <a:solidFill>
+                  <a:srgbClr val="0F172A"/>
+                </a:solidFill>
+                <a:latin typeface="Arial"/>
+              </a:rPr>
+              <a:t>•  Cross-Lingual ABSA: </a:t>
+            </a:r>
+            <a:r>
+              <a:rPr sz="1000">
+                <a:solidFill>
+                  <a:srgbClr val="334155"/>
+                </a:solidFill>
+                <a:latin typeface="Arial"/>
+              </a:rPr>
+              <a:t>Multi-lingual aspect head capable of extracting food/hygiene sentiment across English, Bengali, and Hindi.</a:t>
+            </a:r>
+          </a:p>
+        </p:txBody>
+      </p:sp>
+      <p:sp>
+        <p:nvSpPr>
+          <p:cNvPr id="12" name="Rectangle 11"/>
+          <p:cNvSpPr/>
+          <p:nvPr/>
+        </p:nvSpPr>
+        <p:spPr>
+          <a:xfrm>
+            <a:off x="841248" y="3840480"/>
+            <a:ext cx="5120640" cy="36576"/>
+          </a:xfrm>
+          <a:prstGeom prst="rect">
+            <a:avLst/>
+          </a:prstGeom>
+          <a:solidFill>
+            <a:srgbClr val="1E40AF"/>
+          </a:solidFill>
+          <a:ln>
+            <a:noFill/>
+          </a:ln>
+        </p:spPr>
+        <p:style>
+          <a:lnRef idx="1">
+            <a:schemeClr val="accent1"/>
+          </a:lnRef>
+          <a:fillRef idx="3">
+            <a:schemeClr val="accent1"/>
+          </a:fillRef>
+          <a:effectRef idx="2">
+            <a:schemeClr val="accent1"/>
+          </a:effectRef>
+          <a:fontRef idx="minor">
+            <a:schemeClr val="lt1"/>
+          </a:fontRef>
+        </p:style>
+        <p:txBody>
+          <a:bodyPr rtlCol="0" anchor="ctr"/>
+          <a:lstStyle/>
+          <a:p>
+            <a:pPr algn="ctr"/>
+          </a:p>
+        </p:txBody>
+      </p:sp>
+      <p:sp>
+        <p:nvSpPr>
+          <p:cNvPr id="13" name="Rectangle 12"/>
+          <p:cNvSpPr/>
+          <p:nvPr/>
+        </p:nvSpPr>
+        <p:spPr>
+          <a:xfrm>
+            <a:off x="841248" y="3931920"/>
+            <a:ext cx="5120640" cy="2194560"/>
+          </a:xfrm>
+          <a:prstGeom prst="rect">
+            <a:avLst/>
+          </a:prstGeom>
+          <a:noFill/>
+          <a:ln>
+            <a:noFill/>
+          </a:ln>
+        </p:spPr>
+        <p:style>
+          <a:lnRef idx="1">
+            <a:schemeClr val="accent1"/>
+          </a:lnRef>
+          <a:fillRef idx="3">
+            <a:schemeClr val="accent1"/>
+          </a:fillRef>
+          <a:effectRef idx="2">
+            <a:schemeClr val="accent1"/>
+          </a:effectRef>
+          <a:fontRef idx="minor">
+            <a:schemeClr val="lt1"/>
+          </a:fontRef>
+        </p:style>
+        <p:txBody>
+          <a:bodyPr rtlCol="0" anchor="t" wrap="square" lIns="0" rIns="0" tIns="0" bIns="0"/>
+          <a:lstStyle/>
+          <a:p>
+            <a:pPr algn="ctr">
+              <a:spcBef>
                 <a:spcPts val="400"/>
+              </a:spcBef>
+              <a:spcAft>
+                <a:spcPts val="1000"/>
               </a:spcAft>
-            </a:pPr>
-            <a:r>
-              <a:rPr sz="1100" b="1">
+              <a:defRPr sz="1250" b="1">
+                <a:solidFill>
+                  <a:srgbClr val="1E40AF"/>
+                </a:solidFill>
+                <a:latin typeface="Arial"/>
+              </a:defRPr>
+            </a:pPr>
+            <a:r>
+              <a:t>3. Explainable AI (XAI) for Health Audits</a:t>
+            </a:r>
+          </a:p>
+          <a:p>
+            <a:pPr>
+              <a:spcAft>
+                <a:spcPts val="500"/>
+              </a:spcAft>
+            </a:pPr>
+            <a:r>
+              <a:rPr sz="1050" b="1">
                 <a:solidFill>
                   <a:srgbClr val="0F172A"/>
                 </a:solidFill>
-                <a:latin typeface="Calibri"/>
-              </a:rPr>
-              <a:t>• Street Food Integration: </a:t>
-            </a:r>
-            <a:r>
-              <a:rPr sz="1100">
+                <a:latin typeface="Arial"/>
+              </a:rPr>
+              <a:t>•  Attribution Heatmaps: </a:t>
+            </a:r>
+            <a:r>
+              <a:rPr sz="1000">
                 <a:solidFill>
                   <a:srgbClr val="334155"/>
                 </a:solidFill>
-                <a:latin typeface="Calibri"/>
+                <a:latin typeface="Arial"/>
+              </a:rPr>
+              <a:t>Implement SHAP (SHapley Additive exPlanations) and Integrated Gradients on review text.</a:t>
+            </a:r>
+          </a:p>
+          <a:p>
+            <a:pPr>
+              <a:spcAft>
+                <a:spcPts val="500"/>
+              </a:spcAft>
+            </a:pPr>
+            <a:r>
+              <a:rPr sz="1050" b="1">
+                <a:solidFill>
+                  <a:srgbClr val="0F172A"/>
+                </a:solidFill>
+                <a:latin typeface="Arial"/>
+              </a:rPr>
+              <a:t>•  Evidence Highlighting: </a:t>
+            </a:r>
+            <a:r>
+              <a:rPr sz="1000">
+                <a:solidFill>
+                  <a:srgbClr val="334155"/>
+                </a:solidFill>
+                <a:latin typeface="Arial"/>
+              </a:rPr>
+              <a:t>Provide visual token-level justification to public health officers explaining exactly why a review was flagged.</a:t>
+            </a:r>
+          </a:p>
+          <a:p>
+            <a:pPr>
+              <a:spcAft>
+                <a:spcPts val="500"/>
+              </a:spcAft>
+            </a:pPr>
+            <a:r>
+              <a:rPr sz="1050" b="1">
+                <a:solidFill>
+                  <a:srgbClr val="0F172A"/>
+                </a:solidFill>
+                <a:latin typeface="Arial"/>
+              </a:rPr>
+              <a:t>•  Audit Trail: </a:t>
+            </a:r>
+            <a:r>
+              <a:rPr sz="1000">
+                <a:solidFill>
+                  <a:srgbClr val="334155"/>
+                </a:solidFill>
+                <a:latin typeface="Arial"/>
+              </a:rPr>
+              <a:t>Export cryptographic tamper-proof inspection evidence summaries for regulatory compliance.</a:t>
+            </a:r>
+          </a:p>
+        </p:txBody>
+      </p:sp>
+      <p:sp>
+        <p:nvSpPr>
+          <p:cNvPr id="14" name="Rectangle 13"/>
+          <p:cNvSpPr/>
+          <p:nvPr/>
+        </p:nvSpPr>
+        <p:spPr>
+          <a:xfrm>
+            <a:off x="6236208" y="3840480"/>
+            <a:ext cx="5120640" cy="36576"/>
+          </a:xfrm>
+          <a:prstGeom prst="rect">
+            <a:avLst/>
+          </a:prstGeom>
+          <a:solidFill>
+            <a:srgbClr val="0F172A"/>
+          </a:solidFill>
+          <a:ln>
+            <a:noFill/>
+          </a:ln>
+        </p:spPr>
+        <p:style>
+          <a:lnRef idx="1">
+            <a:schemeClr val="accent1"/>
+          </a:lnRef>
+          <a:fillRef idx="3">
+            <a:schemeClr val="accent1"/>
+          </a:fillRef>
+          <a:effectRef idx="2">
+            <a:schemeClr val="accent1"/>
+          </a:effectRef>
+          <a:fontRef idx="minor">
+            <a:schemeClr val="lt1"/>
+          </a:fontRef>
+        </p:style>
+        <p:txBody>
+          <a:bodyPr rtlCol="0" anchor="ctr"/>
+          <a:lstStyle/>
+          <a:p>
+            <a:pPr algn="ctr"/>
+          </a:p>
+        </p:txBody>
+      </p:sp>
+      <p:sp>
+        <p:nvSpPr>
+          <p:cNvPr id="15" name="Rectangle 14"/>
+          <p:cNvSpPr/>
+          <p:nvPr/>
+        </p:nvSpPr>
+        <p:spPr>
+          <a:xfrm>
+            <a:off x="6236208" y="3931920"/>
+            <a:ext cx="5120640" cy="2194560"/>
+          </a:xfrm>
+          <a:prstGeom prst="rect">
+            <a:avLst/>
+          </a:prstGeom>
+          <a:noFill/>
+          <a:ln>
+            <a:noFill/>
+          </a:ln>
+        </p:spPr>
+        <p:style>
+          <a:lnRef idx="1">
+            <a:schemeClr val="accent1"/>
+          </a:lnRef>
+          <a:fillRef idx="3">
+            <a:schemeClr val="accent1"/>
+          </a:fillRef>
+          <a:effectRef idx="2">
+            <a:schemeClr val="accent1"/>
+          </a:effectRef>
+          <a:fontRef idx="minor">
+            <a:schemeClr val="lt1"/>
+          </a:fontRef>
+        </p:style>
+        <p:txBody>
+          <a:bodyPr rtlCol="0" anchor="t" wrap="square" lIns="0" rIns="0" tIns="0" bIns="0"/>
+          <a:lstStyle/>
+          <a:p>
+            <a:pPr algn="ctr">
+              <a:spcBef>
+                <a:spcPts val="400"/>
+              </a:spcBef>
+              <a:spcAft>
+                <a:spcPts val="1000"/>
+              </a:spcAft>
+              <a:defRPr sz="1250" b="1">
+                <a:solidFill>
+                  <a:srgbClr val="0F172A"/>
+                </a:solidFill>
+                <a:latin typeface="Arial"/>
+              </a:defRPr>
+            </a:pPr>
+            <a:r>
+              <a:t>4. Progressive Web App (PWA) &amp; Geofencing</a:t>
+            </a:r>
+          </a:p>
+          <a:p>
+            <a:pPr>
+              <a:spcAft>
+                <a:spcPts val="500"/>
+              </a:spcAft>
+            </a:pPr>
+            <a:r>
+              <a:rPr sz="1050" b="1">
+                <a:solidFill>
+                  <a:srgbClr val="0F172A"/>
+                </a:solidFill>
+                <a:latin typeface="Arial"/>
+              </a:rPr>
+              <a:t>•  Offline-First Architecture: </a:t>
+            </a:r>
+            <a:r>
+              <a:rPr sz="1000">
+                <a:solidFill>
+                  <a:srgbClr val="334155"/>
+                </a:solidFill>
+                <a:latin typeface="Arial"/>
+              </a:rPr>
+              <a:t>Package web client as a mobile Progressive Web App with local caching for low-connectivity zones.</a:t>
+            </a:r>
+          </a:p>
+          <a:p>
+            <a:pPr>
+              <a:spcAft>
+                <a:spcPts val="500"/>
+              </a:spcAft>
+            </a:pPr>
+            <a:r>
+              <a:rPr sz="1050" b="1">
+                <a:solidFill>
+                  <a:srgbClr val="0F172A"/>
+                </a:solidFill>
+                <a:latin typeface="Arial"/>
+              </a:rPr>
+              <a:t>•  GPS Proximity Alerts: </a:t>
+            </a:r>
+            <a:r>
+              <a:rPr sz="1000">
+                <a:solidFill>
+                  <a:srgbClr val="334155"/>
+                </a:solidFill>
+                <a:latin typeface="Arial"/>
+              </a:rPr>
+              <a:t>Provide geofenced push notifications warning users when entering dining clusters with recent hygiene flags.</a:t>
+            </a:r>
+          </a:p>
+          <a:p>
+            <a:pPr>
+              <a:spcAft>
+                <a:spcPts val="500"/>
+              </a:spcAft>
+            </a:pPr>
+            <a:r>
+              <a:rPr sz="1050" b="1">
+                <a:solidFill>
+                  <a:srgbClr val="0F172A"/>
+                </a:solidFill>
+                <a:latin typeface="Arial"/>
+              </a:rPr>
+              <a:t>•  Street Food Integration: </a:t>
+            </a:r>
+            <a:r>
+              <a:rPr sz="1000">
+                <a:solidFill>
+                  <a:srgbClr val="334155"/>
+                </a:solidFill>
+                <a:latin typeface="Arial"/>
               </a:rPr>
               <a:t>Expand coverage to Kolkata's iconic street food hubs (Dacres Lane, Gariahat) via QR-code verification.</a:t>
             </a:r>
@@ -9210,17 +10657,22 @@
             <p:ph type="title"/>
           </p:nvPr>
         </p:nvSpPr>
-        <p:spPr/>
-        <p:txBody>
-          <a:bodyPr/>
-          <a:lstStyle/>
-          <a:p>
-            <a:pPr>
+        <p:spPr>
+          <a:xfrm>
+            <a:off x="841248" y="411480"/>
+            <a:ext cx="10515600" cy="594360"/>
+          </a:xfrm>
+        </p:spPr>
+        <p:txBody>
+          <a:bodyPr anchor="ctr"/>
+          <a:lstStyle/>
+          <a:p>
+            <a:pPr algn="l">
               <a:defRPr sz="2400" b="1">
                 <a:solidFill>
                   <a:srgbClr val="0F172A"/>
                 </a:solidFill>
-                <a:latin typeface="Calibri"/>
+                <a:latin typeface="Arial"/>
               </a:defRPr>
             </a:pPr>
             <a:r>
@@ -9245,15 +10697,27 @@
             <p:ph type="sldNum" sz="quarter" idx="12"/>
           </p:nvPr>
         </p:nvSpPr>
-        <p:spPr/>
-        <p:txBody>
-          <a:bodyPr/>
-          <a:lstStyle/>
-          <a:p>
-            <a:fld id="{C9080329-36BA-448C-B0A7-FA1AF13B2E0F}" type="slidenum">
-              <a:rPr lang="en-US" smtClean="0"/>
+        <p:spPr>
+          <a:xfrm>
+            <a:off x="10515600" y="6419088"/>
+            <a:ext cx="841248" cy="320040"/>
+          </a:xfrm>
+        </p:spPr>
+        <p:txBody>
+          <a:bodyPr anchor="ctr"/>
+          <a:lstStyle/>
+          <a:p>
+            <a:pPr algn="r">
+              <a:defRPr sz="1000">
+                <a:solidFill>
+                  <a:srgbClr val="64748B"/>
+                </a:solidFill>
+                <a:latin typeface="Arial"/>
+              </a:defRPr>
+            </a:pPr>
+            <a:r>
               <a:t>9</a:t>
-            </a:fld>
+            </a:r>
             <a:endParaRPr lang="en-US"/>
           </a:p>
         </p:txBody>
@@ -9272,8 +10736,8 @@
         </p:nvSpPr>
         <p:spPr>
           <a:xfrm>
-            <a:off x="2558716" y="6482255"/>
-            <a:ext cx="7515726" cy="369332"/>
+            <a:off x="1371600" y="6419088"/>
+            <a:ext cx="9445752" cy="320040"/>
           </a:xfrm>
           <a:prstGeom prst="rect">
             <a:avLst/>
@@ -9281,38 +10745,45 @@
           <a:noFill/>
         </p:spPr>
         <p:txBody>
-          <a:bodyPr wrap="square" rtlCol="0">
+          <a:bodyPr wrap="square" rtlCol="0" anchor="ctr">
             <a:spAutoFit/>
           </a:bodyPr>
           <a:lstStyle/>
           <a:p>
-            <a:r>
-              <a:rPr lang="en-US" b="1" dirty="0"/>
-              <a:t>Amity School of engineering &amp; Technology, Amity University, Kolkata </a:t>
-            </a:r>
-          </a:p>
-        </p:txBody>
-      </p:sp>
-      <p:sp>
-        <p:nvSpPr>
-          <p:cNvPr id="7" name="Rounded Rectangle 6"/>
+            <a:pPr algn="ctr">
+              <a:defRPr sz="950" b="0">
+                <a:solidFill>
+                  <a:srgbClr val="64748B"/>
+                </a:solidFill>
+                <a:latin typeface="Arial"/>
+              </a:defRPr>
+            </a:pPr>
+            <a:r>
+              <a:t>Amity School of Engineering &amp; Technology, Amity University, Kolkata</a:t>
+            </a:r>
+          </a:p>
+        </p:txBody>
+      </p:sp>
+      <p:sp>
+        <p:nvSpPr>
+          <p:cNvPr id="7" name="Rectangle 6"/>
           <p:cNvSpPr/>
           <p:nvPr/>
         </p:nvSpPr>
         <p:spPr>
           <a:xfrm>
-            <a:off x="841248" y="1645920"/>
-            <a:ext cx="5120640" cy="2121408"/>
+            <a:off x="841248" y="1078992"/>
+            <a:ext cx="10515600" cy="13716"/>
           </a:xfrm>
-          <a:prstGeom prst="roundRect">
+          <a:prstGeom prst="rect">
             <a:avLst/>
           </a:prstGeom>
           <a:solidFill>
-            <a:srgbClr val="F8FAFC"/>
+            <a:srgbClr val="CBD5E1"/>
           </a:solidFill>
-          <a:ln w="12700">
+          <a:ln w="6350">
             <a:solidFill>
-              <a:srgbClr val="E2E8F0"/>
+              <a:srgbClr val="CBD5E1"/>
             </a:solidFill>
           </a:ln>
         </p:spPr>
@@ -9331,97 +10802,32 @@
           </a:fontRef>
         </p:style>
         <p:txBody>
-          <a:bodyPr rtlCol="0" anchor="ctr" wrap="square" lIns="201168" rIns="201168" tIns="164592" bIns="164592"/>
-          <a:lstStyle/>
-          <a:p>
-            <a:pPr algn="ctr">
-              <a:spcAft>
-                <a:spcPts val="600"/>
-              </a:spcAft>
-              <a:defRPr sz="1300" b="1">
-                <a:solidFill>
-                  <a:srgbClr val="0F172A"/>
-                </a:solidFill>
-                <a:latin typeface="Calibri"/>
-              </a:defRPr>
-            </a:pPr>
-            <a:r>
-              <a:t>1. Unified Civic-Consumer Intelligence</a:t>
-            </a:r>
-          </a:p>
-          <a:p>
-            <a:pPr>
-              <a:spcAft>
-                <a:spcPts val="400"/>
-              </a:spcAft>
-            </a:pPr>
-            <a:r>
-              <a:rPr sz="1100" b="1">
-                <a:solidFill>
-                  <a:srgbClr val="0F172A"/>
-                </a:solidFill>
-                <a:latin typeface="Calibri"/>
-              </a:rPr>
-              <a:t>• Pioneering Integration: </a:t>
-            </a:r>
-            <a:r>
-              <a:rPr sz="1100">
-                <a:solidFill>
-                  <a:srgbClr val="334155"/>
-                </a:solidFill>
-                <a:latin typeface="Calibri"/>
-              </a:rPr>
-              <a:t>Developed Kolkata FoodLens, the first integrated platform for Kolkata synthesizing consumer review sentiment with municipal food safety compliance.</a:t>
-            </a:r>
-          </a:p>
-          <a:p>
-            <a:pPr>
-              <a:spcAft>
-                <a:spcPts val="400"/>
-              </a:spcAft>
-            </a:pPr>
-            <a:r>
-              <a:rPr sz="1100" b="1">
-                <a:solidFill>
-                  <a:srgbClr val="0F172A"/>
-                </a:solidFill>
-                <a:latin typeface="Calibri"/>
-              </a:rPr>
-              <a:t>• Transparency Restored: </a:t>
-            </a:r>
-            <a:r>
-              <a:rPr sz="1100">
-                <a:solidFill>
-                  <a:srgbClr val="334155"/>
-                </a:solidFill>
-                <a:latin typeface="Calibri"/>
-              </a:rPr>
-              <a:t>Empowered citizens to make informed dining choices backed by verified FSSAI inspection audits rather than inflated star ratings alone.</a:t>
-            </a:r>
-          </a:p>
-        </p:txBody>
-      </p:sp>
-      <p:sp>
-        <p:nvSpPr>
-          <p:cNvPr id="8" name="Rounded Rectangle 7"/>
+          <a:bodyPr rtlCol="0" anchor="ctr"/>
+          <a:lstStyle/>
+          <a:p>
+            <a:pPr algn="ctr"/>
+          </a:p>
+        </p:txBody>
+      </p:sp>
+      <p:sp>
+        <p:nvSpPr>
+          <p:cNvPr id="8" name="Rectangle 7"/>
           <p:cNvSpPr/>
           <p:nvPr/>
         </p:nvSpPr>
         <p:spPr>
           <a:xfrm>
-            <a:off x="6236208" y="1645920"/>
-            <a:ext cx="5120640" cy="2121408"/>
+            <a:off x="841248" y="1371600"/>
+            <a:ext cx="5120640" cy="36576"/>
           </a:xfrm>
-          <a:prstGeom prst="roundRect">
+          <a:prstGeom prst="rect">
             <a:avLst/>
           </a:prstGeom>
           <a:solidFill>
-            <a:srgbClr val="F8FAFC"/>
+            <a:srgbClr val="0F172A"/>
           </a:solidFill>
-          <a:ln w="12700">
-            <a:solidFill>
-              <a:srgbClr val="E2E8F0"/>
-            </a:solidFill>
+          <a:ln>
+            <a:noFill/>
           </a:ln>
         </p:spPr>
         <p:style>
@@ -9439,97 +10845,30 @@
           </a:fontRef>
         </p:style>
         <p:txBody>
-          <a:bodyPr rtlCol="0" anchor="ctr" wrap="square" lIns="201168" rIns="201168" tIns="164592" bIns="164592"/>
-          <a:lstStyle/>
-          <a:p>
-            <a:pPr algn="ctr">
-              <a:spcAft>
-                <a:spcPts val="600"/>
-              </a:spcAft>
-              <a:defRPr sz="1300" b="1">
-                <a:solidFill>
-                  <a:srgbClr val="0F766E"/>
-                </a:solidFill>
-                <a:latin typeface="Calibri"/>
-              </a:defRPr>
-            </a:pPr>
-            <a:r>
-              <a:t>2. Resolved Multi-Aspect Contradictions</a:t>
-            </a:r>
-          </a:p>
-          <a:p>
-            <a:pPr>
-              <a:spcAft>
-                <a:spcPts val="400"/>
-              </a:spcAft>
-            </a:pPr>
-            <a:r>
-              <a:rPr sz="1100" b="1">
-                <a:solidFill>
-                  <a:srgbClr val="0F172A"/>
-                </a:solidFill>
-                <a:latin typeface="Calibri"/>
-              </a:rPr>
-              <a:t>• Discourse Clause NLP: </a:t>
-            </a:r>
-            <a:r>
-              <a:rPr sz="1100">
-                <a:solidFill>
-                  <a:srgbClr val="334155"/>
-                </a:solidFill>
-                <a:latin typeface="Calibri"/>
-              </a:rPr>
-              <a:t>Successfully bypassed coarse sentiment limitations by implementing clause-level ABSA across 5 dimensions (Food, Service, Hygiene, Ambience, Price).</a:t>
-            </a:r>
-          </a:p>
-          <a:p>
-            <a:pPr>
-              <a:spcAft>
-                <a:spcPts val="400"/>
-              </a:spcAft>
-            </a:pPr>
-            <a:r>
-              <a:rPr sz="1100" b="1">
-                <a:solidFill>
-                  <a:srgbClr val="0F172A"/>
-                </a:solidFill>
-                <a:latin typeface="Calibri"/>
-              </a:rPr>
-              <a:t>• High Aspect Reliability: </a:t>
-            </a:r>
-            <a:r>
-              <a:rPr sz="1100">
-                <a:solidFill>
-                  <a:srgbClr val="334155"/>
-                </a:solidFill>
-                <a:latin typeface="Calibri"/>
-              </a:rPr>
-              <a:t>Achieved 0.865 Macro-F1 on SemEval validation, correctly decomposing contrastive reviews with 100% clause accuracy.</a:t>
-            </a:r>
-          </a:p>
-        </p:txBody>
-      </p:sp>
-      <p:sp>
-        <p:nvSpPr>
-          <p:cNvPr id="9" name="Rounded Rectangle 8"/>
+          <a:bodyPr rtlCol="0" anchor="ctr"/>
+          <a:lstStyle/>
+          <a:p>
+            <a:pPr algn="ctr"/>
+          </a:p>
+        </p:txBody>
+      </p:sp>
+      <p:sp>
+        <p:nvSpPr>
+          <p:cNvPr id="9" name="Rectangle 8"/>
           <p:cNvSpPr/>
           <p:nvPr/>
         </p:nvSpPr>
         <p:spPr>
           <a:xfrm>
-            <a:off x="841248" y="3931920"/>
-            <a:ext cx="5120640" cy="2121408"/>
+            <a:off x="841248" y="1463040"/>
+            <a:ext cx="5120640" cy="2194560"/>
           </a:xfrm>
-          <a:prstGeom prst="roundRect">
+          <a:prstGeom prst="rect">
             <a:avLst/>
           </a:prstGeom>
-          <a:solidFill>
-            <a:srgbClr val="F8FAFC"/>
-          </a:solidFill>
-          <a:ln w="12700">
-            <a:solidFill>
-              <a:srgbClr val="E2E8F0"/>
-            </a:solidFill>
+          <a:noFill/>
+          <a:ln>
+            <a:noFill/>
           </a:ln>
         </p:spPr>
         <p:style>
@@ -9547,97 +10886,98 @@
           </a:fontRef>
         </p:style>
         <p:txBody>
-          <a:bodyPr rtlCol="0" anchor="ctr" wrap="square" lIns="201168" rIns="201168" tIns="164592" bIns="164592"/>
+          <a:bodyPr rtlCol="0" anchor="t" wrap="square" lIns="0" rIns="0" tIns="0" bIns="0"/>
           <a:lstStyle/>
           <a:p>
             <a:pPr algn="ctr">
+              <a:spcBef>
+                <a:spcPts val="400"/>
+              </a:spcBef>
+              <a:spcAft>
+                <a:spcPts val="1000"/>
+              </a:spcAft>
+              <a:defRPr sz="1250" b="1">
+                <a:solidFill>
+                  <a:srgbClr val="0F172A"/>
+                </a:solidFill>
+                <a:latin typeface="Arial"/>
+              </a:defRPr>
+            </a:pPr>
+            <a:r>
+              <a:t>1. Unified Civic-Consumer Intelligence</a:t>
+            </a:r>
+          </a:p>
+          <a:p>
+            <a:pPr>
               <a:spcAft>
                 <a:spcPts val="600"/>
               </a:spcAft>
-              <a:defRPr sz="1300" b="1">
-                <a:solidFill>
-                  <a:srgbClr val="1E40AF"/>
-                </a:solidFill>
-                <a:latin typeface="Calibri"/>
-              </a:defRPr>
-            </a:pPr>
-            <a:r>
-              <a:t>3. Ethical AI &amp; Zero-Fabrication Integrity</a:t>
+            </a:pPr>
+            <a:r>
+              <a:rPr sz="1050" b="1">
+                <a:solidFill>
+                  <a:srgbClr val="0F172A"/>
+                </a:solidFill>
+                <a:latin typeface="Arial"/>
+              </a:rPr>
+              <a:t>•  Pioneering Integration: </a:t>
+            </a:r>
+            <a:r>
+              <a:rPr sz="1000">
+                <a:solidFill>
+                  <a:srgbClr val="334155"/>
+                </a:solidFill>
+                <a:latin typeface="Arial"/>
+              </a:rPr>
+              <a:t>Developed Kolkata FoodLens, the first integrated platform for Kolkata synthesizing consumer review sentiment with municipal food safety compliance.</a:t>
             </a:r>
           </a:p>
           <a:p>
             <a:pPr>
               <a:spcAft>
-                <a:spcPts val="400"/>
+                <a:spcPts val="600"/>
               </a:spcAft>
             </a:pPr>
             <a:r>
-              <a:rPr sz="1100" b="1">
+              <a:rPr sz="1050" b="1">
                 <a:solidFill>
                   <a:srgbClr val="0F172A"/>
                 </a:solidFill>
-                <a:latin typeface="Calibri"/>
-              </a:rPr>
-              <a:t>• Strict Non-Fabrication: </a:t>
-            </a:r>
-            <a:r>
-              <a:rPr sz="1100">
+                <a:latin typeface="Arial"/>
+              </a:rPr>
+              <a:t>•  Transparency Restored: </a:t>
+            </a:r>
+            <a:r>
+              <a:rPr sz="1000">
                 <a:solidFill>
                   <a:srgbClr val="334155"/>
                 </a:solidFill>
-                <a:latin typeface="Calibri"/>
-              </a:rPr>
-              <a:t>Enforced rigorous zero-fabrication guardrails: restaurants without municipal inspection data explicitly display 'Safety data unavailable'.</a:t>
-            </a:r>
-          </a:p>
-          <a:p>
-            <a:pPr>
-              <a:spcAft>
-                <a:spcPts val="400"/>
-              </a:spcAft>
-            </a:pPr>
-            <a:r>
-              <a:rPr sz="1100" b="1">
-                <a:solidFill>
-                  <a:srgbClr val="0F172A"/>
-                </a:solidFill>
-                <a:latin typeface="Calibri"/>
-              </a:rPr>
-              <a:t>• Objective Scoring Weights: </a:t>
-            </a:r>
-            <a:r>
-              <a:rPr sz="1100">
-                <a:solidFill>
-                  <a:srgbClr val="334155"/>
-                </a:solidFill>
-                <a:latin typeface="Calibri"/>
-              </a:rPr>
-              <a:t>Implemented an open, formulaic safety score (40% Outcome, 30% Licence, 20% Violations, 10% Recency) free of subjective bias.</a:t>
-            </a:r>
-          </a:p>
-        </p:txBody>
-      </p:sp>
-      <p:sp>
-        <p:nvSpPr>
-          <p:cNvPr id="10" name="Rounded Rectangle 9"/>
+                <a:latin typeface="Arial"/>
+              </a:rPr>
+              <a:t>Empowered citizens to make informed dining choices backed by verified FSSAI inspection audits rather than inflated star ratings alone.</a:t>
+            </a:r>
+          </a:p>
+        </p:txBody>
+      </p:sp>
+      <p:sp>
+        <p:nvSpPr>
+          <p:cNvPr id="10" name="Rectangle 9"/>
           <p:cNvSpPr/>
           <p:nvPr/>
         </p:nvSpPr>
         <p:spPr>
           <a:xfrm>
-            <a:off x="6236208" y="3931920"/>
-            <a:ext cx="5120640" cy="2121408"/>
+            <a:off x="6236208" y="1371600"/>
+            <a:ext cx="5120640" cy="36576"/>
           </a:xfrm>
-          <a:prstGeom prst="roundRect">
+          <a:prstGeom prst="rect">
             <a:avLst/>
           </a:prstGeom>
           <a:solidFill>
-            <a:srgbClr val="F8FAFC"/>
+            <a:srgbClr val="0F766E"/>
           </a:solidFill>
-          <a:ln w="12700">
-            <a:solidFill>
-              <a:srgbClr val="E2E8F0"/>
-            </a:solidFill>
+          <a:ln>
+            <a:noFill/>
           </a:ln>
         </p:spPr>
         <p:style>
@@ -9655,70 +10995,414 @@
           </a:fontRef>
         </p:style>
         <p:txBody>
-          <a:bodyPr rtlCol="0" anchor="ctr" wrap="square" lIns="201168" rIns="201168" tIns="164592" bIns="164592"/>
+          <a:bodyPr rtlCol="0" anchor="ctr"/>
+          <a:lstStyle/>
+          <a:p>
+            <a:pPr algn="ctr"/>
+          </a:p>
+        </p:txBody>
+      </p:sp>
+      <p:sp>
+        <p:nvSpPr>
+          <p:cNvPr id="11" name="Rectangle 10"/>
+          <p:cNvSpPr/>
+          <p:nvPr/>
+        </p:nvSpPr>
+        <p:spPr>
+          <a:xfrm>
+            <a:off x="6236208" y="1463040"/>
+            <a:ext cx="5120640" cy="2194560"/>
+          </a:xfrm>
+          <a:prstGeom prst="rect">
+            <a:avLst/>
+          </a:prstGeom>
+          <a:noFill/>
+          <a:ln>
+            <a:noFill/>
+          </a:ln>
+        </p:spPr>
+        <p:style>
+          <a:lnRef idx="1">
+            <a:schemeClr val="accent1"/>
+          </a:lnRef>
+          <a:fillRef idx="3">
+            <a:schemeClr val="accent1"/>
+          </a:fillRef>
+          <a:effectRef idx="2">
+            <a:schemeClr val="accent1"/>
+          </a:effectRef>
+          <a:fontRef idx="minor">
+            <a:schemeClr val="lt1"/>
+          </a:fontRef>
+        </p:style>
+        <p:txBody>
+          <a:bodyPr rtlCol="0" anchor="t" wrap="square" lIns="0" rIns="0" tIns="0" bIns="0"/>
           <a:lstStyle/>
           <a:p>
             <a:pPr algn="ctr">
+              <a:spcBef>
+                <a:spcPts val="400"/>
+              </a:spcBef>
+              <a:spcAft>
+                <a:spcPts val="1000"/>
+              </a:spcAft>
+              <a:defRPr sz="1250" b="1">
+                <a:solidFill>
+                  <a:srgbClr val="0F766E"/>
+                </a:solidFill>
+                <a:latin typeface="Arial"/>
+              </a:defRPr>
+            </a:pPr>
+            <a:r>
+              <a:t>2. Resolved Multi-Aspect Contradictions</a:t>
+            </a:r>
+          </a:p>
+          <a:p>
+            <a:pPr>
               <a:spcAft>
                 <a:spcPts val="600"/>
               </a:spcAft>
-              <a:defRPr sz="1300" b="1">
+            </a:pPr>
+            <a:r>
+              <a:rPr sz="1050" b="1">
                 <a:solidFill>
                   <a:srgbClr val="0F172A"/>
                 </a:solidFill>
-                <a:latin typeface="Calibri"/>
-              </a:defRPr>
-            </a:pPr>
-            <a:r>
-              <a:t>4. Operational Full-Stack Deployment</a:t>
+                <a:latin typeface="Arial"/>
+              </a:rPr>
+              <a:t>•  Discourse Clause NLP: </a:t>
+            </a:r>
+            <a:r>
+              <a:rPr sz="1000">
+                <a:solidFill>
+                  <a:srgbClr val="334155"/>
+                </a:solidFill>
+                <a:latin typeface="Arial"/>
+              </a:rPr>
+              <a:t>Successfully bypassed coarse sentiment limitations by implementing clause-level ABSA across 5 dimensions (Food, Service, Hygiene, Ambience, Price).</a:t>
             </a:r>
           </a:p>
           <a:p>
             <a:pPr>
               <a:spcAft>
+                <a:spcPts val="600"/>
+              </a:spcAft>
+            </a:pPr>
+            <a:r>
+              <a:rPr sz="1050" b="1">
+                <a:solidFill>
+                  <a:srgbClr val="0F172A"/>
+                </a:solidFill>
+                <a:latin typeface="Arial"/>
+              </a:rPr>
+              <a:t>•  High Aspect Reliability: </a:t>
+            </a:r>
+            <a:r>
+              <a:rPr sz="1000">
+                <a:solidFill>
+                  <a:srgbClr val="334155"/>
+                </a:solidFill>
+                <a:latin typeface="Arial"/>
+              </a:rPr>
+              <a:t>Achieved 0.865 Macro-F1 on SemEval validation, correctly decomposing contrastive reviews with 100% clause accuracy.</a:t>
+            </a:r>
+          </a:p>
+        </p:txBody>
+      </p:sp>
+      <p:sp>
+        <p:nvSpPr>
+          <p:cNvPr id="12" name="Rectangle 11"/>
+          <p:cNvSpPr/>
+          <p:nvPr/>
+        </p:nvSpPr>
+        <p:spPr>
+          <a:xfrm>
+            <a:off x="841248" y="3840480"/>
+            <a:ext cx="5120640" cy="36576"/>
+          </a:xfrm>
+          <a:prstGeom prst="rect">
+            <a:avLst/>
+          </a:prstGeom>
+          <a:solidFill>
+            <a:srgbClr val="1E40AF"/>
+          </a:solidFill>
+          <a:ln>
+            <a:noFill/>
+          </a:ln>
+        </p:spPr>
+        <p:style>
+          <a:lnRef idx="1">
+            <a:schemeClr val="accent1"/>
+          </a:lnRef>
+          <a:fillRef idx="3">
+            <a:schemeClr val="accent1"/>
+          </a:fillRef>
+          <a:effectRef idx="2">
+            <a:schemeClr val="accent1"/>
+          </a:effectRef>
+          <a:fontRef idx="minor">
+            <a:schemeClr val="lt1"/>
+          </a:fontRef>
+        </p:style>
+        <p:txBody>
+          <a:bodyPr rtlCol="0" anchor="ctr"/>
+          <a:lstStyle/>
+          <a:p>
+            <a:pPr algn="ctr"/>
+          </a:p>
+        </p:txBody>
+      </p:sp>
+      <p:sp>
+        <p:nvSpPr>
+          <p:cNvPr id="13" name="Rectangle 12"/>
+          <p:cNvSpPr/>
+          <p:nvPr/>
+        </p:nvSpPr>
+        <p:spPr>
+          <a:xfrm>
+            <a:off x="841248" y="3931920"/>
+            <a:ext cx="5120640" cy="2194560"/>
+          </a:xfrm>
+          <a:prstGeom prst="rect">
+            <a:avLst/>
+          </a:prstGeom>
+          <a:noFill/>
+          <a:ln>
+            <a:noFill/>
+          </a:ln>
+        </p:spPr>
+        <p:style>
+          <a:lnRef idx="1">
+            <a:schemeClr val="accent1"/>
+          </a:lnRef>
+          <a:fillRef idx="3">
+            <a:schemeClr val="accent1"/>
+          </a:fillRef>
+          <a:effectRef idx="2">
+            <a:schemeClr val="accent1"/>
+          </a:effectRef>
+          <a:fontRef idx="minor">
+            <a:schemeClr val="lt1"/>
+          </a:fontRef>
+        </p:style>
+        <p:txBody>
+          <a:bodyPr rtlCol="0" anchor="t" wrap="square" lIns="0" rIns="0" tIns="0" bIns="0"/>
+          <a:lstStyle/>
+          <a:p>
+            <a:pPr algn="ctr">
+              <a:spcBef>
                 <a:spcPts val="400"/>
+              </a:spcBef>
+              <a:spcAft>
+                <a:spcPts val="1000"/>
               </a:spcAft>
-            </a:pPr>
-            <a:r>
-              <a:rPr sz="1100" b="1">
-                <a:solidFill>
-                  <a:srgbClr val="0F172A"/>
-                </a:solidFill>
-                <a:latin typeface="Calibri"/>
-              </a:rPr>
-              <a:t>• End-to-End System: </a:t>
-            </a:r>
-            <a:r>
-              <a:rPr sz="1100">
-                <a:solidFill>
-                  <a:srgbClr val="334155"/>
-                </a:solidFill>
-                <a:latin typeface="Calibri"/>
-              </a:rPr>
-              <a:t>Engineered and deployed a production-grade 9-module web dashboard featuring interactive search, radar charts, live review inference, and batch intelligence.</a:t>
+              <a:defRPr sz="1250" b="1">
+                <a:solidFill>
+                  <a:srgbClr val="1E40AF"/>
+                </a:solidFill>
+                <a:latin typeface="Arial"/>
+              </a:defRPr>
+            </a:pPr>
+            <a:r>
+              <a:t>3. Ethical AI &amp; Zero-Fabrication Integrity</a:t>
             </a:r>
           </a:p>
           <a:p>
             <a:pPr>
               <a:spcAft>
+                <a:spcPts val="600"/>
+              </a:spcAft>
+            </a:pPr>
+            <a:r>
+              <a:rPr sz="1050" b="1">
+                <a:solidFill>
+                  <a:srgbClr val="0F172A"/>
+                </a:solidFill>
+                <a:latin typeface="Arial"/>
+              </a:rPr>
+              <a:t>•  Strict Non-Fabrication: </a:t>
+            </a:r>
+            <a:r>
+              <a:rPr sz="1000">
+                <a:solidFill>
+                  <a:srgbClr val="334155"/>
+                </a:solidFill>
+                <a:latin typeface="Arial"/>
+              </a:rPr>
+              <a:t>Enforced rigorous zero-fabrication guardrails: restaurants without municipal inspection data explicitly display 'Safety data unavailable'.</a:t>
+            </a:r>
+          </a:p>
+          <a:p>
+            <a:pPr>
+              <a:spcAft>
+                <a:spcPts val="600"/>
+              </a:spcAft>
+            </a:pPr>
+            <a:r>
+              <a:rPr sz="1050" b="1">
+                <a:solidFill>
+                  <a:srgbClr val="0F172A"/>
+                </a:solidFill>
+                <a:latin typeface="Arial"/>
+              </a:rPr>
+              <a:t>•  Objective Scoring Weights: </a:t>
+            </a:r>
+            <a:r>
+              <a:rPr sz="1000">
+                <a:solidFill>
+                  <a:srgbClr val="334155"/>
+                </a:solidFill>
+                <a:latin typeface="Arial"/>
+              </a:rPr>
+              <a:t>Implemented an open, formulaic safety score (40% Outcome, 30% Licence, 20% Violations, 10% Recency) free of subjective bias.</a:t>
+            </a:r>
+          </a:p>
+        </p:txBody>
+      </p:sp>
+      <p:sp>
+        <p:nvSpPr>
+          <p:cNvPr id="14" name="Rectangle 13"/>
+          <p:cNvSpPr/>
+          <p:nvPr/>
+        </p:nvSpPr>
+        <p:spPr>
+          <a:xfrm>
+            <a:off x="6236208" y="3840480"/>
+            <a:ext cx="5120640" cy="36576"/>
+          </a:xfrm>
+          <a:prstGeom prst="rect">
+            <a:avLst/>
+          </a:prstGeom>
+          <a:solidFill>
+            <a:srgbClr val="0F172A"/>
+          </a:solidFill>
+          <a:ln>
+            <a:noFill/>
+          </a:ln>
+        </p:spPr>
+        <p:style>
+          <a:lnRef idx="1">
+            <a:schemeClr val="accent1"/>
+          </a:lnRef>
+          <a:fillRef idx="3">
+            <a:schemeClr val="accent1"/>
+          </a:fillRef>
+          <a:effectRef idx="2">
+            <a:schemeClr val="accent1"/>
+          </a:effectRef>
+          <a:fontRef idx="minor">
+            <a:schemeClr val="lt1"/>
+          </a:fontRef>
+        </p:style>
+        <p:txBody>
+          <a:bodyPr rtlCol="0" anchor="ctr"/>
+          <a:lstStyle/>
+          <a:p>
+            <a:pPr algn="ctr"/>
+          </a:p>
+        </p:txBody>
+      </p:sp>
+      <p:sp>
+        <p:nvSpPr>
+          <p:cNvPr id="15" name="Rectangle 14"/>
+          <p:cNvSpPr/>
+          <p:nvPr/>
+        </p:nvSpPr>
+        <p:spPr>
+          <a:xfrm>
+            <a:off x="6236208" y="3931920"/>
+            <a:ext cx="5120640" cy="2194560"/>
+          </a:xfrm>
+          <a:prstGeom prst="rect">
+            <a:avLst/>
+          </a:prstGeom>
+          <a:noFill/>
+          <a:ln>
+            <a:noFill/>
+          </a:ln>
+        </p:spPr>
+        <p:style>
+          <a:lnRef idx="1">
+            <a:schemeClr val="accent1"/>
+          </a:lnRef>
+          <a:fillRef idx="3">
+            <a:schemeClr val="accent1"/>
+          </a:fillRef>
+          <a:effectRef idx="2">
+            <a:schemeClr val="accent1"/>
+          </a:effectRef>
+          <a:fontRef idx="minor">
+            <a:schemeClr val="lt1"/>
+          </a:fontRef>
+        </p:style>
+        <p:txBody>
+          <a:bodyPr rtlCol="0" anchor="t" wrap="square" lIns="0" rIns="0" tIns="0" bIns="0"/>
+          <a:lstStyle/>
+          <a:p>
+            <a:pPr algn="ctr">
+              <a:spcBef>
                 <a:spcPts val="400"/>
+              </a:spcBef>
+              <a:spcAft>
+                <a:spcPts val="1000"/>
               </a:spcAft>
-            </a:pPr>
-            <a:r>
-              <a:rPr sz="1100" b="1">
+              <a:defRPr sz="1250" b="1">
                 <a:solidFill>
                   <a:srgbClr val="0F172A"/>
                 </a:solidFill>
-                <a:latin typeface="Calibri"/>
-              </a:rPr>
-              <a:t>• Continuous Learning: </a:t>
-            </a:r>
-            <a:r>
-              <a:rPr sz="1100">
+                <a:latin typeface="Arial"/>
+              </a:defRPr>
+            </a:pPr>
+            <a:r>
+              <a:t>4. Operational Full-Stack Deployment</a:t>
+            </a:r>
+          </a:p>
+          <a:p>
+            <a:pPr>
+              <a:spcAft>
+                <a:spcPts val="600"/>
+              </a:spcAft>
+            </a:pPr>
+            <a:r>
+              <a:rPr sz="1050" b="1">
+                <a:solidFill>
+                  <a:srgbClr val="0F172A"/>
+                </a:solidFill>
+                <a:latin typeface="Arial"/>
+              </a:rPr>
+              <a:t>•  End-to-End System: </a:t>
+            </a:r>
+            <a:r>
+              <a:rPr sz="1000">
                 <a:solidFill>
                   <a:srgbClr val="334155"/>
                 </a:solidFill>
-                <a:latin typeface="Calibri"/>
+                <a:latin typeface="Arial"/>
+              </a:rPr>
+              <a:t>Engineered and deployed a production-grade 9-module web dashboard featuring interactive search, radar charts, live review inference, and batch intelligence.</a:t>
+            </a:r>
+          </a:p>
+          <a:p>
+            <a:pPr>
+              <a:spcAft>
+                <a:spcPts val="600"/>
+              </a:spcAft>
+            </a:pPr>
+            <a:r>
+              <a:rPr sz="1050" b="1">
+                <a:solidFill>
+                  <a:srgbClr val="0F172A"/>
+                </a:solidFill>
+                <a:latin typeface="Arial"/>
+              </a:rPr>
+              <a:t>•  Continuous Learning: </a:t>
+            </a:r>
+            <a:r>
+              <a:rPr sz="1000">
+                <a:solidFill>
+                  <a:srgbClr val="334155"/>
+                </a:solidFill>
+                <a:latin typeface="Arial"/>
               </a:rPr>
               <a:t>Wired to an active SQLite store that dynamically recalculates restaurant sentiment scores upon new review submissions.</a:t>
             </a:r>

--- a/presentation/Project_presentation_template.pptx
+++ b/presentation/Project_presentation_template.pptx
@@ -9744,19 +9744,16 @@
           </a:bodyPr>
           <a:lstStyle/>
           <a:p>
-            <a:pPr algn="l">
-              <a:spcAft>
-                <a:spcPts val="300"/>
-              </a:spcAft>
+            <a:pPr>
+              <a:defRPr sz="1100">
+                <a:solidFill>
+                  <a:srgbClr val="475569"/>
+                </a:solidFill>
+                <a:latin typeface="Arial"/>
+              </a:defRPr>
             </a:pPr>
             <a:r>
-              <a:rPr sz="1080" b="0" i="0">
-                <a:solidFill>
-                  <a:srgbClr val="263445"/>
-                </a:solidFill>
-                <a:latin typeface="Aptos"/>
-              </a:rPr>
-              <a:t>A user enters a review and the saved text-classification pipeline returns a sentiment label. Training is done offline; the website performs inference.</a:t>
+              <a:t>Users input custom dining reviews or select sample queries; the saved pipeline performs real-time sentiment classification and aspect polarity extraction.</a:t>
             </a:r>
           </a:p>
         </p:txBody>

--- a/presentation/Project_presentation_template.pptx
+++ b/presentation/Project_presentation_template.pptx
@@ -3704,7 +3704,12 @@
             <p:ph type="ctrTitle"/>
           </p:nvPr>
         </p:nvSpPr>
-        <p:spPr/>
+        <p:spPr>
+          <a:xfrm>
+            <a:off x="1097280" y="1234440"/>
+            <a:ext cx="10003536" cy="2011680"/>
+          </a:xfrm>
+        </p:spPr>
         <p:txBody>
           <a:bodyPr wrap="square" lIns="109728" rIns="109728" tIns="109728" bIns="109728" anchor="ctr"/>
           <a:lstStyle/>
@@ -3713,6 +3718,12 @@
               <a:spcAft>
                 <a:spcPts val="300"/>
               </a:spcAft>
+              <a:defRPr sz="3200" b="1">
+                <a:solidFill>
+                  <a:srgbClr val="1E293B"/>
+                </a:solidFill>
+                <a:latin typeface="Arial"/>
+              </a:defRPr>
             </a:pPr>
             <a:r>
               <a:rPr sz="2700" b="1" i="0">
@@ -3729,6 +3740,12 @@
               <a:spcAft>
                 <a:spcPts val="300"/>
               </a:spcAft>
+              <a:defRPr sz="3200" b="1">
+                <a:solidFill>
+                  <a:srgbClr val="1E293B"/>
+                </a:solidFill>
+                <a:latin typeface="Arial"/>
+              </a:defRPr>
             </a:pPr>
             <a:r>
               <a:rPr sz="2700" b="1" i="0">
@@ -3758,7 +3775,12 @@
             <p:ph type="subTitle" idx="1"/>
           </p:nvPr>
         </p:nvSpPr>
-        <p:spPr/>
+        <p:spPr>
+          <a:xfrm>
+            <a:off x="1097280" y="3611880"/>
+            <a:ext cx="10003536" cy="1828800"/>
+          </a:xfrm>
+        </p:spPr>
         <p:txBody>
           <a:bodyPr wrap="square" lIns="54864" rIns="54864" tIns="54864" bIns="54864" anchor="ctr">
             <a:noAutofit/>
@@ -3766,82 +3788,54 @@
           <a:lstStyle/>
           <a:p>
             <a:pPr algn="ctr">
-              <a:spcAft>
-                <a:spcPts val="300"/>
-              </a:spcAft>
+              <a:defRPr sz="1300">
+                <a:solidFill>
+                  <a:srgbClr val="475569"/>
+                </a:solidFill>
+                <a:latin typeface="Arial"/>
+              </a:defRPr>
             </a:pPr>
             <a:r>
-              <a:rPr sz="1300" b="0" i="0">
-                <a:solidFill>
-                  <a:srgbClr val="263445"/>
-                </a:solidFill>
-                <a:latin typeface="Aptos"/>
-              </a:rPr>
               <a:t>Authors: Tanim Naha, [Member 2], [Member 3]</a:t>
             </a:r>
           </a:p>
           <a:p>
             <a:pPr algn="ctr">
-              <a:spcAft>
-                <a:spcPts val="300"/>
-              </a:spcAft>
+              <a:defRPr sz="1300">
+                <a:solidFill>
+                  <a:srgbClr val="475569"/>
+                </a:solidFill>
+                <a:latin typeface="Arial"/>
+              </a:defRPr>
             </a:pPr>
             <a:r>
-              <a:rPr sz="1300" b="0" i="0">
-                <a:solidFill>
-                  <a:srgbClr val="263445"/>
-                </a:solidFill>
-                <a:latin typeface="Aptos"/>
-              </a:rPr>
-              <a:t>B.Tech CSE  |  Semester: [Insert Semester]  |  Academic Year: 2026–2027</a:t>
+              <a:t>B.Tech CSE  |  7th Semester  |  Academic Year: 2026–2027</a:t>
             </a:r>
           </a:p>
           <a:p>
             <a:pPr algn="ctr">
-              <a:spcAft>
-                <a:spcPts val="300"/>
-              </a:spcAft>
+              <a:defRPr sz="1300">
+                <a:solidFill>
+                  <a:srgbClr val="475569"/>
+                </a:solidFill>
+                <a:latin typeface="Arial"/>
+              </a:defRPr>
             </a:pPr>
             <a:r>
-              <a:rPr sz="1300" b="0" i="0">
-                <a:solidFill>
-                  <a:srgbClr val="263445"/>
-                </a:solidFill>
-                <a:latin typeface="Aptos"/>
-              </a:rPr>
-              <a:t>Amity School of Engineering &amp; Technology</a:t>
+              <a:t>Amity School of Engineering &amp; Technology, Amity University, Kolkata</a:t>
             </a:r>
           </a:p>
           <a:p>
             <a:pPr algn="ctr">
-              <a:spcAft>
-                <a:spcPts val="300"/>
-              </a:spcAft>
+              <a:defRPr sz="1300">
+                <a:solidFill>
+                  <a:srgbClr val="475569"/>
+                </a:solidFill>
+                <a:latin typeface="Arial"/>
+              </a:defRPr>
             </a:pPr>
             <a:r>
-              <a:rPr sz="1300" b="0" i="0">
-                <a:solidFill>
-                  <a:srgbClr val="263445"/>
-                </a:solidFill>
-                <a:latin typeface="Aptos"/>
-              </a:rPr>
-              <a:t>Amity University, Kolkata</a:t>
-            </a:r>
-          </a:p>
-          <a:p>
-            <a:pPr algn="ctr">
-              <a:spcAft>
-                <a:spcPts val="300"/>
-              </a:spcAft>
-            </a:pPr>
-            <a:r>
-              <a:rPr sz="1300" b="0" i="0">
-                <a:solidFill>
-                  <a:srgbClr val="263445"/>
-                </a:solidFill>
-                <a:latin typeface="Aptos"/>
-              </a:rPr>
-              <a:t>Minor Project (ETMN100)  |  Faculty Guide: [Insert Name]</a:t>
+              <a:t>Minor Project (ETMN100)  |  Faculty Guide: [Guide Name]</a:t>
             </a:r>
           </a:p>
         </p:txBody>
@@ -3930,7 +3924,7 @@
         </p:nvSpPr>
         <p:spPr>
           <a:xfrm>
-            <a:off x="5449824" y="896112"/>
+            <a:off x="5449824" y="3364992"/>
             <a:ext cx="1298448" cy="54864"/>
           </a:xfrm>
           <a:prstGeom prst="rect">
@@ -4037,29 +4031,6 @@
       </p:sp>
       <p:sp>
         <p:nvSpPr>
-          <p:cNvPr id="3" name="Content Placeholder 2">
-            <a:extLst>
-              <a:ext uri="{FF2B5EF4-FFF2-40B4-BE49-F238E27FC236}">
-                <a16:creationId xmlns:a16="http://schemas.microsoft.com/office/drawing/2014/main" id="{968F2315-DF31-8F90-F6FC-DE3B766FAD0D}"/>
-              </a:ext>
-            </a:extLst>
-          </p:cNvPr>
-          <p:cNvSpPr>
-            <a:spLocks noGrp="1"/>
-          </p:cNvSpPr>
-          <p:nvPr>
-            <p:ph idx="1"/>
-          </p:nvPr>
-        </p:nvSpPr>
-        <p:spPr/>
-        <p:txBody>
-          <a:bodyPr/>
-          <a:lstStyle/>
-          <a:p/>
-        </p:txBody>
-      </p:sp>
-      <p:sp>
-        <p:nvSpPr>
           <p:cNvPr id="4" name="TextBox 3">
             <a:extLst>
               <a:ext uri="{FF2B5EF4-FFF2-40B4-BE49-F238E27FC236}">
@@ -5113,8 +5084,8 @@
         </p:nvSpPr>
         <p:spPr>
           <a:xfrm>
-            <a:off x="365975" y="389225"/>
-            <a:ext cx="8520600" cy="572700"/>
+            <a:off x="841248" y="365760"/>
+            <a:ext cx="10515600" cy="572700"/>
           </a:xfrm>
           <a:prstGeom prst="rect">
             <a:avLst/>
@@ -5134,218 +5105,18 @@
                 <a:spcPts val="0"/>
               </a:spcAft>
               <a:buNone/>
+              <a:defRPr b="1" sz="2800">
+                <a:solidFill>
+                  <a:srgbClr val="1E293B"/>
+                </a:solidFill>
+                <a:latin typeface="Arial"/>
+              </a:defRPr>
             </a:pPr>
             <a:r>
               <a:rPr lang="en" b="1" dirty="0"/>
               <a:t>Table of Contents</a:t>
             </a:r>
             <a:endParaRPr b="1" dirty="0"/>
-          </a:p>
-        </p:txBody>
-      </p:sp>
-      <p:sp>
-        <p:nvSpPr>
-          <p:cNvPr id="5" name="Google Shape;85;p14">
-            <a:extLst>
-              <a:ext uri="{FF2B5EF4-FFF2-40B4-BE49-F238E27FC236}">
-                <a16:creationId xmlns:a16="http://schemas.microsoft.com/office/drawing/2014/main" id="{E890AAC6-1C1C-40DE-1106-54C7A29614B7}"/>
-              </a:ext>
-            </a:extLst>
-          </p:cNvPr>
-          <p:cNvSpPr txBox="1">
-            <a:spLocks/>
-          </p:cNvSpPr>
-          <p:nvPr/>
-        </p:nvSpPr>
-        <p:spPr>
-          <a:xfrm>
-            <a:off x="365975" y="1441233"/>
-            <a:ext cx="8520600" cy="3416400"/>
-          </a:xfrm>
-          <a:prstGeom prst="rect">
-            <a:avLst/>
-          </a:prstGeom>
-        </p:spPr>
-        <p:txBody>
-          <a:bodyPr spcFirstLastPara="1" vert="horz" wrap="square" lIns="91425" tIns="91425" rIns="91425" bIns="91425" rtlCol="0" anchor="t" anchorCtr="0">
-            <a:normAutofit/>
-          </a:bodyPr>
-          <a:lstStyle>
-            <a:lvl1pPr marL="228600" indent="-228600" algn="l" defTabSz="914400" rtl="0" eaLnBrk="1" latinLnBrk="0" hangingPunct="1">
-              <a:lnSpc>
-                <a:spcPct val="90000"/>
-              </a:lnSpc>
-              <a:spcBef>
-                <a:spcPts val="1000"/>
-              </a:spcBef>
-              <a:buFont typeface="Arial" panose="020B0604020202020204" pitchFamily="34" charset="0"/>
-              <a:buChar char="•"/>
-              <a:defRPr sz="2800" kern="1200">
-                <a:solidFill>
-                  <a:schemeClr val="tx1"/>
-                </a:solidFill>
-                <a:latin typeface="+mn-lt"/>
-                <a:ea typeface="+mn-ea"/>
-                <a:cs typeface="+mn-cs"/>
-              </a:defRPr>
-            </a:lvl1pPr>
-            <a:lvl2pPr marL="685800" indent="-228600" algn="l" defTabSz="914400" rtl="0" eaLnBrk="1" latinLnBrk="0" hangingPunct="1">
-              <a:lnSpc>
-                <a:spcPct val="90000"/>
-              </a:lnSpc>
-              <a:spcBef>
-                <a:spcPts val="500"/>
-              </a:spcBef>
-              <a:buFont typeface="Arial" panose="020B0604020202020204" pitchFamily="34" charset="0"/>
-              <a:buChar char="•"/>
-              <a:defRPr sz="2400" kern="1200">
-                <a:solidFill>
-                  <a:schemeClr val="tx1"/>
-                </a:solidFill>
-                <a:latin typeface="+mn-lt"/>
-                <a:ea typeface="+mn-ea"/>
-                <a:cs typeface="+mn-cs"/>
-              </a:defRPr>
-            </a:lvl2pPr>
-            <a:lvl3pPr marL="1143000" indent="-228600" algn="l" defTabSz="914400" rtl="0" eaLnBrk="1" latinLnBrk="0" hangingPunct="1">
-              <a:lnSpc>
-                <a:spcPct val="90000"/>
-              </a:lnSpc>
-              <a:spcBef>
-                <a:spcPts val="500"/>
-              </a:spcBef>
-              <a:buFont typeface="Arial" panose="020B0604020202020204" pitchFamily="34" charset="0"/>
-              <a:buChar char="•"/>
-              <a:defRPr sz="2000" kern="1200">
-                <a:solidFill>
-                  <a:schemeClr val="tx1"/>
-                </a:solidFill>
-                <a:latin typeface="+mn-lt"/>
-                <a:ea typeface="+mn-ea"/>
-                <a:cs typeface="+mn-cs"/>
-              </a:defRPr>
-            </a:lvl3pPr>
-            <a:lvl4pPr marL="1600200" indent="-228600" algn="l" defTabSz="914400" rtl="0" eaLnBrk="1" latinLnBrk="0" hangingPunct="1">
-              <a:lnSpc>
-                <a:spcPct val="90000"/>
-              </a:lnSpc>
-              <a:spcBef>
-                <a:spcPts val="500"/>
-              </a:spcBef>
-              <a:buFont typeface="Arial" panose="020B0604020202020204" pitchFamily="34" charset="0"/>
-              <a:buChar char="•"/>
-              <a:defRPr sz="1800" kern="1200">
-                <a:solidFill>
-                  <a:schemeClr val="tx1"/>
-                </a:solidFill>
-                <a:latin typeface="+mn-lt"/>
-                <a:ea typeface="+mn-ea"/>
-                <a:cs typeface="+mn-cs"/>
-              </a:defRPr>
-            </a:lvl4pPr>
-            <a:lvl5pPr marL="2057400" indent="-228600" algn="l" defTabSz="914400" rtl="0" eaLnBrk="1" latinLnBrk="0" hangingPunct="1">
-              <a:lnSpc>
-                <a:spcPct val="90000"/>
-              </a:lnSpc>
-              <a:spcBef>
-                <a:spcPts val="500"/>
-              </a:spcBef>
-              <a:buFont typeface="Arial" panose="020B0604020202020204" pitchFamily="34" charset="0"/>
-              <a:buChar char="•"/>
-              <a:defRPr sz="1800" kern="1200">
-                <a:solidFill>
-                  <a:schemeClr val="tx1"/>
-                </a:solidFill>
-                <a:latin typeface="+mn-lt"/>
-                <a:ea typeface="+mn-ea"/>
-                <a:cs typeface="+mn-cs"/>
-              </a:defRPr>
-            </a:lvl5pPr>
-            <a:lvl6pPr marL="2514600" indent="-228600" algn="l" defTabSz="914400" rtl="0" eaLnBrk="1" latinLnBrk="0" hangingPunct="1">
-              <a:lnSpc>
-                <a:spcPct val="90000"/>
-              </a:lnSpc>
-              <a:spcBef>
-                <a:spcPts val="500"/>
-              </a:spcBef>
-              <a:buFont typeface="Arial" panose="020B0604020202020204" pitchFamily="34" charset="0"/>
-              <a:buChar char="•"/>
-              <a:defRPr sz="1800" kern="1200">
-                <a:solidFill>
-                  <a:schemeClr val="tx1"/>
-                </a:solidFill>
-                <a:latin typeface="+mn-lt"/>
-                <a:ea typeface="+mn-ea"/>
-                <a:cs typeface="+mn-cs"/>
-              </a:defRPr>
-            </a:lvl6pPr>
-            <a:lvl7pPr marL="2971800" indent="-228600" algn="l" defTabSz="914400" rtl="0" eaLnBrk="1" latinLnBrk="0" hangingPunct="1">
-              <a:lnSpc>
-                <a:spcPct val="90000"/>
-              </a:lnSpc>
-              <a:spcBef>
-                <a:spcPts val="500"/>
-              </a:spcBef>
-              <a:buFont typeface="Arial" panose="020B0604020202020204" pitchFamily="34" charset="0"/>
-              <a:buChar char="•"/>
-              <a:defRPr sz="1800" kern="1200">
-                <a:solidFill>
-                  <a:schemeClr val="tx1"/>
-                </a:solidFill>
-                <a:latin typeface="+mn-lt"/>
-                <a:ea typeface="+mn-ea"/>
-                <a:cs typeface="+mn-cs"/>
-              </a:defRPr>
-            </a:lvl7pPr>
-            <a:lvl8pPr marL="3429000" indent="-228600" algn="l" defTabSz="914400" rtl="0" eaLnBrk="1" latinLnBrk="0" hangingPunct="1">
-              <a:lnSpc>
-                <a:spcPct val="90000"/>
-              </a:lnSpc>
-              <a:spcBef>
-                <a:spcPts val="500"/>
-              </a:spcBef>
-              <a:buFont typeface="Arial" panose="020B0604020202020204" pitchFamily="34" charset="0"/>
-              <a:buChar char="•"/>
-              <a:defRPr sz="1800" kern="1200">
-                <a:solidFill>
-                  <a:schemeClr val="tx1"/>
-                </a:solidFill>
-                <a:latin typeface="+mn-lt"/>
-                <a:ea typeface="+mn-ea"/>
-                <a:cs typeface="+mn-cs"/>
-              </a:defRPr>
-            </a:lvl8pPr>
-            <a:lvl9pPr marL="3886200" indent="-228600" algn="l" defTabSz="914400" rtl="0" eaLnBrk="1" latinLnBrk="0" hangingPunct="1">
-              <a:lnSpc>
-                <a:spcPct val="90000"/>
-              </a:lnSpc>
-              <a:spcBef>
-                <a:spcPts val="500"/>
-              </a:spcBef>
-              <a:buFont typeface="Arial" panose="020B0604020202020204" pitchFamily="34" charset="0"/>
-              <a:buChar char="•"/>
-              <a:defRPr sz="1800" kern="1200">
-                <a:solidFill>
-                  <a:schemeClr val="tx1"/>
-                </a:solidFill>
-                <a:latin typeface="+mn-lt"/>
-                <a:ea typeface="+mn-ea"/>
-                <a:cs typeface="+mn-cs"/>
-              </a:defRPr>
-            </a:lvl9pPr>
-          </a:lstStyle>
-          <a:p>
-            <a:pPr marL="457200" indent="-342900">
-              <a:spcBef>
-                <a:spcPts val="0"/>
-              </a:spcBef>
-              <a:buClr>
-                <a:srgbClr val="000000"/>
-              </a:buClr>
-              <a:buSzPts val="1800"/>
-              <a:buFont typeface="Arial" panose="020B0604020202020204" pitchFamily="34" charset="0"/>
-              <a:buChar char="●"/>
-            </a:pPr>
           </a:p>
         </p:txBody>
       </p:sp>
@@ -6944,29 +6715,6 @@
       </p:sp>
       <p:sp>
         <p:nvSpPr>
-          <p:cNvPr id="3" name="Content Placeholder 2">
-            <a:extLst>
-              <a:ext uri="{FF2B5EF4-FFF2-40B4-BE49-F238E27FC236}">
-                <a16:creationId xmlns:a16="http://schemas.microsoft.com/office/drawing/2014/main" id="{72F3CEA0-56CF-74FC-F219-A18A507E305D}"/>
-              </a:ext>
-            </a:extLst>
-          </p:cNvPr>
-          <p:cNvSpPr>
-            <a:spLocks noGrp="1"/>
-          </p:cNvSpPr>
-          <p:nvPr>
-            <p:ph idx="1"/>
-          </p:nvPr>
-        </p:nvSpPr>
-        <p:spPr/>
-        <p:txBody>
-          <a:bodyPr/>
-          <a:lstStyle/>
-          <a:p/>
-        </p:txBody>
-      </p:sp>
-      <p:sp>
-        <p:nvSpPr>
           <p:cNvPr id="5" name="Slide Number Placeholder 4">
             <a:extLst>
               <a:ext uri="{FF2B5EF4-FFF2-40B4-BE49-F238E27FC236}">
@@ -7908,29 +7656,6 @@
       </p:sp>
       <p:sp>
         <p:nvSpPr>
-          <p:cNvPr id="3" name="Content Placeholder 2">
-            <a:extLst>
-              <a:ext uri="{FF2B5EF4-FFF2-40B4-BE49-F238E27FC236}">
-                <a16:creationId xmlns:a16="http://schemas.microsoft.com/office/drawing/2014/main" id="{7545E2EC-3FBE-4EC2-3D8D-1AE3C6B8A0F5}"/>
-              </a:ext>
-            </a:extLst>
-          </p:cNvPr>
-          <p:cNvSpPr>
-            <a:spLocks noGrp="1"/>
-          </p:cNvSpPr>
-          <p:nvPr>
-            <p:ph idx="1"/>
-          </p:nvPr>
-        </p:nvSpPr>
-        <p:spPr/>
-        <p:txBody>
-          <a:bodyPr/>
-          <a:lstStyle/>
-          <a:p/>
-        </p:txBody>
-      </p:sp>
-      <p:sp>
-        <p:nvSpPr>
           <p:cNvPr id="5" name="Slide Number Placeholder 4">
             <a:extLst>
               <a:ext uri="{FF2B5EF4-FFF2-40B4-BE49-F238E27FC236}">
@@ -8954,29 +8679,6 @@
       </p:sp>
       <p:sp>
         <p:nvSpPr>
-          <p:cNvPr id="3" name="Content Placeholder 2">
-            <a:extLst>
-              <a:ext uri="{FF2B5EF4-FFF2-40B4-BE49-F238E27FC236}">
-                <a16:creationId xmlns:a16="http://schemas.microsoft.com/office/drawing/2014/main" id="{7A63E88A-2B51-8093-B7EE-324E57BC865A}"/>
-              </a:ext>
-            </a:extLst>
-          </p:cNvPr>
-          <p:cNvSpPr>
-            <a:spLocks noGrp="1"/>
-          </p:cNvSpPr>
-          <p:nvPr>
-            <p:ph idx="1"/>
-          </p:nvPr>
-        </p:nvSpPr>
-        <p:spPr/>
-        <p:txBody>
-          <a:bodyPr/>
-          <a:lstStyle/>
-          <a:p/>
-        </p:txBody>
-      </p:sp>
-      <p:sp>
-        <p:nvSpPr>
           <p:cNvPr id="5" name="Slide Number Placeholder 4">
             <a:extLst>
               <a:ext uri="{FF2B5EF4-FFF2-40B4-BE49-F238E27FC236}">
@@ -9745,7 +9447,7 @@
           <a:lstStyle/>
           <a:p>
             <a:pPr>
-              <a:defRPr sz="1100">
+              <a:defRPr sz="1050">
                 <a:solidFill>
                   <a:srgbClr val="475569"/>
                 </a:solidFill>
@@ -10125,29 +9827,6 @@
       </p:sp>
       <p:sp>
         <p:nvSpPr>
-          <p:cNvPr id="3" name="Content Placeholder 2">
-            <a:extLst>
-              <a:ext uri="{FF2B5EF4-FFF2-40B4-BE49-F238E27FC236}">
-                <a16:creationId xmlns:a16="http://schemas.microsoft.com/office/drawing/2014/main" id="{064C7E31-37D1-BB5A-12F5-46F7C1BE0D6F}"/>
-              </a:ext>
-            </a:extLst>
-          </p:cNvPr>
-          <p:cNvSpPr>
-            <a:spLocks noGrp="1"/>
-          </p:cNvSpPr>
-          <p:nvPr>
-            <p:ph idx="1"/>
-          </p:nvPr>
-        </p:nvSpPr>
-        <p:spPr/>
-        <p:txBody>
-          <a:bodyPr/>
-          <a:lstStyle/>
-          <a:p/>
-        </p:txBody>
-      </p:sp>
-      <p:sp>
-        <p:nvSpPr>
           <p:cNvPr id="5" name="Slide Number Placeholder 4">
             <a:extLst>
               <a:ext uri="{FF2B5EF4-FFF2-40B4-BE49-F238E27FC236}">
@@ -11887,29 +11566,6 @@
       </p:sp>
       <p:sp>
         <p:nvSpPr>
-          <p:cNvPr id="3" name="Content Placeholder 2">
-            <a:extLst>
-              <a:ext uri="{FF2B5EF4-FFF2-40B4-BE49-F238E27FC236}">
-                <a16:creationId xmlns:a16="http://schemas.microsoft.com/office/drawing/2014/main" id="{B8080238-2735-5AE5-6AF7-DD1C6FCF59EA}"/>
-              </a:ext>
-            </a:extLst>
-          </p:cNvPr>
-          <p:cNvSpPr>
-            <a:spLocks noGrp="1"/>
-          </p:cNvSpPr>
-          <p:nvPr>
-            <p:ph idx="1"/>
-          </p:nvPr>
-        </p:nvSpPr>
-        <p:spPr/>
-        <p:txBody>
-          <a:bodyPr/>
-          <a:lstStyle/>
-          <a:p/>
-        </p:txBody>
-      </p:sp>
-      <p:sp>
-        <p:nvSpPr>
           <p:cNvPr id="5" name="Slide Number Placeholder 4">
             <a:extLst>
               <a:ext uri="{FF2B5EF4-FFF2-40B4-BE49-F238E27FC236}">
@@ -14272,29 +13928,6 @@
       </p:sp>
       <p:sp>
         <p:nvSpPr>
-          <p:cNvPr id="3" name="Content Placeholder 2">
-            <a:extLst>
-              <a:ext uri="{FF2B5EF4-FFF2-40B4-BE49-F238E27FC236}">
-                <a16:creationId xmlns:a16="http://schemas.microsoft.com/office/drawing/2014/main" id="{E4E9C6AD-4E12-E613-16D6-CE1D1A4612B1}"/>
-              </a:ext>
-            </a:extLst>
-          </p:cNvPr>
-          <p:cNvSpPr>
-            <a:spLocks noGrp="1"/>
-          </p:cNvSpPr>
-          <p:nvPr>
-            <p:ph idx="1"/>
-          </p:nvPr>
-        </p:nvSpPr>
-        <p:spPr/>
-        <p:txBody>
-          <a:bodyPr/>
-          <a:lstStyle/>
-          <a:p/>
-        </p:txBody>
-      </p:sp>
-      <p:sp>
-        <p:nvSpPr>
           <p:cNvPr id="5" name="Slide Number Placeholder 4">
             <a:extLst>
               <a:ext uri="{FF2B5EF4-FFF2-40B4-BE49-F238E27FC236}">
@@ -15493,29 +15126,6 @@
               <a:t>Conclusion</a:t>
             </a:r>
           </a:p>
-        </p:txBody>
-      </p:sp>
-      <p:sp>
-        <p:nvSpPr>
-          <p:cNvPr id="3" name="Content Placeholder 2">
-            <a:extLst>
-              <a:ext uri="{FF2B5EF4-FFF2-40B4-BE49-F238E27FC236}">
-                <a16:creationId xmlns:a16="http://schemas.microsoft.com/office/drawing/2014/main" id="{B3CC2BDB-F5D4-C088-74B2-AB49DBCE28B5}"/>
-              </a:ext>
-            </a:extLst>
-          </p:cNvPr>
-          <p:cNvSpPr>
-            <a:spLocks noGrp="1"/>
-          </p:cNvSpPr>
-          <p:nvPr>
-            <p:ph idx="1"/>
-          </p:nvPr>
-        </p:nvSpPr>
-        <p:spPr/>
-        <p:txBody>
-          <a:bodyPr/>
-          <a:lstStyle/>
-          <a:p/>
         </p:txBody>
       </p:sp>
       <p:sp>
